--- a/deck/proof-of-track-record-talk.pptx
+++ b/deck/proof-of-track-record-talk.pptx
@@ -16,6 +16,7 @@
     <p:sldId id="264" r:id="rId15"/>
     <p:sldId id="265" r:id="rId16"/>
     <p:sldId id="266" r:id="rId17"/>
+    <p:sldId id="267" r:id="rId18"/>
   </p:sldIdLst>
   <p:sldSz cx="12191695" cy="6858000" type="screen4x3"/>
   <p:notesSz cx="6858000" cy="9144000"/>
@@ -3254,7 +3255,7 @@
                 </a:solidFill>
                 <a:latin typeface="Apple SD Gothic Neo"/>
               </a:rPr>
-              <a:t>거래 전에 전략을 커밋한다. 거래 후에 결과를 증명한다. 둘 다 고칠 수 없다.</a:t>
+              <a:t>거래 전 전략 커밋  ·  거래 후 결과 증명  ·  둘 다 수정 불가</a:t>
             </a:r>
           </a:p>
         </p:txBody>
@@ -3368,7 +3369,7 @@
         </p:nvSpPr>
         <p:spPr>
           <a:xfrm>
-            <a:off x="640080" y="411480"/>
+            <a:off x="914400" y="731520"/>
             <a:ext cx="7315200" cy="320040"/>
           </a:xfrm>
           <a:prstGeom prst="rect">
@@ -3394,7 +3395,7 @@
                 </a:solidFill>
                 <a:latin typeface="Apple SD Gothic Neo"/>
               </a:rPr>
-              <a:t>실제로 동작한다</a:t>
+              <a:t>Midnight 활용</a:t>
             </a:r>
           </a:p>
         </p:txBody>
@@ -3407,8 +3408,8 @@
         </p:nvSpPr>
         <p:spPr>
           <a:xfrm>
-            <a:off x="640080" y="777240"/>
-            <a:ext cx="10972800" cy="548640"/>
+            <a:off x="914400" y="1143000"/>
+            <a:ext cx="10332720" cy="1280160"/>
           </a:xfrm>
           <a:prstGeom prst="rect">
             <a:avLst/>
@@ -3427,20 +3428,75 @@
               </a:lnSpc>
             </a:pPr>
             <a:r>
-              <a:rPr sz="3000" b="1">
+              <a:rPr sz="3400" b="1">
                 <a:solidFill>
                   <a:srgbClr val="ECF1F7"/>
                 </a:solidFill>
                 <a:latin typeface="Apple SD Gothic Neo"/>
               </a:rPr>
-              <a:t>Midnight Preview 공개 테스트넷</a:t>
+              <a:t>타입 검사가 강제하는</a:t>
+            </a:r>
+          </a:p>
+          <a:p>
+            <a:pPr algn="l">
+              <a:lnSpc>
+                <a:spcPct val="125000"/>
+              </a:lnSpc>
+            </a:pPr>
+            <a:r>
+              <a:rPr sz="3400" b="1">
+                <a:solidFill>
+                  <a:srgbClr val="ECF1F7"/>
+                </a:solidFill>
+                <a:latin typeface="Apple SD Gothic Neo"/>
+              </a:rPr>
+              <a:t>프라이버시</a:t>
+            </a:r>
+          </a:p>
+        </p:txBody>
+      </p:sp>
+      <p:sp>
+        <p:nvSpPr>
+          <p:cNvPr id="5" name="TextBox 4"/>
+          <p:cNvSpPr txBox="1"/>
+          <p:nvPr/>
+        </p:nvSpPr>
+        <p:spPr>
+          <a:xfrm>
+            <a:off x="914400" y="2606040"/>
+            <a:ext cx="10332720" cy="365760"/>
+          </a:xfrm>
+          <a:prstGeom prst="rect">
+            <a:avLst/>
+          </a:prstGeom>
+          <a:noFill/>
+        </p:spPr>
+        <p:txBody>
+          <a:bodyPr wrap="square" lIns="0" rIns="0" tIns="0" bIns="0">
+            <a:spAutoFit/>
+          </a:bodyPr>
+          <a:lstStyle/>
+          <a:p>
+            <a:pPr algn="l">
+              <a:lnSpc>
+                <a:spcPct val="125000"/>
+              </a:lnSpc>
+            </a:pPr>
+            <a:r>
+              <a:rPr sz="1600" b="0">
+                <a:solidFill>
+                  <a:srgbClr val="8B9AAF"/>
+                </a:solidFill>
+                <a:latin typeface="Apple SD Gothic Neo"/>
+              </a:rPr>
+              <a:t>disclose() 하나를 뺐을 때의 컴파일 결과</a:t>
             </a:r>
           </a:p>
         </p:txBody>
       </p:sp>
       <p:pic>
         <p:nvPicPr>
-          <p:cNvPr id="5" name="Picture 4" descr="onchain.png"/>
+          <p:cNvPr id="6" name="Picture 5" descr="cap-disclose.png"/>
           <p:cNvPicPr>
             <a:picLocks noChangeAspect="1"/>
           </p:cNvPicPr>
@@ -3454,8 +3510,8 @@
         </p:blipFill>
         <p:spPr>
           <a:xfrm>
-            <a:off x="1036167" y="1463040"/>
-            <a:ext cx="10119360" cy="2926080"/>
+            <a:off x="914400" y="2971800"/>
+            <a:ext cx="9692640" cy="2520086"/>
           </a:xfrm>
           <a:prstGeom prst="rect">
             <a:avLst/>
@@ -3464,14 +3520,14 @@
       </p:pic>
       <p:sp>
         <p:nvSpPr>
-          <p:cNvPr id="6" name="TextBox 5"/>
+          <p:cNvPr id="7" name="TextBox 6"/>
           <p:cNvSpPr txBox="1"/>
           <p:nvPr/>
         </p:nvSpPr>
         <p:spPr>
           <a:xfrm>
-            <a:off x="640080" y="4572000"/>
-            <a:ext cx="10972800" cy="457200"/>
+            <a:off x="914400" y="5760720"/>
+            <a:ext cx="10332720" cy="457200"/>
           </a:xfrm>
           <a:prstGeom prst="rect">
             <a:avLst/>
@@ -3490,68 +3546,13 @@
               </a:lnSpc>
             </a:pPr>
             <a:r>
-              <a:rPr sz="2100" b="1">
+              <a:rPr sz="1700" b="0">
                 <a:solidFill>
                   <a:srgbClr val="5EE0B0"/>
                 </a:solidFill>
                 <a:latin typeface="Apple SD Gothic Neo"/>
               </a:rPr>
-              <a:t>원장에는 커밋만 있다. NAV 값은 체인에 가지 않는다.</a:t>
-            </a:r>
-          </a:p>
-        </p:txBody>
-      </p:sp>
-      <p:sp>
-        <p:nvSpPr>
-          <p:cNvPr id="7" name="TextBox 6"/>
-          <p:cNvSpPr txBox="1"/>
-          <p:nvPr/>
-        </p:nvSpPr>
-        <p:spPr>
-          <a:xfrm>
-            <a:off x="640080" y="5166360"/>
-            <a:ext cx="10972800" cy="914400"/>
-          </a:xfrm>
-          <a:prstGeom prst="rect">
-            <a:avLst/>
-          </a:prstGeom>
-          <a:noFill/>
-        </p:spPr>
-        <p:txBody>
-          <a:bodyPr wrap="square" lIns="0" rIns="0" tIns="0" bIns="0">
-            <a:spAutoFit/>
-          </a:bodyPr>
-          <a:lstStyle/>
-          <a:p>
-            <a:pPr algn="l">
-              <a:lnSpc>
-                <a:spcPct val="125000"/>
-              </a:lnSpc>
-            </a:pPr>
-            <a:r>
-              <a:rPr sz="1600" b="0">
-                <a:solidFill>
-                  <a:srgbClr val="8B9AAF"/>
-                </a:solidFill>
-                <a:latin typeface="Apple SD Gothic Neo"/>
-              </a:rPr>
-              <a:t>증언된 값은 실제 바이낸스 선물 계좌 잔고다. Primus 공증인이 거래소 TLS 세션에서</a:t>
-            </a:r>
-          </a:p>
-          <a:p>
-            <a:pPr algn="l">
-              <a:lnSpc>
-                <a:spcPct val="125000"/>
-              </a:lnSpc>
-            </a:pPr>
-            <a:r>
-              <a:rPr sz="1600" b="0">
-                <a:solidFill>
-                  <a:srgbClr val="8B9AAF"/>
-                </a:solidFill>
-                <a:latin typeface="Apple SD Gothic Neo"/>
-              </a:rPr>
-              <a:t>직접 읽었다. 자기 신고가 아니다.</a:t>
+              <a:t>파일, 줄, 프로그램 경로까지 지목  ·  개발 중 이렇게 잡힌 누락 2건</a:t>
             </a:r>
           </a:p>
         </p:txBody>
@@ -3626,7 +3627,7 @@
         </p:nvSpPr>
         <p:spPr>
           <a:xfrm>
-            <a:off x="914400" y="731520"/>
+            <a:off x="640080" y="411480"/>
             <a:ext cx="7315200" cy="320040"/>
           </a:xfrm>
           <a:prstGeom prst="rect">
@@ -3652,7 +3653,7 @@
                 </a:solidFill>
                 <a:latin typeface="Apple SD Gothic Neo"/>
               </a:rPr>
-              <a:t>못 하는 것, 그리고 직접 확인</a:t>
+              <a:t>실제 동작</a:t>
             </a:r>
           </a:p>
         </p:txBody>
@@ -3665,8 +3666,8 @@
         </p:nvSpPr>
         <p:spPr>
           <a:xfrm>
-            <a:off x="914400" y="1143000"/>
-            <a:ext cx="10332720" cy="1280160"/>
+            <a:off x="640080" y="777240"/>
+            <a:ext cx="10972800" cy="548640"/>
           </a:xfrm>
           <a:prstGeom prst="rect">
             <a:avLst/>
@@ -3685,43 +3686,51 @@
               </a:lnSpc>
             </a:pPr>
             <a:r>
-              <a:rPr sz="3400" b="1">
+              <a:rPr sz="3000" b="1">
                 <a:solidFill>
                   <a:srgbClr val="ECF1F7"/>
                 </a:solidFill>
                 <a:latin typeface="Apple SD Gothic Neo"/>
               </a:rPr>
-              <a:t>신뢰 가정은 사라지지 않았다.</a:t>
-            </a:r>
-          </a:p>
-          <a:p>
-            <a:pPr algn="l">
-              <a:lnSpc>
-                <a:spcPct val="125000"/>
-              </a:lnSpc>
-            </a:pPr>
-            <a:r>
-              <a:rPr sz="3400" b="1">
-                <a:solidFill>
-                  <a:srgbClr val="ECF1F7"/>
-                </a:solidFill>
-                <a:latin typeface="Apple SD Gothic Neo"/>
-              </a:rPr>
-              <a:t>옮겼을 뿐이다.</a:t>
-            </a:r>
-          </a:p>
-        </p:txBody>
-      </p:sp>
-      <p:sp>
-        <p:nvSpPr>
-          <p:cNvPr id="5" name="TextBox 4"/>
+              <a:t>Midnight Preview 공개 테스트넷</a:t>
+            </a:r>
+          </a:p>
+        </p:txBody>
+      </p:sp>
+      <p:pic>
+        <p:nvPicPr>
+          <p:cNvPr id="5" name="Picture 4" descr="onchain.png"/>
+          <p:cNvPicPr>
+            <a:picLocks noChangeAspect="1"/>
+          </p:cNvPicPr>
+          <p:nvPr/>
+        </p:nvPicPr>
+        <p:blipFill>
+          <a:blip r:embed="rId2"/>
+          <a:stretch>
+            <a:fillRect/>
+          </a:stretch>
+        </p:blipFill>
+        <p:spPr>
+          <a:xfrm>
+            <a:off x="1036167" y="1463040"/>
+            <a:ext cx="10119360" cy="2926080"/>
+          </a:xfrm>
+          <a:prstGeom prst="rect">
+            <a:avLst/>
+          </a:prstGeom>
+        </p:spPr>
+      </p:pic>
+      <p:sp>
+        <p:nvSpPr>
+          <p:cNvPr id="6" name="TextBox 5"/>
           <p:cNvSpPr txBox="1"/>
           <p:nvPr/>
         </p:nvSpPr>
         <p:spPr>
           <a:xfrm>
-            <a:off x="914400" y="2743200"/>
-            <a:ext cx="10332720" cy="365760"/>
+            <a:off x="640080" y="4572000"/>
+            <a:ext cx="10972800" cy="457200"/>
           </a:xfrm>
           <a:prstGeom prst="rect">
             <a:avLst/>
@@ -3740,27 +3749,27 @@
               </a:lnSpc>
             </a:pPr>
             <a:r>
-              <a:rPr sz="1900" b="1">
-                <a:solidFill>
-                  <a:srgbClr val="E8B45C"/>
-                </a:solidFill>
-                <a:latin typeface="Apple SD Gothic Neo"/>
-              </a:rPr>
-              <a:t>공증인</a:t>
-            </a:r>
-          </a:p>
-        </p:txBody>
-      </p:sp>
-      <p:sp>
-        <p:nvSpPr>
-          <p:cNvPr id="6" name="TextBox 5"/>
+              <a:rPr sz="2100" b="1">
+                <a:solidFill>
+                  <a:srgbClr val="5EE0B0"/>
+                </a:solidFill>
+                <a:latin typeface="Apple SD Gothic Neo"/>
+              </a:rPr>
+              <a:t>원장에는 커밋만  ·  NAV 값은 체인 밖</a:t>
+            </a:r>
+          </a:p>
+        </p:txBody>
+      </p:sp>
+      <p:sp>
+        <p:nvSpPr>
+          <p:cNvPr id="7" name="TextBox 6"/>
           <p:cNvSpPr txBox="1"/>
           <p:nvPr/>
         </p:nvSpPr>
         <p:spPr>
           <a:xfrm>
-            <a:off x="914400" y="3154680"/>
-            <a:ext cx="10332720" cy="457200"/>
+            <a:off x="640080" y="5166360"/>
+            <a:ext cx="10972800" cy="914400"/>
           </a:xfrm>
           <a:prstGeom prst="rect">
             <a:avLst/>
@@ -3779,27 +3788,105 @@
               </a:lnSpc>
             </a:pPr>
             <a:r>
-              <a:rPr sz="1800" b="0">
+              <a:rPr sz="1600" b="0">
                 <a:solidFill>
                   <a:srgbClr val="8B9AAF"/>
                 </a:solidFill>
                 <a:latin typeface="Apple SD Gothic Neo"/>
               </a:rPr>
-              <a:t>트레이더 대신 Primus 공증인 그룹과 TLS 를 믿는다. 분산돼 있어 낫지만, 가정은 가정이다.</a:t>
-            </a:r>
-          </a:p>
-        </p:txBody>
-      </p:sp>
-      <p:sp>
-        <p:nvSpPr>
-          <p:cNvPr id="7" name="TextBox 6"/>
+              <a:t>증언된 값은 실제 바이낸스 선물 계좌 잔고</a:t>
+            </a:r>
+          </a:p>
+          <a:p>
+            <a:pPr algn="l">
+              <a:lnSpc>
+                <a:spcPct val="125000"/>
+              </a:lnSpc>
+            </a:pPr>
+            <a:r>
+              <a:rPr sz="1600" b="0">
+                <a:solidFill>
+                  <a:srgbClr val="8B9AAF"/>
+                </a:solidFill>
+                <a:latin typeface="Apple SD Gothic Neo"/>
+              </a:rPr>
+              <a:t>Primus 공증인이 거래소 TLS 세션에서 직접 읽은 값, 자기 신고 아님</a:t>
+            </a:r>
+          </a:p>
+        </p:txBody>
+      </p:sp>
+    </p:spTree>
+  </p:cSld>
+  <p:clrMapOvr>
+    <a:masterClrMapping/>
+  </p:clrMapOvr>
+</p:sld>
+</file>
+
+<file path=ppt/slides/slide12.xml><?xml version="1.0" encoding="utf-8"?>
+<p:sld xmlns:a="http://schemas.openxmlformats.org/drawingml/2006/main" xmlns:p="http://schemas.openxmlformats.org/presentationml/2006/main" xmlns:r="http://schemas.openxmlformats.org/officeDocument/2006/relationships">
+  <p:cSld>
+    <p:spTree>
+      <p:nvGrpSpPr>
+        <p:cNvPr id="1" name=""/>
+        <p:cNvGrpSpPr/>
+        <p:nvPr/>
+      </p:nvGrpSpPr>
+      <p:grpSpPr/>
+      <p:sp>
+        <p:nvSpPr>
+          <p:cNvPr id="2" name="Rectangle 1"/>
+          <p:cNvSpPr/>
+          <p:nvPr/>
+        </p:nvSpPr>
+        <p:spPr>
+          <a:xfrm>
+            <a:off x="0" y="0"/>
+            <a:ext cx="12191695" cy="6858000"/>
+          </a:xfrm>
+          <a:prstGeom prst="rect">
+            <a:avLst/>
+          </a:prstGeom>
+          <a:solidFill>
+            <a:srgbClr val="0C111B"/>
+          </a:solidFill>
+          <a:ln>
+            <a:noFill/>
+          </a:ln>
+          <a:effectLst/>
+        </p:spPr>
+        <p:style>
+          <a:lnRef idx="1">
+            <a:schemeClr val="accent1"/>
+          </a:lnRef>
+          <a:fillRef idx="3">
+            <a:schemeClr val="accent1"/>
+          </a:fillRef>
+          <a:effectRef idx="2">
+            <a:schemeClr val="accent1"/>
+          </a:effectRef>
+          <a:fontRef idx="minor">
+            <a:schemeClr val="lt1"/>
+          </a:fontRef>
+        </p:style>
+        <p:txBody>
+          <a:bodyPr rtlCol="0" anchor="ctr"/>
+          <a:lstStyle/>
+          <a:p>
+            <a:pPr algn="ctr"/>
+          </a:p>
+        </p:txBody>
+      </p:sp>
+      <p:sp>
+        <p:nvSpPr>
+          <p:cNvPr id="3" name="TextBox 2"/>
           <p:cNvSpPr txBox="1"/>
           <p:nvPr/>
         </p:nvSpPr>
         <p:spPr>
           <a:xfrm>
-            <a:off x="914400" y="3840480"/>
-            <a:ext cx="10332720" cy="365760"/>
+            <a:off x="914400" y="731520"/>
+            <a:ext cx="7315200" cy="320040"/>
           </a:xfrm>
           <a:prstGeom prst="rect">
             <a:avLst/>
@@ -3818,27 +3905,27 @@
               </a:lnSpc>
             </a:pPr>
             <a:r>
-              <a:rPr sz="1900" b="1">
-                <a:solidFill>
-                  <a:srgbClr val="E8B45C"/>
-                </a:solidFill>
-                <a:latin typeface="Apple SD Gothic Neo"/>
-              </a:rPr>
-              <a:t>시빌</a:t>
-            </a:r>
-          </a:p>
-        </p:txBody>
-      </p:sp>
-      <p:sp>
-        <p:nvSpPr>
-          <p:cNvPr id="8" name="TextBox 7"/>
+              <a:rPr sz="1300" b="0">
+                <a:solidFill>
+                  <a:srgbClr val="8B9AAF"/>
+                </a:solidFill>
+                <a:latin typeface="Apple SD Gothic Neo"/>
+              </a:rPr>
+              <a:t>남은 가정, 그리고 직접 확인</a:t>
+            </a:r>
+          </a:p>
+        </p:txBody>
+      </p:sp>
+      <p:sp>
+        <p:nvSpPr>
+          <p:cNvPr id="4" name="TextBox 3"/>
           <p:cNvSpPr txBox="1"/>
           <p:nvPr/>
         </p:nvSpPr>
         <p:spPr>
           <a:xfrm>
-            <a:off x="914400" y="4251960"/>
-            <a:ext cx="10332720" cy="822960"/>
+            <a:off x="914400" y="1143000"/>
+            <a:ext cx="10332720" cy="1280160"/>
           </a:xfrm>
           <a:prstGeom prst="rect">
             <a:avLst/>
@@ -3857,43 +3944,43 @@
               </a:lnSpc>
             </a:pPr>
             <a:r>
-              <a:rPr sz="1800" b="0">
-                <a:solidFill>
-                  <a:srgbClr val="8B9AAF"/>
-                </a:solidFill>
-                <a:latin typeface="Apple SD Gothic Neo"/>
-              </a:rPr>
-              <a:t>계정 식별자를 거래소 uid 에 묶어 신원 비용을 0 에서 KYC 한 번으로 올렸다.</a:t>
-            </a:r>
-          </a:p>
-          <a:p>
-            <a:pPr algn="l">
-              <a:lnSpc>
-                <a:spcPct val="125000"/>
-              </a:lnSpc>
-            </a:pPr>
-            <a:r>
-              <a:rPr sz="1800" b="0">
-                <a:solidFill>
-                  <a:srgbClr val="8B9AAF"/>
-                </a:solidFill>
-                <a:latin typeface="Apple SD Gothic Neo"/>
-              </a:rPr>
-              <a:t>시빌 저항을 만든 게 아니라 거래소 것을 빌렸다.</a:t>
-            </a:r>
-          </a:p>
-        </p:txBody>
-      </p:sp>
-      <p:sp>
-        <p:nvSpPr>
-          <p:cNvPr id="9" name="TextBox 8"/>
+              <a:rPr sz="3400" b="1">
+                <a:solidFill>
+                  <a:srgbClr val="ECF1F7"/>
+                </a:solidFill>
+                <a:latin typeface="Apple SD Gothic Neo"/>
+              </a:rPr>
+              <a:t>사라지지 않고</a:t>
+            </a:r>
+          </a:p>
+          <a:p>
+            <a:pPr algn="l">
+              <a:lnSpc>
+                <a:spcPct val="125000"/>
+              </a:lnSpc>
+            </a:pPr>
+            <a:r>
+              <a:rPr sz="3400" b="1">
+                <a:solidFill>
+                  <a:srgbClr val="ECF1F7"/>
+                </a:solidFill>
+                <a:latin typeface="Apple SD Gothic Neo"/>
+              </a:rPr>
+              <a:t>옮겨진 신뢰 가정</a:t>
+            </a:r>
+          </a:p>
+        </p:txBody>
+      </p:sp>
+      <p:sp>
+        <p:nvSpPr>
+          <p:cNvPr id="5" name="TextBox 4"/>
           <p:cNvSpPr txBox="1"/>
           <p:nvPr/>
         </p:nvSpPr>
         <p:spPr>
           <a:xfrm>
-            <a:off x="914400" y="5394960"/>
-            <a:ext cx="10332720" cy="457200"/>
+            <a:off x="914400" y="2743200"/>
+            <a:ext cx="10332720" cy="365760"/>
           </a:xfrm>
           <a:prstGeom prst="rect">
             <a:avLst/>
@@ -3914,11 +4001,183 @@
             <a:r>
               <a:rPr sz="1900" b="1">
                 <a:solidFill>
+                  <a:srgbClr val="E8B45C"/>
+                </a:solidFill>
+                <a:latin typeface="Apple SD Gothic Neo"/>
+              </a:rPr>
+              <a:t>공증인</a:t>
+            </a:r>
+          </a:p>
+        </p:txBody>
+      </p:sp>
+      <p:sp>
+        <p:nvSpPr>
+          <p:cNvPr id="6" name="TextBox 5"/>
+          <p:cNvSpPr txBox="1"/>
+          <p:nvPr/>
+        </p:nvSpPr>
+        <p:spPr>
+          <a:xfrm>
+            <a:off x="914400" y="3154680"/>
+            <a:ext cx="10332720" cy="457200"/>
+          </a:xfrm>
+          <a:prstGeom prst="rect">
+            <a:avLst/>
+          </a:prstGeom>
+          <a:noFill/>
+        </p:spPr>
+        <p:txBody>
+          <a:bodyPr wrap="square" lIns="0" rIns="0" tIns="0" bIns="0">
+            <a:spAutoFit/>
+          </a:bodyPr>
+          <a:lstStyle/>
+          <a:p>
+            <a:pPr algn="l">
+              <a:lnSpc>
+                <a:spcPct val="125000"/>
+              </a:lnSpc>
+            </a:pPr>
+            <a:r>
+              <a:rPr sz="1800" b="0">
+                <a:solidFill>
+                  <a:srgbClr val="8B9AAF"/>
+                </a:solidFill>
+                <a:latin typeface="Apple SD Gothic Neo"/>
+              </a:rPr>
+              <a:t>트레이더 대신 믿는 Primus 공증인 그룹과 TLS  ·  분산돼 있어 낫지만 여전히 가정</a:t>
+            </a:r>
+          </a:p>
+        </p:txBody>
+      </p:sp>
+      <p:sp>
+        <p:nvSpPr>
+          <p:cNvPr id="7" name="TextBox 6"/>
+          <p:cNvSpPr txBox="1"/>
+          <p:nvPr/>
+        </p:nvSpPr>
+        <p:spPr>
+          <a:xfrm>
+            <a:off x="914400" y="3840480"/>
+            <a:ext cx="10332720" cy="365760"/>
+          </a:xfrm>
+          <a:prstGeom prst="rect">
+            <a:avLst/>
+          </a:prstGeom>
+          <a:noFill/>
+        </p:spPr>
+        <p:txBody>
+          <a:bodyPr wrap="square" lIns="0" rIns="0" tIns="0" bIns="0">
+            <a:spAutoFit/>
+          </a:bodyPr>
+          <a:lstStyle/>
+          <a:p>
+            <a:pPr algn="l">
+              <a:lnSpc>
+                <a:spcPct val="125000"/>
+              </a:lnSpc>
+            </a:pPr>
+            <a:r>
+              <a:rPr sz="1900" b="1">
+                <a:solidFill>
+                  <a:srgbClr val="E8B45C"/>
+                </a:solidFill>
+                <a:latin typeface="Apple SD Gothic Neo"/>
+              </a:rPr>
+              <a:t>시빌</a:t>
+            </a:r>
+          </a:p>
+        </p:txBody>
+      </p:sp>
+      <p:sp>
+        <p:nvSpPr>
+          <p:cNvPr id="8" name="TextBox 7"/>
+          <p:cNvSpPr txBox="1"/>
+          <p:nvPr/>
+        </p:nvSpPr>
+        <p:spPr>
+          <a:xfrm>
+            <a:off x="914400" y="4251960"/>
+            <a:ext cx="10332720" cy="822960"/>
+          </a:xfrm>
+          <a:prstGeom prst="rect">
+            <a:avLst/>
+          </a:prstGeom>
+          <a:noFill/>
+        </p:spPr>
+        <p:txBody>
+          <a:bodyPr wrap="square" lIns="0" rIns="0" tIns="0" bIns="0">
+            <a:spAutoFit/>
+          </a:bodyPr>
+          <a:lstStyle/>
+          <a:p>
+            <a:pPr algn="l">
+              <a:lnSpc>
+                <a:spcPct val="125000"/>
+              </a:lnSpc>
+            </a:pPr>
+            <a:r>
+              <a:rPr sz="1800" b="0">
+                <a:solidFill>
+                  <a:srgbClr val="8B9AAF"/>
+                </a:solidFill>
+                <a:latin typeface="Apple SD Gothic Neo"/>
+              </a:rPr>
+              <a:t>거래소 uid 에 묶인 계정 식별자  ·  신원 하나의 비용은 0 에서 KYC 한 번으로</a:t>
+            </a:r>
+          </a:p>
+          <a:p>
+            <a:pPr algn="l">
+              <a:lnSpc>
+                <a:spcPct val="125000"/>
+              </a:lnSpc>
+            </a:pPr>
+            <a:r>
+              <a:rPr sz="1800" b="0">
+                <a:solidFill>
+                  <a:srgbClr val="8B9AAF"/>
+                </a:solidFill>
+                <a:latin typeface="Apple SD Gothic Neo"/>
+              </a:rPr>
+              <a:t>만든 시빌 저항이 아니라 거래소에서 빌린 시빌 저항</a:t>
+            </a:r>
+          </a:p>
+        </p:txBody>
+      </p:sp>
+      <p:sp>
+        <p:nvSpPr>
+          <p:cNvPr id="9" name="TextBox 8"/>
+          <p:cNvSpPr txBox="1"/>
+          <p:nvPr/>
+        </p:nvSpPr>
+        <p:spPr>
+          <a:xfrm>
+            <a:off x="914400" y="5394960"/>
+            <a:ext cx="10332720" cy="457200"/>
+          </a:xfrm>
+          <a:prstGeom prst="rect">
+            <a:avLst/>
+          </a:prstGeom>
+          <a:noFill/>
+        </p:spPr>
+        <p:txBody>
+          <a:bodyPr wrap="square" lIns="0" rIns="0" tIns="0" bIns="0">
+            <a:spAutoFit/>
+          </a:bodyPr>
+          <a:lstStyle/>
+          <a:p>
+            <a:pPr algn="l">
+              <a:lnSpc>
+                <a:spcPct val="125000"/>
+              </a:lnSpc>
+            </a:pPr>
+            <a:r>
+              <a:rPr sz="1900" b="1">
+                <a:solidFill>
                   <a:srgbClr val="ECF1F7"/>
                 </a:solidFill>
                 <a:latin typeface="Apple SD Gothic Neo"/>
               </a:rPr>
-              <a:t>계정 없이 1초 안에 직접 확인할 수 있다 — 테스트 28개, 회로 5 시연, 증언 검증.</a:t>
+              <a:t>계정 없이 1초 안에 직접 확인 가능  —  테스트 28개 · 회로 5 시연 · 증언 검증</a:t>
             </a:r>
           </a:p>
         </p:txBody>
@@ -4097,7 +4356,7 @@
                 </a:solidFill>
                 <a:latin typeface="Apple SD Gothic Neo"/>
               </a:rPr>
-              <a:t>숫자가 전부 진짜인데도</a:t>
+              <a:t>전부 진짜인 숫자로</a:t>
             </a:r>
           </a:p>
           <a:p>
@@ -4113,7 +4372,7 @@
                 </a:solidFill>
                 <a:latin typeface="Apple SD Gothic Neo"/>
               </a:rPr>
-              <a:t>거짓말이 될 수 있다</a:t>
+              <a:t>만들어지는 거짓말</a:t>
             </a:r>
           </a:p>
         </p:txBody>
@@ -4152,7 +4411,7 @@
                 </a:solidFill>
                 <a:latin typeface="Apple SD Gothic Neo"/>
               </a:rPr>
-              <a:t>"전략 열 개를 1년 돌렸습니다. 이게 그중 제일 잘 된 겁니다."</a:t>
+              <a:t>"1년 동안 돌린 전략 열 개 중 제일 잘 된 하나"</a:t>
             </a:r>
           </a:p>
         </p:txBody>
@@ -4191,7 +4450,7 @@
                 </a:solidFill>
                 <a:latin typeface="Apple SD Gothic Neo"/>
               </a:rPr>
-              <a:t>거래도, 체결도, 수익률도 전부 진짜다.</a:t>
+              <a:t>거래, 체결, 수익률 전부 진짜</a:t>
             </a:r>
           </a:p>
           <a:p>
@@ -4207,7 +4466,7 @@
                 </a:solidFill>
                 <a:latin typeface="Apple SD Gothic Neo"/>
               </a:rPr>
-              <a:t>고르는 게 먼저였고, 고른 흔적은 남지 않는다.</a:t>
+              <a:t>먼저 일어난 선택, 남지 않는 선택의 흔적</a:t>
             </a:r>
           </a:p>
         </p:txBody>
@@ -4308,7 +4567,7 @@
                 </a:solidFill>
                 <a:latin typeface="Apple SD Gothic Neo"/>
               </a:rPr>
-              <a:t>내 백테스트 — S&amp;P 500, 2018-11 ~ 2023-09</a:t>
+              <a:t>발표자의 백테스트 — S&amp;P 500, 2018-11 ~ 2023-09</a:t>
             </a:r>
           </a:p>
         </p:txBody>
@@ -4371,7 +4630,7 @@
                 </a:solidFill>
                 <a:latin typeface="Apple SD Gothic Neo"/>
               </a:rPr>
-              <a:t>생존 편향 하나 걷어내니 연 9.15%p 가 사라졌다.</a:t>
+              <a:t>생존 편향 하나 제거에 사라진 연 9.15%p</a:t>
             </a:r>
           </a:p>
         </p:txBody>
@@ -4410,7 +4669,7 @@
                 </a:solidFill>
                 <a:latin typeface="Apple SD Gothic Neo"/>
               </a:rPr>
-              <a:t>조작은 없었다. 다시 돌릴 수 있었을 뿐이다.</a:t>
+              <a:t>조작 없음  ·  다시 돌릴 수 있었을 뿐</a:t>
             </a:r>
           </a:p>
         </p:txBody>
@@ -4511,7 +4770,7 @@
                 </a:solidFill>
                 <a:latin typeface="Apple SD Gothic Neo"/>
               </a:rPr>
-              <a:t>나만의 일이 아니다</a:t>
+              <a:t>한 사람만의 일이 아님</a:t>
             </a:r>
           </a:p>
         </p:txBody>
@@ -4613,7 +4872,7 @@
                 </a:solidFill>
                 <a:latin typeface="Apple SD Gothic Neo"/>
               </a:rPr>
-              <a:t>내 39% 는 특이값이 아니다. 업계 평균이다.</a:t>
+              <a:t>39% 감소는 특이값이 아닌 업계 평균</a:t>
             </a:r>
           </a:p>
         </p:txBody>
@@ -4753,7 +5012,7 @@
                 </a:solidFill>
                 <a:latin typeface="Apple SD Gothic Neo"/>
               </a:rPr>
-              <a:t>왜 반복되나</a:t>
+              <a:t>반복되는 이유</a:t>
             </a:r>
           </a:p>
         </p:txBody>
@@ -4792,7 +5051,7 @@
                 </a:solidFill>
                 <a:latin typeface="Apple SD Gothic Neo"/>
               </a:rPr>
-              <a:t>개인의 문제가 아니라</a:t>
+              <a:t>개인의 문제가 아닌</a:t>
             </a:r>
           </a:p>
           <a:p>
@@ -4808,7 +5067,7 @@
                 </a:solidFill>
                 <a:latin typeface="Apple SD Gothic Neo"/>
               </a:rPr>
-              <a:t>구조의 문제다</a:t>
+              <a:t>구조의 문제</a:t>
             </a:r>
           </a:p>
         </p:txBody>
@@ -4847,7 +5106,7 @@
                 </a:solidFill>
                 <a:latin typeface="Apple SD Gothic Neo"/>
               </a:rPr>
-              <a:t>실패는 사라진다</a:t>
+              <a:t>사라지는 실패</a:t>
             </a:r>
           </a:p>
         </p:txBody>
@@ -4886,7 +5145,7 @@
                 </a:solidFill>
                 <a:latin typeface="Apple SD Gothic Neo"/>
               </a:rPr>
-              <a:t>망한 펀드는 DB 에서 빠지고, 안 된 전략은 발표되지 않는다.</a:t>
+              <a:t>DB 에서 빠지는 망한 펀드, 발표되지 않는 안 된 전략</a:t>
             </a:r>
           </a:p>
         </p:txBody>
@@ -4925,7 +5184,7 @@
                 </a:solidFill>
                 <a:latin typeface="Apple SD Gothic Neo"/>
               </a:rPr>
-              <a:t>시도 횟수는 기록되지 않는다</a:t>
+              <a:t>기록되지 않는 시도 횟수</a:t>
             </a:r>
           </a:p>
         </p:txBody>
@@ -4964,7 +5223,7 @@
                 </a:solidFill>
                 <a:latin typeface="Apple SD Gothic Neo"/>
               </a:rPr>
-              <a:t>팩터 316개가 검증됐다. 몇 번 시도했는지 모르면 유의성을 계산할 수 없다.</a:t>
+              <a:t>검증된 팩터 316개  ·  시도 횟수 없이는 계산 불가능한 유의성</a:t>
             </a:r>
           </a:p>
         </p:txBody>
@@ -5003,7 +5262,7 @@
                 </a:solidFill>
                 <a:latin typeface="Apple SD Gothic Neo"/>
               </a:rPr>
-              <a:t>흔적이 남지 않는다</a:t>
+              <a:t>남지 않는 흔적</a:t>
             </a:r>
           </a:p>
         </p:txBody>
@@ -5042,7 +5301,7 @@
                 </a:solidFill>
                 <a:latin typeface="Apple SD Gothic Neo"/>
               </a:rPr>
-              <a:t>최종 숫자만 보면 첫 시도인지 열 번째인지 모른다.</a:t>
+              <a:t>최종 숫자만으로는 첫 시도인지 열 번째인지 구별 불가</a:t>
             </a:r>
           </a:p>
         </p:txBody>
@@ -5143,7 +5402,7 @@
                 </a:solidFill>
                 <a:latin typeface="Apple SD Gothic Neo"/>
               </a:rPr>
-              <a:t>해법 — 흔적을 남기게 만든다</a:t>
+              <a:t>해법 — 흔적을 남기는 구조</a:t>
             </a:r>
           </a:p>
         </p:txBody>
@@ -5182,7 +5441,7 @@
                 </a:solidFill>
                 <a:latin typeface="Apple SD Gothic Neo"/>
               </a:rPr>
-              <a:t>결과를 알기 전에 전략을 커밋한다</a:t>
+              <a:t>결과를 알기 전, 전략 커밋</a:t>
             </a:r>
           </a:p>
         </p:txBody>
@@ -5221,7 +5480,7 @@
                 </a:solidFill>
                 <a:latin typeface="Apple SD Gothic Neo"/>
               </a:rPr>
-              <a:t>성과가 그 전략에서 나왔음을 영지식으로 증명한다.</a:t>
+              <a:t>성과가 그 전략에서 나왔다는 영지식 증명</a:t>
             </a:r>
           </a:p>
         </p:txBody>
@@ -5260,7 +5519,7 @@
                 </a:solidFill>
                 <a:latin typeface="Apple SD Gothic Neo"/>
               </a:rPr>
-              <a:t>왜 영지식인가</a:t>
+              <a:t>영지식이 필요한 이유</a:t>
             </a:r>
           </a:p>
         </p:txBody>
@@ -5299,7 +5558,7 @@
                 </a:solidFill>
                 <a:latin typeface="Apple SD Gothic Neo"/>
               </a:rPr>
-              <a:t>전략을 공개하면 알파가 사라진다.</a:t>
+              <a:t>공개하는 순간 사라지는 알파</a:t>
             </a:r>
           </a:p>
           <a:p>
@@ -5315,7 +5574,7 @@
                 </a:solidFill>
                 <a:latin typeface="Apple SD Gothic Neo"/>
               </a:rPr>
-              <a:t>그래서 숨긴 채 커밋하고, 열지 않은 채 증명한다.</a:t>
+              <a:t>숨긴 채 커밋, 열지 않은 채 증명</a:t>
             </a:r>
           </a:p>
         </p:txBody>
@@ -5354,7 +5613,7 @@
                 </a:solidFill>
                 <a:latin typeface="Apple SD Gothic Neo"/>
               </a:rPr>
-              <a:t>거래 전  —  전략의 해시만 원장에 올린다</a:t>
+              <a:t>거래 전  —  원장에 오르는 것은 전략의 해시뿐</a:t>
             </a:r>
           </a:p>
           <a:p>
@@ -5370,7 +5629,7 @@
                 </a:solidFill>
                 <a:latin typeface="Apple SD Gothic Neo"/>
               </a:rPr>
-              <a:t>거래 후  —  "수익률이 X 이상" 이라는 사실만 원장에 올린다</a:t>
+              <a:t>거래 후  —  원장에 오르는 것은 "수익률 X 이상" 이라는 사실뿐</a:t>
             </a:r>
           </a:p>
         </p:txBody>
@@ -5445,7 +5704,7 @@
         </p:nvSpPr>
         <p:spPr>
           <a:xfrm>
-            <a:off x="914400" y="640080"/>
+            <a:off x="640080" y="411480"/>
             <a:ext cx="7315200" cy="320040"/>
           </a:xfrm>
           <a:prstGeom prst="rect">
@@ -5471,7 +5730,7 @@
                 </a:solidFill>
                 <a:latin typeface="Apple SD Gothic Neo"/>
               </a:rPr>
-              <a:t>회로 7개, 각각 하나의 공격을 막는다</a:t>
+              <a:t>구조</a:t>
             </a:r>
           </a:p>
         </p:txBody>
@@ -5484,8 +5743,8 @@
         </p:nvSpPr>
         <p:spPr>
           <a:xfrm>
-            <a:off x="914400" y="1051560"/>
-            <a:ext cx="10332720" cy="640080"/>
+            <a:off x="640080" y="777240"/>
+            <a:ext cx="10972800" cy="548640"/>
           </a:xfrm>
           <a:prstGeom prst="rect">
             <a:avLst/>
@@ -5504,27 +5763,51 @@
               </a:lnSpc>
             </a:pPr>
             <a:r>
-              <a:rPr sz="3200" b="1">
+              <a:rPr sz="3000" b="1">
                 <a:solidFill>
                   <a:srgbClr val="ECF1F7"/>
                 </a:solidFill>
                 <a:latin typeface="Apple SD Gothic Neo"/>
               </a:rPr>
-              <a:t>무엇을 막는가</a:t>
-            </a:r>
-          </a:p>
-        </p:txBody>
-      </p:sp>
-      <p:sp>
-        <p:nvSpPr>
-          <p:cNvPr id="5" name="TextBox 4"/>
+              <a:t>증명하는 트레이더, 검증하는 투자자</a:t>
+            </a:r>
+          </a:p>
+        </p:txBody>
+      </p:sp>
+      <p:pic>
+        <p:nvPicPr>
+          <p:cNvPr id="5" name="Picture 4" descr="flow.png"/>
+          <p:cNvPicPr>
+            <a:picLocks noChangeAspect="1"/>
+          </p:cNvPicPr>
+          <p:nvPr/>
+        </p:nvPicPr>
+        <p:blipFill>
+          <a:blip r:embed="rId2"/>
+          <a:stretch>
+            <a:fillRect/>
+          </a:stretch>
+        </p:blipFill>
+        <p:spPr>
+          <a:xfrm>
+            <a:off x="780897" y="1508760"/>
+            <a:ext cx="10629900" cy="4114800"/>
+          </a:xfrm>
+          <a:prstGeom prst="rect">
+            <a:avLst/>
+          </a:prstGeom>
+        </p:spPr>
+      </p:pic>
+      <p:sp>
+        <p:nvSpPr>
+          <p:cNvPr id="6" name="TextBox 5"/>
           <p:cNvSpPr txBox="1"/>
           <p:nvPr/>
         </p:nvSpPr>
         <p:spPr>
           <a:xfrm>
-            <a:off x="914400" y="2057400"/>
-            <a:ext cx="731520" cy="411480"/>
+            <a:off x="640080" y="5806440"/>
+            <a:ext cx="10972800" cy="457200"/>
           </a:xfrm>
           <a:prstGeom prst="rect">
             <a:avLst/>
@@ -5545,729 +5828,11 @@
             <a:r>
               <a:rPr sz="1900" b="1">
                 <a:solidFill>
-                  <a:srgbClr val="8B9AAF"/>
-                </a:solidFill>
-                <a:latin typeface="Apple SD Gothic Neo"/>
-              </a:rPr>
-              <a:t>1</a:t>
-            </a:r>
-          </a:p>
-        </p:txBody>
-      </p:sp>
-      <p:sp>
-        <p:nvSpPr>
-          <p:cNvPr id="6" name="TextBox 5"/>
-          <p:cNvSpPr txBox="1"/>
-          <p:nvPr/>
-        </p:nvSpPr>
-        <p:spPr>
-          <a:xfrm>
-            <a:off x="1691640" y="2057400"/>
-            <a:ext cx="4206240" cy="411480"/>
-          </a:xfrm>
-          <a:prstGeom prst="rect">
-            <a:avLst/>
-          </a:prstGeom>
-          <a:noFill/>
-        </p:spPr>
-        <p:txBody>
-          <a:bodyPr wrap="square" lIns="0" rIns="0" tIns="0" bIns="0">
-            <a:spAutoFit/>
-          </a:bodyPr>
-          <a:lstStyle/>
-          <a:p>
-            <a:pPr algn="l">
-              <a:lnSpc>
-                <a:spcPct val="125000"/>
-              </a:lnSpc>
-            </a:pPr>
-            <a:r>
-              <a:rPr sz="1900" b="0">
-                <a:solidFill>
-                  <a:srgbClr val="ECF1F7"/>
-                </a:solidFill>
-                <a:latin typeface="Apple SD Gothic Neo"/>
-              </a:rPr>
-              <a:t>전략을 나중에 바꾸기</a:t>
-            </a:r>
-          </a:p>
-        </p:txBody>
-      </p:sp>
-      <p:sp>
-        <p:nvSpPr>
-          <p:cNvPr id="7" name="TextBox 6"/>
-          <p:cNvSpPr txBox="1"/>
-          <p:nvPr/>
-        </p:nvSpPr>
-        <p:spPr>
-          <a:xfrm>
-            <a:off x="6035040" y="2103120"/>
-            <a:ext cx="5486400" cy="411480"/>
-          </a:xfrm>
-          <a:prstGeom prst="rect">
-            <a:avLst/>
-          </a:prstGeom>
-          <a:noFill/>
-        </p:spPr>
-        <p:txBody>
-          <a:bodyPr wrap="square" lIns="0" rIns="0" tIns="0" bIns="0">
-            <a:spAutoFit/>
-          </a:bodyPr>
-          <a:lstStyle/>
-          <a:p>
-            <a:pPr algn="l">
-              <a:lnSpc>
-                <a:spcPct val="125000"/>
-              </a:lnSpc>
-            </a:pPr>
-            <a:r>
-              <a:rPr sz="1500" b="0">
-                <a:solidFill>
-                  <a:srgbClr val="8B9AAF"/>
-                </a:solidFill>
-                <a:latin typeface="Apple SD Gothic Neo"/>
-              </a:rPr>
-              <a:t>전략 해시를 거래 전에 커밋</a:t>
-            </a:r>
-          </a:p>
-        </p:txBody>
-      </p:sp>
-      <p:sp>
-        <p:nvSpPr>
-          <p:cNvPr id="8" name="TextBox 7"/>
-          <p:cNvSpPr txBox="1"/>
-          <p:nvPr/>
-        </p:nvSpPr>
-        <p:spPr>
-          <a:xfrm>
-            <a:off x="914400" y="2624328"/>
-            <a:ext cx="731520" cy="411480"/>
-          </a:xfrm>
-          <a:prstGeom prst="rect">
-            <a:avLst/>
-          </a:prstGeom>
-          <a:noFill/>
-        </p:spPr>
-        <p:txBody>
-          <a:bodyPr wrap="square" lIns="0" rIns="0" tIns="0" bIns="0">
-            <a:spAutoFit/>
-          </a:bodyPr>
-          <a:lstStyle/>
-          <a:p>
-            <a:pPr algn="l">
-              <a:lnSpc>
-                <a:spcPct val="125000"/>
-              </a:lnSpc>
-            </a:pPr>
-            <a:r>
-              <a:rPr sz="1900" b="1">
-                <a:solidFill>
-                  <a:srgbClr val="8B9AAF"/>
-                </a:solidFill>
-                <a:latin typeface="Apple SD Gothic Neo"/>
-              </a:rPr>
-              <a:t>2-3</a:t>
-            </a:r>
-          </a:p>
-        </p:txBody>
-      </p:sp>
-      <p:sp>
-        <p:nvSpPr>
-          <p:cNvPr id="9" name="TextBox 8"/>
-          <p:cNvSpPr txBox="1"/>
-          <p:nvPr/>
-        </p:nvSpPr>
-        <p:spPr>
-          <a:xfrm>
-            <a:off x="1691640" y="2624328"/>
-            <a:ext cx="4206240" cy="411480"/>
-          </a:xfrm>
-          <a:prstGeom prst="rect">
-            <a:avLst/>
-          </a:prstGeom>
-          <a:noFill/>
-        </p:spPr>
-        <p:txBody>
-          <a:bodyPr wrap="square" lIns="0" rIns="0" tIns="0" bIns="0">
-            <a:spAutoFit/>
-          </a:bodyPr>
-          <a:lstStyle/>
-          <a:p>
-            <a:pPr algn="l">
-              <a:lnSpc>
-                <a:spcPct val="125000"/>
-              </a:lnSpc>
-            </a:pPr>
-            <a:r>
-              <a:rPr sz="1900" b="0">
-                <a:solidFill>
-                  <a:srgbClr val="ECF1F7"/>
-                </a:solidFill>
-                <a:latin typeface="Apple SD Gothic Neo"/>
-              </a:rPr>
-              <a:t>없는 수익률 주장</a:t>
-            </a:r>
-          </a:p>
-        </p:txBody>
-      </p:sp>
-      <p:sp>
-        <p:nvSpPr>
-          <p:cNvPr id="10" name="TextBox 9"/>
-          <p:cNvSpPr txBox="1"/>
-          <p:nvPr/>
-        </p:nvSpPr>
-        <p:spPr>
-          <a:xfrm>
-            <a:off x="6035040" y="2670048"/>
-            <a:ext cx="5486400" cy="411480"/>
-          </a:xfrm>
-          <a:prstGeom prst="rect">
-            <a:avLst/>
-          </a:prstGeom>
-          <a:noFill/>
-        </p:spPr>
-        <p:txBody>
-          <a:bodyPr wrap="square" lIns="0" rIns="0" tIns="0" bIns="0">
-            <a:spAutoFit/>
-          </a:bodyPr>
-          <a:lstStyle/>
-          <a:p>
-            <a:pPr algn="l">
-              <a:lnSpc>
-                <a:spcPct val="125000"/>
-              </a:lnSpc>
-            </a:pPr>
-            <a:r>
-              <a:rPr sz="1500" b="0">
-                <a:solidFill>
-                  <a:srgbClr val="8B9AAF"/>
-                </a:solidFill>
-                <a:latin typeface="Apple SD Gothic Neo"/>
-              </a:rPr>
-              <a:t>수익률이 커밋된 거래 로그에서 나왔음을 증명</a:t>
-            </a:r>
-          </a:p>
-        </p:txBody>
-      </p:sp>
-      <p:sp>
-        <p:nvSpPr>
-          <p:cNvPr id="11" name="TextBox 10"/>
-          <p:cNvSpPr txBox="1"/>
-          <p:nvPr/>
-        </p:nvSpPr>
-        <p:spPr>
-          <a:xfrm>
-            <a:off x="914400" y="3191256"/>
-            <a:ext cx="731520" cy="411480"/>
-          </a:xfrm>
-          <a:prstGeom prst="rect">
-            <a:avLst/>
-          </a:prstGeom>
-          <a:noFill/>
-        </p:spPr>
-        <p:txBody>
-          <a:bodyPr wrap="square" lIns="0" rIns="0" tIns="0" bIns="0">
-            <a:spAutoFit/>
-          </a:bodyPr>
-          <a:lstStyle/>
-          <a:p>
-            <a:pPr algn="l">
-              <a:lnSpc>
-                <a:spcPct val="125000"/>
-              </a:lnSpc>
-            </a:pPr>
-            <a:r>
-              <a:rPr sz="1900" b="1">
-                <a:solidFill>
-                  <a:srgbClr val="8B9AAF"/>
-                </a:solidFill>
-                <a:latin typeface="Apple SD Gothic Neo"/>
-              </a:rPr>
-              <a:t>4</a:t>
-            </a:r>
-          </a:p>
-        </p:txBody>
-      </p:sp>
-      <p:sp>
-        <p:nvSpPr>
-          <p:cNvPr id="12" name="TextBox 11"/>
-          <p:cNvSpPr txBox="1"/>
-          <p:nvPr/>
-        </p:nvSpPr>
-        <p:spPr>
-          <a:xfrm>
-            <a:off x="1691640" y="3191256"/>
-            <a:ext cx="4206240" cy="411480"/>
-          </a:xfrm>
-          <a:prstGeom prst="rect">
-            <a:avLst/>
-          </a:prstGeom>
-          <a:noFill/>
-        </p:spPr>
-        <p:txBody>
-          <a:bodyPr wrap="square" lIns="0" rIns="0" tIns="0" bIns="0">
-            <a:spAutoFit/>
-          </a:bodyPr>
-          <a:lstStyle/>
-          <a:p>
-            <a:pPr algn="l">
-              <a:lnSpc>
-                <a:spcPct val="125000"/>
-              </a:lnSpc>
-            </a:pPr>
-            <a:r>
-              <a:rPr sz="1900" b="0">
-                <a:solidFill>
-                  <a:srgbClr val="ECF1F7"/>
-                </a:solidFill>
-                <a:latin typeface="Apple SD Gothic Neo"/>
-              </a:rPr>
-              <a:t>리스크 관리 과장</a:t>
-            </a:r>
-          </a:p>
-        </p:txBody>
-      </p:sp>
-      <p:sp>
-        <p:nvSpPr>
-          <p:cNvPr id="13" name="TextBox 12"/>
-          <p:cNvSpPr txBox="1"/>
-          <p:nvPr/>
-        </p:nvSpPr>
-        <p:spPr>
-          <a:xfrm>
-            <a:off x="6035040" y="3236976"/>
-            <a:ext cx="5486400" cy="411480"/>
-          </a:xfrm>
-          <a:prstGeom prst="rect">
-            <a:avLst/>
-          </a:prstGeom>
-          <a:noFill/>
-        </p:spPr>
-        <p:txBody>
-          <a:bodyPr wrap="square" lIns="0" rIns="0" tIns="0" bIns="0">
-            <a:spAutoFit/>
-          </a:bodyPr>
-          <a:lstStyle/>
-          <a:p>
-            <a:pPr algn="l">
-              <a:lnSpc>
-                <a:spcPct val="125000"/>
-              </a:lnSpc>
-            </a:pPr>
-            <a:r>
-              <a:rPr sz="1500" b="0">
-                <a:solidFill>
-                  <a:srgbClr val="8B9AAF"/>
-                </a:solidFill>
-                <a:latin typeface="Apple SD Gothic Neo"/>
-              </a:rPr>
-              <a:t>포지션 한도가 지켜졌음을 증명</a:t>
-            </a:r>
-          </a:p>
-        </p:txBody>
-      </p:sp>
-      <p:sp>
-        <p:nvSpPr>
-          <p:cNvPr id="14" name="TextBox 13"/>
-          <p:cNvSpPr txBox="1"/>
-          <p:nvPr/>
-        </p:nvSpPr>
-        <p:spPr>
-          <a:xfrm>
-            <a:off x="914400" y="3758184"/>
-            <a:ext cx="731520" cy="411480"/>
-          </a:xfrm>
-          <a:prstGeom prst="rect">
-            <a:avLst/>
-          </a:prstGeom>
-          <a:noFill/>
-        </p:spPr>
-        <p:txBody>
-          <a:bodyPr wrap="square" lIns="0" rIns="0" tIns="0" bIns="0">
-            <a:spAutoFit/>
-          </a:bodyPr>
-          <a:lstStyle/>
-          <a:p>
-            <a:pPr algn="l">
-              <a:lnSpc>
-                <a:spcPct val="125000"/>
-              </a:lnSpc>
-            </a:pPr>
-            <a:r>
-              <a:rPr sz="1900" b="1">
-                <a:solidFill>
-                  <a:srgbClr val="8B9AAF"/>
-                </a:solidFill>
-                <a:latin typeface="Apple SD Gothic Neo"/>
-              </a:rPr>
-              <a:t>5</a:t>
-            </a:r>
-          </a:p>
-        </p:txBody>
-      </p:sp>
-      <p:sp>
-        <p:nvSpPr>
-          <p:cNvPr id="15" name="TextBox 14"/>
-          <p:cNvSpPr txBox="1"/>
-          <p:nvPr/>
-        </p:nvSpPr>
-        <p:spPr>
-          <a:xfrm>
-            <a:off x="1691640" y="3758184"/>
-            <a:ext cx="4206240" cy="411480"/>
-          </a:xfrm>
-          <a:prstGeom prst="rect">
-            <a:avLst/>
-          </a:prstGeom>
-          <a:noFill/>
-        </p:spPr>
-        <p:txBody>
-          <a:bodyPr wrap="square" lIns="0" rIns="0" tIns="0" bIns="0">
-            <a:spAutoFit/>
-          </a:bodyPr>
-          <a:lstStyle/>
-          <a:p>
-            <a:pPr algn="l">
-              <a:lnSpc>
-                <a:spcPct val="125000"/>
-              </a:lnSpc>
-            </a:pPr>
-            <a:r>
-              <a:rPr sz="1900" b="0">
-                <a:solidFill>
                   <a:srgbClr val="5EE0B0"/>
                 </a:solidFill>
                 <a:latin typeface="Apple SD Gothic Neo"/>
               </a:rPr>
-              <a:t>손실 거래를 빼고 계산하기</a:t>
-            </a:r>
-          </a:p>
-        </p:txBody>
-      </p:sp>
-      <p:sp>
-        <p:nvSpPr>
-          <p:cNvPr id="16" name="TextBox 15"/>
-          <p:cNvSpPr txBox="1"/>
-          <p:nvPr/>
-        </p:nvSpPr>
-        <p:spPr>
-          <a:xfrm>
-            <a:off x="6035040" y="3803904"/>
-            <a:ext cx="5486400" cy="411480"/>
-          </a:xfrm>
-          <a:prstGeom prst="rect">
-            <a:avLst/>
-          </a:prstGeom>
-          <a:noFill/>
-        </p:spPr>
-        <p:txBody>
-          <a:bodyPr wrap="square" lIns="0" rIns="0" tIns="0" bIns="0">
-            <a:spAutoFit/>
-          </a:bodyPr>
-          <a:lstStyle/>
-          <a:p>
-            <a:pPr algn="l">
-              <a:lnSpc>
-                <a:spcPct val="125000"/>
-              </a:lnSpc>
-            </a:pPr>
-            <a:r>
-              <a:rPr sz="1500" b="0">
-                <a:solidFill>
-                  <a:srgbClr val="8B9AAF"/>
-                </a:solidFill>
-                <a:latin typeface="Apple SD Gothic Neo"/>
-              </a:rPr>
-              <a:t>수익률이 커밋된 계좌 잔고와 맞음을 증명</a:t>
-            </a:r>
-          </a:p>
-        </p:txBody>
-      </p:sp>
-      <p:sp>
-        <p:nvSpPr>
-          <p:cNvPr id="17" name="TextBox 16"/>
-          <p:cNvSpPr txBox="1"/>
-          <p:nvPr/>
-        </p:nvSpPr>
-        <p:spPr>
-          <a:xfrm>
-            <a:off x="914400" y="4325112"/>
-            <a:ext cx="731520" cy="411480"/>
-          </a:xfrm>
-          <a:prstGeom prst="rect">
-            <a:avLst/>
-          </a:prstGeom>
-          <a:noFill/>
-        </p:spPr>
-        <p:txBody>
-          <a:bodyPr wrap="square" lIns="0" rIns="0" tIns="0" bIns="0">
-            <a:spAutoFit/>
-          </a:bodyPr>
-          <a:lstStyle/>
-          <a:p>
-            <a:pPr algn="l">
-              <a:lnSpc>
-                <a:spcPct val="125000"/>
-              </a:lnSpc>
-            </a:pPr>
-            <a:r>
-              <a:rPr sz="1900" b="1">
-                <a:solidFill>
-                  <a:srgbClr val="8B9AAF"/>
-                </a:solidFill>
-                <a:latin typeface="Apple SD Gothic Neo"/>
-              </a:rPr>
-              <a:t>6</a:t>
-            </a:r>
-          </a:p>
-        </p:txBody>
-      </p:sp>
-      <p:sp>
-        <p:nvSpPr>
-          <p:cNvPr id="18" name="TextBox 17"/>
-          <p:cNvSpPr txBox="1"/>
-          <p:nvPr/>
-        </p:nvSpPr>
-        <p:spPr>
-          <a:xfrm>
-            <a:off x="1691640" y="4325112"/>
-            <a:ext cx="4206240" cy="411480"/>
-          </a:xfrm>
-          <a:prstGeom prst="rect">
-            <a:avLst/>
-          </a:prstGeom>
-          <a:noFill/>
-        </p:spPr>
-        <p:txBody>
-          <a:bodyPr wrap="square" lIns="0" rIns="0" tIns="0" bIns="0">
-            <a:spAutoFit/>
-          </a:bodyPr>
-          <a:lstStyle/>
-          <a:p>
-            <a:pPr algn="l">
-              <a:lnSpc>
-                <a:spcPct val="125000"/>
-              </a:lnSpc>
-            </a:pPr>
-            <a:r>
-              <a:rPr sz="1900" b="0">
-                <a:solidFill>
-                  <a:srgbClr val="5EE0B0"/>
-                </a:solidFill>
-                <a:latin typeface="Apple SD Gothic Neo"/>
-              </a:rPr>
-              <a:t>시행 횟수를 숨기기</a:t>
-            </a:r>
-          </a:p>
-        </p:txBody>
-      </p:sp>
-      <p:sp>
-        <p:nvSpPr>
-          <p:cNvPr id="19" name="TextBox 18"/>
-          <p:cNvSpPr txBox="1"/>
-          <p:nvPr/>
-        </p:nvSpPr>
-        <p:spPr>
-          <a:xfrm>
-            <a:off x="6035040" y="4370832"/>
-            <a:ext cx="5486400" cy="411480"/>
-          </a:xfrm>
-          <a:prstGeom prst="rect">
-            <a:avLst/>
-          </a:prstGeom>
-          <a:noFill/>
-        </p:spPr>
-        <p:txBody>
-          <a:bodyPr wrap="square" lIns="0" rIns="0" tIns="0" bIns="0">
-            <a:spAutoFit/>
-          </a:bodyPr>
-          <a:lstStyle/>
-          <a:p>
-            <a:pPr algn="l">
-              <a:lnSpc>
-                <a:spcPct val="125000"/>
-              </a:lnSpc>
-            </a:pPr>
-            <a:r>
-              <a:rPr sz="1500" b="0">
-                <a:solidFill>
-                  <a:srgbClr val="8B9AAF"/>
-                </a:solidFill>
-                <a:latin typeface="Apple SD Gothic Neo"/>
-              </a:rPr>
-              <a:t>시도한 전략 수가 공개된다</a:t>
-            </a:r>
-          </a:p>
-        </p:txBody>
-      </p:sp>
-      <p:sp>
-        <p:nvSpPr>
-          <p:cNvPr id="20" name="TextBox 19"/>
-          <p:cNvSpPr txBox="1"/>
-          <p:nvPr/>
-        </p:nvSpPr>
-        <p:spPr>
-          <a:xfrm>
-            <a:off x="914400" y="4892040"/>
-            <a:ext cx="731520" cy="411480"/>
-          </a:xfrm>
-          <a:prstGeom prst="rect">
-            <a:avLst/>
-          </a:prstGeom>
-          <a:noFill/>
-        </p:spPr>
-        <p:txBody>
-          <a:bodyPr wrap="square" lIns="0" rIns="0" tIns="0" bIns="0">
-            <a:spAutoFit/>
-          </a:bodyPr>
-          <a:lstStyle/>
-          <a:p>
-            <a:pPr algn="l">
-              <a:lnSpc>
-                <a:spcPct val="125000"/>
-              </a:lnSpc>
-            </a:pPr>
-            <a:r>
-              <a:rPr sz="1900" b="1">
-                <a:solidFill>
-                  <a:srgbClr val="8B9AAF"/>
-                </a:solidFill>
-                <a:latin typeface="Apple SD Gothic Neo"/>
-              </a:rPr>
-              <a:t>7</a:t>
-            </a:r>
-          </a:p>
-        </p:txBody>
-      </p:sp>
-      <p:sp>
-        <p:nvSpPr>
-          <p:cNvPr id="21" name="TextBox 20"/>
-          <p:cNvSpPr txBox="1"/>
-          <p:nvPr/>
-        </p:nvSpPr>
-        <p:spPr>
-          <a:xfrm>
-            <a:off x="1691640" y="4892040"/>
-            <a:ext cx="4206240" cy="411480"/>
-          </a:xfrm>
-          <a:prstGeom prst="rect">
-            <a:avLst/>
-          </a:prstGeom>
-          <a:noFill/>
-        </p:spPr>
-        <p:txBody>
-          <a:bodyPr wrap="square" lIns="0" rIns="0" tIns="0" bIns="0">
-            <a:spAutoFit/>
-          </a:bodyPr>
-          <a:lstStyle/>
-          <a:p>
-            <a:pPr algn="l">
-              <a:lnSpc>
-                <a:spcPct val="125000"/>
-              </a:lnSpc>
-            </a:pPr>
-            <a:r>
-              <a:rPr sz="1900" b="0">
-                <a:solidFill>
-                  <a:srgbClr val="ECF1F7"/>
-                </a:solidFill>
-                <a:latin typeface="Apple SD Gothic Neo"/>
-              </a:rPr>
-              <a:t>NAV 자체를 지어내기</a:t>
-            </a:r>
-          </a:p>
-        </p:txBody>
-      </p:sp>
-      <p:sp>
-        <p:nvSpPr>
-          <p:cNvPr id="22" name="TextBox 21"/>
-          <p:cNvSpPr txBox="1"/>
-          <p:nvPr/>
-        </p:nvSpPr>
-        <p:spPr>
-          <a:xfrm>
-            <a:off x="6035040" y="4937760"/>
-            <a:ext cx="5486400" cy="411480"/>
-          </a:xfrm>
-          <a:prstGeom prst="rect">
-            <a:avLst/>
-          </a:prstGeom>
-          <a:noFill/>
-        </p:spPr>
-        <p:txBody>
-          <a:bodyPr wrap="square" lIns="0" rIns="0" tIns="0" bIns="0">
-            <a:spAutoFit/>
-          </a:bodyPr>
-          <a:lstStyle/>
-          <a:p>
-            <a:pPr algn="l">
-              <a:lnSpc>
-                <a:spcPct val="125000"/>
-              </a:lnSpc>
-            </a:pPr>
-            <a:r>
-              <a:rPr sz="1500" b="0">
-                <a:solidFill>
-                  <a:srgbClr val="8B9AAF"/>
-                </a:solidFill>
-                <a:latin typeface="Apple SD Gothic Neo"/>
-              </a:rPr>
-              <a:t>잔고를 제3자가 증언한다</a:t>
-            </a:r>
-          </a:p>
-        </p:txBody>
-      </p:sp>
-      <p:sp>
-        <p:nvSpPr>
-          <p:cNvPr id="23" name="TextBox 22"/>
-          <p:cNvSpPr txBox="1"/>
-          <p:nvPr/>
-        </p:nvSpPr>
-        <p:spPr>
-          <a:xfrm>
-            <a:off x="914400" y="5669280"/>
-            <a:ext cx="10332720" cy="914400"/>
-          </a:xfrm>
-          <a:prstGeom prst="rect">
-            <a:avLst/>
-          </a:prstGeom>
-          <a:noFill/>
-        </p:spPr>
-        <p:txBody>
-          <a:bodyPr wrap="square" lIns="0" rIns="0" tIns="0" bIns="0">
-            <a:spAutoFit/>
-          </a:bodyPr>
-          <a:lstStyle/>
-          <a:p>
-            <a:pPr algn="l">
-              <a:lnSpc>
-                <a:spcPct val="125000"/>
-              </a:lnSpc>
-            </a:pPr>
-            <a:r>
-              <a:rPr sz="1700" b="0">
-                <a:solidFill>
-                  <a:srgbClr val="8B9AAF"/>
-                </a:solidFill>
-                <a:latin typeface="Apple SD Gothic Neo"/>
-              </a:rPr>
-              <a:t>5번과 6번이 차별점이다. Obscura, Proof of Alpha 는 과거 성과를 인증할 뿐,</a:t>
-            </a:r>
-          </a:p>
-          <a:p>
-            <a:pPr algn="l">
-              <a:lnSpc>
-                <a:spcPct val="125000"/>
-              </a:lnSpc>
-            </a:pPr>
-            <a:r>
-              <a:rPr sz="1700" b="0">
-                <a:solidFill>
-                  <a:srgbClr val="8B9AAF"/>
-                </a:solidFill>
-                <a:latin typeface="Apple SD Gothic Neo"/>
-              </a:rPr>
-              <a:t>몇 번 시도했는지는 다루지 않는다.</a:t>
+              <a:t>체인에 오르는 것은 커밋과 증명뿐  ·  전략, 거래, 잔고는 체인 밖</a:t>
             </a:r>
           </a:p>
         </p:txBody>
@@ -6342,7 +5907,7 @@
         </p:nvSpPr>
         <p:spPr>
           <a:xfrm>
-            <a:off x="640080" y="411480"/>
+            <a:off x="914400" y="640080"/>
             <a:ext cx="7315200" cy="320040"/>
           </a:xfrm>
           <a:prstGeom prst="rect">
@@ -6368,45 +5933,21 @@
                 </a:solidFill>
                 <a:latin typeface="Apple SD Gothic Neo"/>
               </a:rPr>
-              <a:t>회로 5 — 손실을 빼고 계산할 수 없다</a:t>
-            </a:r>
-          </a:p>
-        </p:txBody>
-      </p:sp>
-      <p:pic>
-        <p:nvPicPr>
-          <p:cNvPr id="4" name="Picture 3" descr="nav.png"/>
-          <p:cNvPicPr>
-            <a:picLocks noChangeAspect="1"/>
-          </p:cNvPicPr>
-          <p:nvPr/>
-        </p:nvPicPr>
-        <p:blipFill>
-          <a:blip r:embed="rId2"/>
-          <a:stretch>
-            <a:fillRect/>
-          </a:stretch>
-        </p:blipFill>
-        <p:spPr>
-          <a:xfrm>
-            <a:off x="411480" y="914400"/>
-            <a:ext cx="11384280" cy="4590435"/>
-          </a:xfrm>
-          <a:prstGeom prst="rect">
-            <a:avLst/>
-          </a:prstGeom>
-        </p:spPr>
-      </p:pic>
-      <p:sp>
-        <p:nvSpPr>
-          <p:cNvPr id="5" name="TextBox 4"/>
+              <a:t>회로 7개, 각각 막는 공격 하나</a:t>
+            </a:r>
+          </a:p>
+        </p:txBody>
+      </p:sp>
+      <p:sp>
+        <p:nvSpPr>
+          <p:cNvPr id="4" name="TextBox 3"/>
           <p:cNvSpPr txBox="1"/>
           <p:nvPr/>
         </p:nvSpPr>
         <p:spPr>
           <a:xfrm>
-            <a:off x="640080" y="5806440"/>
-            <a:ext cx="10972800" cy="457200"/>
+            <a:off x="914400" y="1051560"/>
+            <a:ext cx="10332720" cy="640080"/>
           </a:xfrm>
           <a:prstGeom prst="rect">
             <a:avLst/>
@@ -6425,13 +5966,754 @@
               </a:lnSpc>
             </a:pPr>
             <a:r>
-              <a:rPr sz="1800" b="1">
+              <a:rPr sz="3200" b="1">
+                <a:solidFill>
+                  <a:srgbClr val="ECF1F7"/>
+                </a:solidFill>
+                <a:latin typeface="Apple SD Gothic Neo"/>
+              </a:rPr>
+              <a:t>차단하는 공격 7가지</a:t>
+            </a:r>
+          </a:p>
+        </p:txBody>
+      </p:sp>
+      <p:sp>
+        <p:nvSpPr>
+          <p:cNvPr id="5" name="TextBox 4"/>
+          <p:cNvSpPr txBox="1"/>
+          <p:nvPr/>
+        </p:nvSpPr>
+        <p:spPr>
+          <a:xfrm>
+            <a:off x="914400" y="2057400"/>
+            <a:ext cx="731520" cy="411480"/>
+          </a:xfrm>
+          <a:prstGeom prst="rect">
+            <a:avLst/>
+          </a:prstGeom>
+          <a:noFill/>
+        </p:spPr>
+        <p:txBody>
+          <a:bodyPr wrap="square" lIns="0" rIns="0" tIns="0" bIns="0">
+            <a:spAutoFit/>
+          </a:bodyPr>
+          <a:lstStyle/>
+          <a:p>
+            <a:pPr algn="l">
+              <a:lnSpc>
+                <a:spcPct val="125000"/>
+              </a:lnSpc>
+            </a:pPr>
+            <a:r>
+              <a:rPr sz="1900" b="1">
+                <a:solidFill>
+                  <a:srgbClr val="8B9AAF"/>
+                </a:solidFill>
+                <a:latin typeface="Apple SD Gothic Neo"/>
+              </a:rPr>
+              <a:t>1</a:t>
+            </a:r>
+          </a:p>
+        </p:txBody>
+      </p:sp>
+      <p:sp>
+        <p:nvSpPr>
+          <p:cNvPr id="6" name="TextBox 5"/>
+          <p:cNvSpPr txBox="1"/>
+          <p:nvPr/>
+        </p:nvSpPr>
+        <p:spPr>
+          <a:xfrm>
+            <a:off x="1691640" y="2057400"/>
+            <a:ext cx="4206240" cy="411480"/>
+          </a:xfrm>
+          <a:prstGeom prst="rect">
+            <a:avLst/>
+          </a:prstGeom>
+          <a:noFill/>
+        </p:spPr>
+        <p:txBody>
+          <a:bodyPr wrap="square" lIns="0" rIns="0" tIns="0" bIns="0">
+            <a:spAutoFit/>
+          </a:bodyPr>
+          <a:lstStyle/>
+          <a:p>
+            <a:pPr algn="l">
+              <a:lnSpc>
+                <a:spcPct val="125000"/>
+              </a:lnSpc>
+            </a:pPr>
+            <a:r>
+              <a:rPr sz="1900" b="0">
+                <a:solidFill>
+                  <a:srgbClr val="8B9AAF"/>
+                </a:solidFill>
+                <a:latin typeface="Apple SD Gothic Neo"/>
+              </a:rPr>
+              <a:t>전략을 나중에 바꾸기</a:t>
+            </a:r>
+          </a:p>
+        </p:txBody>
+      </p:sp>
+      <p:sp>
+        <p:nvSpPr>
+          <p:cNvPr id="7" name="TextBox 6"/>
+          <p:cNvSpPr txBox="1"/>
+          <p:nvPr/>
+        </p:nvSpPr>
+        <p:spPr>
+          <a:xfrm>
+            <a:off x="6035040" y="2103120"/>
+            <a:ext cx="5486400" cy="411480"/>
+          </a:xfrm>
+          <a:prstGeom prst="rect">
+            <a:avLst/>
+          </a:prstGeom>
+          <a:noFill/>
+        </p:spPr>
+        <p:txBody>
+          <a:bodyPr wrap="square" lIns="0" rIns="0" tIns="0" bIns="0">
+            <a:spAutoFit/>
+          </a:bodyPr>
+          <a:lstStyle/>
+          <a:p>
+            <a:pPr algn="l">
+              <a:lnSpc>
+                <a:spcPct val="125000"/>
+              </a:lnSpc>
+            </a:pPr>
+            <a:r>
+              <a:rPr sz="1500" b="0">
+                <a:solidFill>
+                  <a:srgbClr val="8B9AAF"/>
+                </a:solidFill>
+                <a:latin typeface="Apple SD Gothic Neo"/>
+              </a:rPr>
+              <a:t>전략 해시를 거래 전에 커밋</a:t>
+            </a:r>
+          </a:p>
+        </p:txBody>
+      </p:sp>
+      <p:sp>
+        <p:nvSpPr>
+          <p:cNvPr id="8" name="TextBox 7"/>
+          <p:cNvSpPr txBox="1"/>
+          <p:nvPr/>
+        </p:nvSpPr>
+        <p:spPr>
+          <a:xfrm>
+            <a:off x="914400" y="2624328"/>
+            <a:ext cx="731520" cy="411480"/>
+          </a:xfrm>
+          <a:prstGeom prst="rect">
+            <a:avLst/>
+          </a:prstGeom>
+          <a:noFill/>
+        </p:spPr>
+        <p:txBody>
+          <a:bodyPr wrap="square" lIns="0" rIns="0" tIns="0" bIns="0">
+            <a:spAutoFit/>
+          </a:bodyPr>
+          <a:lstStyle/>
+          <a:p>
+            <a:pPr algn="l">
+              <a:lnSpc>
+                <a:spcPct val="125000"/>
+              </a:lnSpc>
+            </a:pPr>
+            <a:r>
+              <a:rPr sz="1900" b="1">
+                <a:solidFill>
+                  <a:srgbClr val="8B9AAF"/>
+                </a:solidFill>
+                <a:latin typeface="Apple SD Gothic Neo"/>
+              </a:rPr>
+              <a:t>2-3</a:t>
+            </a:r>
+          </a:p>
+        </p:txBody>
+      </p:sp>
+      <p:sp>
+        <p:nvSpPr>
+          <p:cNvPr id="9" name="TextBox 8"/>
+          <p:cNvSpPr txBox="1"/>
+          <p:nvPr/>
+        </p:nvSpPr>
+        <p:spPr>
+          <a:xfrm>
+            <a:off x="1691640" y="2624328"/>
+            <a:ext cx="4206240" cy="411480"/>
+          </a:xfrm>
+          <a:prstGeom prst="rect">
+            <a:avLst/>
+          </a:prstGeom>
+          <a:noFill/>
+        </p:spPr>
+        <p:txBody>
+          <a:bodyPr wrap="square" lIns="0" rIns="0" tIns="0" bIns="0">
+            <a:spAutoFit/>
+          </a:bodyPr>
+          <a:lstStyle/>
+          <a:p>
+            <a:pPr algn="l">
+              <a:lnSpc>
+                <a:spcPct val="125000"/>
+              </a:lnSpc>
+            </a:pPr>
+            <a:r>
+              <a:rPr sz="1900" b="0">
+                <a:solidFill>
+                  <a:srgbClr val="8B9AAF"/>
+                </a:solidFill>
+                <a:latin typeface="Apple SD Gothic Neo"/>
+              </a:rPr>
+              <a:t>없는 수익률 주장</a:t>
+            </a:r>
+          </a:p>
+        </p:txBody>
+      </p:sp>
+      <p:sp>
+        <p:nvSpPr>
+          <p:cNvPr id="10" name="TextBox 9"/>
+          <p:cNvSpPr txBox="1"/>
+          <p:nvPr/>
+        </p:nvSpPr>
+        <p:spPr>
+          <a:xfrm>
+            <a:off x="6035040" y="2670048"/>
+            <a:ext cx="5486400" cy="411480"/>
+          </a:xfrm>
+          <a:prstGeom prst="rect">
+            <a:avLst/>
+          </a:prstGeom>
+          <a:noFill/>
+        </p:spPr>
+        <p:txBody>
+          <a:bodyPr wrap="square" lIns="0" rIns="0" tIns="0" bIns="0">
+            <a:spAutoFit/>
+          </a:bodyPr>
+          <a:lstStyle/>
+          <a:p>
+            <a:pPr algn="l">
+              <a:lnSpc>
+                <a:spcPct val="125000"/>
+              </a:lnSpc>
+            </a:pPr>
+            <a:r>
+              <a:rPr sz="1500" b="0">
+                <a:solidFill>
+                  <a:srgbClr val="8B9AAF"/>
+                </a:solidFill>
+                <a:latin typeface="Apple SD Gothic Neo"/>
+              </a:rPr>
+              <a:t>수익률이 커밋된 거래 로그에서 나왔음을 증명</a:t>
+            </a:r>
+          </a:p>
+        </p:txBody>
+      </p:sp>
+      <p:sp>
+        <p:nvSpPr>
+          <p:cNvPr id="11" name="TextBox 10"/>
+          <p:cNvSpPr txBox="1"/>
+          <p:nvPr/>
+        </p:nvSpPr>
+        <p:spPr>
+          <a:xfrm>
+            <a:off x="914400" y="3191256"/>
+            <a:ext cx="731520" cy="411480"/>
+          </a:xfrm>
+          <a:prstGeom prst="rect">
+            <a:avLst/>
+          </a:prstGeom>
+          <a:noFill/>
+        </p:spPr>
+        <p:txBody>
+          <a:bodyPr wrap="square" lIns="0" rIns="0" tIns="0" bIns="0">
+            <a:spAutoFit/>
+          </a:bodyPr>
+          <a:lstStyle/>
+          <a:p>
+            <a:pPr algn="l">
+              <a:lnSpc>
+                <a:spcPct val="125000"/>
+              </a:lnSpc>
+            </a:pPr>
+            <a:r>
+              <a:rPr sz="1900" b="1">
+                <a:solidFill>
+                  <a:srgbClr val="8B9AAF"/>
+                </a:solidFill>
+                <a:latin typeface="Apple SD Gothic Neo"/>
+              </a:rPr>
+              <a:t>4</a:t>
+            </a:r>
+          </a:p>
+        </p:txBody>
+      </p:sp>
+      <p:sp>
+        <p:nvSpPr>
+          <p:cNvPr id="12" name="TextBox 11"/>
+          <p:cNvSpPr txBox="1"/>
+          <p:nvPr/>
+        </p:nvSpPr>
+        <p:spPr>
+          <a:xfrm>
+            <a:off x="1691640" y="3191256"/>
+            <a:ext cx="4206240" cy="411480"/>
+          </a:xfrm>
+          <a:prstGeom prst="rect">
+            <a:avLst/>
+          </a:prstGeom>
+          <a:noFill/>
+        </p:spPr>
+        <p:txBody>
+          <a:bodyPr wrap="square" lIns="0" rIns="0" tIns="0" bIns="0">
+            <a:spAutoFit/>
+          </a:bodyPr>
+          <a:lstStyle/>
+          <a:p>
+            <a:pPr algn="l">
+              <a:lnSpc>
+                <a:spcPct val="125000"/>
+              </a:lnSpc>
+            </a:pPr>
+            <a:r>
+              <a:rPr sz="1900" b="0">
+                <a:solidFill>
+                  <a:srgbClr val="8B9AAF"/>
+                </a:solidFill>
+                <a:latin typeface="Apple SD Gothic Neo"/>
+              </a:rPr>
+              <a:t>리스크 관리 과장</a:t>
+            </a:r>
+          </a:p>
+        </p:txBody>
+      </p:sp>
+      <p:sp>
+        <p:nvSpPr>
+          <p:cNvPr id="13" name="TextBox 12"/>
+          <p:cNvSpPr txBox="1"/>
+          <p:nvPr/>
+        </p:nvSpPr>
+        <p:spPr>
+          <a:xfrm>
+            <a:off x="6035040" y="3236976"/>
+            <a:ext cx="5486400" cy="411480"/>
+          </a:xfrm>
+          <a:prstGeom prst="rect">
+            <a:avLst/>
+          </a:prstGeom>
+          <a:noFill/>
+        </p:spPr>
+        <p:txBody>
+          <a:bodyPr wrap="square" lIns="0" rIns="0" tIns="0" bIns="0">
+            <a:spAutoFit/>
+          </a:bodyPr>
+          <a:lstStyle/>
+          <a:p>
+            <a:pPr algn="l">
+              <a:lnSpc>
+                <a:spcPct val="125000"/>
+              </a:lnSpc>
+            </a:pPr>
+            <a:r>
+              <a:rPr sz="1500" b="0">
+                <a:solidFill>
+                  <a:srgbClr val="8B9AAF"/>
+                </a:solidFill>
+                <a:latin typeface="Apple SD Gothic Neo"/>
+              </a:rPr>
+              <a:t>포지션 한도가 지켜졌음을 증명</a:t>
+            </a:r>
+          </a:p>
+        </p:txBody>
+      </p:sp>
+      <p:sp>
+        <p:nvSpPr>
+          <p:cNvPr id="14" name="TextBox 13"/>
+          <p:cNvSpPr txBox="1"/>
+          <p:nvPr/>
+        </p:nvSpPr>
+        <p:spPr>
+          <a:xfrm>
+            <a:off x="914400" y="3758184"/>
+            <a:ext cx="731520" cy="411480"/>
+          </a:xfrm>
+          <a:prstGeom prst="rect">
+            <a:avLst/>
+          </a:prstGeom>
+          <a:noFill/>
+        </p:spPr>
+        <p:txBody>
+          <a:bodyPr wrap="square" lIns="0" rIns="0" tIns="0" bIns="0">
+            <a:spAutoFit/>
+          </a:bodyPr>
+          <a:lstStyle/>
+          <a:p>
+            <a:pPr algn="l">
+              <a:lnSpc>
+                <a:spcPct val="125000"/>
+              </a:lnSpc>
+            </a:pPr>
+            <a:r>
+              <a:rPr sz="1900" b="1">
                 <a:solidFill>
                   <a:srgbClr val="5EE0B0"/>
                 </a:solidFill>
                 <a:latin typeface="Apple SD Gothic Neo"/>
               </a:rPr>
-              <a:t>부풀린 주장 3건은 거부된다. 실제 성과 그대로인 주장 1건만 통과한다.</a:t>
+              <a:t>5</a:t>
+            </a:r>
+          </a:p>
+        </p:txBody>
+      </p:sp>
+      <p:sp>
+        <p:nvSpPr>
+          <p:cNvPr id="15" name="TextBox 14"/>
+          <p:cNvSpPr txBox="1"/>
+          <p:nvPr/>
+        </p:nvSpPr>
+        <p:spPr>
+          <a:xfrm>
+            <a:off x="1691640" y="3758184"/>
+            <a:ext cx="4206240" cy="411480"/>
+          </a:xfrm>
+          <a:prstGeom prst="rect">
+            <a:avLst/>
+          </a:prstGeom>
+          <a:noFill/>
+        </p:spPr>
+        <p:txBody>
+          <a:bodyPr wrap="square" lIns="0" rIns="0" tIns="0" bIns="0">
+            <a:spAutoFit/>
+          </a:bodyPr>
+          <a:lstStyle/>
+          <a:p>
+            <a:pPr algn="l">
+              <a:lnSpc>
+                <a:spcPct val="125000"/>
+              </a:lnSpc>
+            </a:pPr>
+            <a:r>
+              <a:rPr sz="1900" b="1">
+                <a:solidFill>
+                  <a:srgbClr val="5EE0B0"/>
+                </a:solidFill>
+                <a:latin typeface="Apple SD Gothic Neo"/>
+              </a:rPr>
+              <a:t>손실 거래를 빼고 계산하기</a:t>
+            </a:r>
+          </a:p>
+        </p:txBody>
+      </p:sp>
+      <p:sp>
+        <p:nvSpPr>
+          <p:cNvPr id="16" name="TextBox 15"/>
+          <p:cNvSpPr txBox="1"/>
+          <p:nvPr/>
+        </p:nvSpPr>
+        <p:spPr>
+          <a:xfrm>
+            <a:off x="6035040" y="3803904"/>
+            <a:ext cx="5486400" cy="411480"/>
+          </a:xfrm>
+          <a:prstGeom prst="rect">
+            <a:avLst/>
+          </a:prstGeom>
+          <a:noFill/>
+        </p:spPr>
+        <p:txBody>
+          <a:bodyPr wrap="square" lIns="0" rIns="0" tIns="0" bIns="0">
+            <a:spAutoFit/>
+          </a:bodyPr>
+          <a:lstStyle/>
+          <a:p>
+            <a:pPr algn="l">
+              <a:lnSpc>
+                <a:spcPct val="125000"/>
+              </a:lnSpc>
+            </a:pPr>
+            <a:r>
+              <a:rPr sz="1500" b="0">
+                <a:solidFill>
+                  <a:srgbClr val="ECF1F7"/>
+                </a:solidFill>
+                <a:latin typeface="Apple SD Gothic Neo"/>
+              </a:rPr>
+              <a:t>수익률이 커밋된 계좌 잔고와 맞음을 증명</a:t>
+            </a:r>
+          </a:p>
+        </p:txBody>
+      </p:sp>
+      <p:sp>
+        <p:nvSpPr>
+          <p:cNvPr id="17" name="TextBox 16"/>
+          <p:cNvSpPr txBox="1"/>
+          <p:nvPr/>
+        </p:nvSpPr>
+        <p:spPr>
+          <a:xfrm>
+            <a:off x="914400" y="4325112"/>
+            <a:ext cx="731520" cy="411480"/>
+          </a:xfrm>
+          <a:prstGeom prst="rect">
+            <a:avLst/>
+          </a:prstGeom>
+          <a:noFill/>
+        </p:spPr>
+        <p:txBody>
+          <a:bodyPr wrap="square" lIns="0" rIns="0" tIns="0" bIns="0">
+            <a:spAutoFit/>
+          </a:bodyPr>
+          <a:lstStyle/>
+          <a:p>
+            <a:pPr algn="l">
+              <a:lnSpc>
+                <a:spcPct val="125000"/>
+              </a:lnSpc>
+            </a:pPr>
+            <a:r>
+              <a:rPr sz="1900" b="1">
+                <a:solidFill>
+                  <a:srgbClr val="5EE0B0"/>
+                </a:solidFill>
+                <a:latin typeface="Apple SD Gothic Neo"/>
+              </a:rPr>
+              <a:t>6</a:t>
+            </a:r>
+          </a:p>
+        </p:txBody>
+      </p:sp>
+      <p:sp>
+        <p:nvSpPr>
+          <p:cNvPr id="18" name="TextBox 17"/>
+          <p:cNvSpPr txBox="1"/>
+          <p:nvPr/>
+        </p:nvSpPr>
+        <p:spPr>
+          <a:xfrm>
+            <a:off x="1691640" y="4325112"/>
+            <a:ext cx="4206240" cy="411480"/>
+          </a:xfrm>
+          <a:prstGeom prst="rect">
+            <a:avLst/>
+          </a:prstGeom>
+          <a:noFill/>
+        </p:spPr>
+        <p:txBody>
+          <a:bodyPr wrap="square" lIns="0" rIns="0" tIns="0" bIns="0">
+            <a:spAutoFit/>
+          </a:bodyPr>
+          <a:lstStyle/>
+          <a:p>
+            <a:pPr algn="l">
+              <a:lnSpc>
+                <a:spcPct val="125000"/>
+              </a:lnSpc>
+            </a:pPr>
+            <a:r>
+              <a:rPr sz="1900" b="1">
+                <a:solidFill>
+                  <a:srgbClr val="5EE0B0"/>
+                </a:solidFill>
+                <a:latin typeface="Apple SD Gothic Neo"/>
+              </a:rPr>
+              <a:t>시행 횟수를 숨기기</a:t>
+            </a:r>
+          </a:p>
+        </p:txBody>
+      </p:sp>
+      <p:sp>
+        <p:nvSpPr>
+          <p:cNvPr id="19" name="TextBox 18"/>
+          <p:cNvSpPr txBox="1"/>
+          <p:nvPr/>
+        </p:nvSpPr>
+        <p:spPr>
+          <a:xfrm>
+            <a:off x="6035040" y="4370832"/>
+            <a:ext cx="5486400" cy="411480"/>
+          </a:xfrm>
+          <a:prstGeom prst="rect">
+            <a:avLst/>
+          </a:prstGeom>
+          <a:noFill/>
+        </p:spPr>
+        <p:txBody>
+          <a:bodyPr wrap="square" lIns="0" rIns="0" tIns="0" bIns="0">
+            <a:spAutoFit/>
+          </a:bodyPr>
+          <a:lstStyle/>
+          <a:p>
+            <a:pPr algn="l">
+              <a:lnSpc>
+                <a:spcPct val="125000"/>
+              </a:lnSpc>
+            </a:pPr>
+            <a:r>
+              <a:rPr sz="1500" b="0">
+                <a:solidFill>
+                  <a:srgbClr val="ECF1F7"/>
+                </a:solidFill>
+                <a:latin typeface="Apple SD Gothic Neo"/>
+              </a:rPr>
+              <a:t>시도한 전략 수 공개</a:t>
+            </a:r>
+          </a:p>
+        </p:txBody>
+      </p:sp>
+      <p:sp>
+        <p:nvSpPr>
+          <p:cNvPr id="20" name="TextBox 19"/>
+          <p:cNvSpPr txBox="1"/>
+          <p:nvPr/>
+        </p:nvSpPr>
+        <p:spPr>
+          <a:xfrm>
+            <a:off x="914400" y="4892040"/>
+            <a:ext cx="731520" cy="411480"/>
+          </a:xfrm>
+          <a:prstGeom prst="rect">
+            <a:avLst/>
+          </a:prstGeom>
+          <a:noFill/>
+        </p:spPr>
+        <p:txBody>
+          <a:bodyPr wrap="square" lIns="0" rIns="0" tIns="0" bIns="0">
+            <a:spAutoFit/>
+          </a:bodyPr>
+          <a:lstStyle/>
+          <a:p>
+            <a:pPr algn="l">
+              <a:lnSpc>
+                <a:spcPct val="125000"/>
+              </a:lnSpc>
+            </a:pPr>
+            <a:r>
+              <a:rPr sz="1900" b="1">
+                <a:solidFill>
+                  <a:srgbClr val="8B9AAF"/>
+                </a:solidFill>
+                <a:latin typeface="Apple SD Gothic Neo"/>
+              </a:rPr>
+              <a:t>7</a:t>
+            </a:r>
+          </a:p>
+        </p:txBody>
+      </p:sp>
+      <p:sp>
+        <p:nvSpPr>
+          <p:cNvPr id="21" name="TextBox 20"/>
+          <p:cNvSpPr txBox="1"/>
+          <p:nvPr/>
+        </p:nvSpPr>
+        <p:spPr>
+          <a:xfrm>
+            <a:off x="1691640" y="4892040"/>
+            <a:ext cx="4206240" cy="411480"/>
+          </a:xfrm>
+          <a:prstGeom prst="rect">
+            <a:avLst/>
+          </a:prstGeom>
+          <a:noFill/>
+        </p:spPr>
+        <p:txBody>
+          <a:bodyPr wrap="square" lIns="0" rIns="0" tIns="0" bIns="0">
+            <a:spAutoFit/>
+          </a:bodyPr>
+          <a:lstStyle/>
+          <a:p>
+            <a:pPr algn="l">
+              <a:lnSpc>
+                <a:spcPct val="125000"/>
+              </a:lnSpc>
+            </a:pPr>
+            <a:r>
+              <a:rPr sz="1900" b="0">
+                <a:solidFill>
+                  <a:srgbClr val="8B9AAF"/>
+                </a:solidFill>
+                <a:latin typeface="Apple SD Gothic Neo"/>
+              </a:rPr>
+              <a:t>NAV 자체를 지어내기</a:t>
+            </a:r>
+          </a:p>
+        </p:txBody>
+      </p:sp>
+      <p:sp>
+        <p:nvSpPr>
+          <p:cNvPr id="22" name="TextBox 21"/>
+          <p:cNvSpPr txBox="1"/>
+          <p:nvPr/>
+        </p:nvSpPr>
+        <p:spPr>
+          <a:xfrm>
+            <a:off x="6035040" y="4937760"/>
+            <a:ext cx="5486400" cy="411480"/>
+          </a:xfrm>
+          <a:prstGeom prst="rect">
+            <a:avLst/>
+          </a:prstGeom>
+          <a:noFill/>
+        </p:spPr>
+        <p:txBody>
+          <a:bodyPr wrap="square" lIns="0" rIns="0" tIns="0" bIns="0">
+            <a:spAutoFit/>
+          </a:bodyPr>
+          <a:lstStyle/>
+          <a:p>
+            <a:pPr algn="l">
+              <a:lnSpc>
+                <a:spcPct val="125000"/>
+              </a:lnSpc>
+            </a:pPr>
+            <a:r>
+              <a:rPr sz="1500" b="0">
+                <a:solidFill>
+                  <a:srgbClr val="8B9AAF"/>
+                </a:solidFill>
+                <a:latin typeface="Apple SD Gothic Neo"/>
+              </a:rPr>
+              <a:t>제3자의 잔고 증언</a:t>
+            </a:r>
+          </a:p>
+        </p:txBody>
+      </p:sp>
+      <p:sp>
+        <p:nvSpPr>
+          <p:cNvPr id="23" name="TextBox 22"/>
+          <p:cNvSpPr txBox="1"/>
+          <p:nvPr/>
+        </p:nvSpPr>
+        <p:spPr>
+          <a:xfrm>
+            <a:off x="914400" y="5760720"/>
+            <a:ext cx="10332720" cy="548640"/>
+          </a:xfrm>
+          <a:prstGeom prst="rect">
+            <a:avLst/>
+          </a:prstGeom>
+          <a:noFill/>
+        </p:spPr>
+        <p:txBody>
+          <a:bodyPr wrap="square" lIns="0" rIns="0" tIns="0" bIns="0">
+            <a:spAutoFit/>
+          </a:bodyPr>
+          <a:lstStyle/>
+          <a:p>
+            <a:pPr algn="l">
+              <a:lnSpc>
+                <a:spcPct val="125000"/>
+              </a:lnSpc>
+            </a:pPr>
+            <a:r>
+              <a:rPr sz="1700" b="0">
+                <a:solidFill>
+                  <a:srgbClr val="E8B45C"/>
+                </a:solidFill>
+                <a:latin typeface="Apple SD Gothic Neo"/>
+              </a:rPr>
+              <a:t>차별점은 5번과 6번  ·  Obscura, Proof of Alpha 는 과거 성과 인증까지, 시도 횟수는 다루지 않음</a:t>
             </a:r>
           </a:p>
         </p:txBody>
@@ -6506,7 +6788,7 @@
         </p:nvSpPr>
         <p:spPr>
           <a:xfrm>
-            <a:off x="914400" y="731520"/>
+            <a:off x="640080" y="411480"/>
             <a:ext cx="7315200" cy="320040"/>
           </a:xfrm>
           <a:prstGeom prst="rect">
@@ -6532,108 +6814,14 @@
                 </a:solidFill>
                 <a:latin typeface="Apple SD Gothic Neo"/>
               </a:rPr>
-              <a:t>Midnight 을 어떻게 썼는가</a:t>
-            </a:r>
-          </a:p>
-        </p:txBody>
-      </p:sp>
-      <p:sp>
-        <p:nvSpPr>
-          <p:cNvPr id="4" name="TextBox 3"/>
-          <p:cNvSpPr txBox="1"/>
-          <p:nvPr/>
-        </p:nvSpPr>
-        <p:spPr>
-          <a:xfrm>
-            <a:off x="914400" y="1143000"/>
-            <a:ext cx="10332720" cy="1280160"/>
-          </a:xfrm>
-          <a:prstGeom prst="rect">
-            <a:avLst/>
-          </a:prstGeom>
-          <a:noFill/>
-        </p:spPr>
-        <p:txBody>
-          <a:bodyPr wrap="square" lIns="0" rIns="0" tIns="0" bIns="0">
-            <a:spAutoFit/>
-          </a:bodyPr>
-          <a:lstStyle/>
-          <a:p>
-            <a:pPr algn="l">
-              <a:lnSpc>
-                <a:spcPct val="125000"/>
-              </a:lnSpc>
-            </a:pPr>
-            <a:r>
-              <a:rPr sz="3400" b="1">
-                <a:solidFill>
-                  <a:srgbClr val="ECF1F7"/>
-                </a:solidFill>
-                <a:latin typeface="Apple SD Gothic Neo"/>
-              </a:rPr>
-              <a:t>프라이버시를</a:t>
-            </a:r>
-          </a:p>
-          <a:p>
-            <a:pPr algn="l">
-              <a:lnSpc>
-                <a:spcPct val="125000"/>
-              </a:lnSpc>
-            </a:pPr>
-            <a:r>
-              <a:rPr sz="3400" b="1">
-                <a:solidFill>
-                  <a:srgbClr val="ECF1F7"/>
-                </a:solidFill>
-                <a:latin typeface="Apple SD Gothic Neo"/>
-              </a:rPr>
-              <a:t>타입 검사가 강제한다</a:t>
-            </a:r>
-          </a:p>
-        </p:txBody>
-      </p:sp>
-      <p:sp>
-        <p:nvSpPr>
-          <p:cNvPr id="5" name="TextBox 4"/>
-          <p:cNvSpPr txBox="1"/>
-          <p:nvPr/>
-        </p:nvSpPr>
-        <p:spPr>
-          <a:xfrm>
-            <a:off x="914400" y="2606040"/>
-            <a:ext cx="10332720" cy="365760"/>
-          </a:xfrm>
-          <a:prstGeom prst="rect">
-            <a:avLst/>
-          </a:prstGeom>
-          <a:noFill/>
-        </p:spPr>
-        <p:txBody>
-          <a:bodyPr wrap="square" lIns="0" rIns="0" tIns="0" bIns="0">
-            <a:spAutoFit/>
-          </a:bodyPr>
-          <a:lstStyle/>
-          <a:p>
-            <a:pPr algn="l">
-              <a:lnSpc>
-                <a:spcPct val="125000"/>
-              </a:lnSpc>
-            </a:pPr>
-            <a:r>
-              <a:rPr sz="1600" b="0">
-                <a:solidFill>
-                  <a:srgbClr val="8B9AAF"/>
-                </a:solidFill>
-                <a:latin typeface="Apple SD Gothic Neo"/>
-              </a:rPr>
-              <a:t>disclose() 하나를 빼면 컴파일이 멈춘다</a:t>
+              <a:t>회로 5 — 손실을 뺀 계산 불가</a:t>
             </a:r>
           </a:p>
         </p:txBody>
       </p:sp>
       <p:pic>
         <p:nvPicPr>
-          <p:cNvPr id="6" name="Picture 5" descr="cap-disclose.png"/>
+          <p:cNvPr id="4" name="Picture 3" descr="nav.png"/>
           <p:cNvPicPr>
             <a:picLocks noChangeAspect="1"/>
           </p:cNvPicPr>
@@ -6647,8 +6835,8 @@
         </p:blipFill>
         <p:spPr>
           <a:xfrm>
-            <a:off x="914400" y="2971800"/>
-            <a:ext cx="9692640" cy="2520086"/>
+            <a:off x="411480" y="914400"/>
+            <a:ext cx="11384280" cy="4590435"/>
           </a:xfrm>
           <a:prstGeom prst="rect">
             <a:avLst/>
@@ -6657,14 +6845,14 @@
       </p:pic>
       <p:sp>
         <p:nvSpPr>
-          <p:cNvPr id="7" name="TextBox 6"/>
+          <p:cNvPr id="5" name="TextBox 4"/>
           <p:cNvSpPr txBox="1"/>
           <p:nvPr/>
         </p:nvSpPr>
         <p:spPr>
           <a:xfrm>
-            <a:off x="914400" y="5760720"/>
-            <a:ext cx="10332720" cy="457200"/>
+            <a:off x="640080" y="5806440"/>
+            <a:ext cx="10972800" cy="457200"/>
           </a:xfrm>
           <a:prstGeom prst="rect">
             <a:avLst/>
@@ -6683,13 +6871,13 @@
               </a:lnSpc>
             </a:pPr>
             <a:r>
-              <a:rPr sz="1700" b="0">
+              <a:rPr sz="1800" b="1">
                 <a:solidFill>
                   <a:srgbClr val="5EE0B0"/>
                 </a:solidFill>
                 <a:latin typeface="Apple SD Gothic Neo"/>
               </a:rPr>
-              <a:t>파일, 줄, 프로그램 경로까지 짚어 준다. 개발 중 두 건이 이렇게 잡혔다.</a:t>
+              <a:t>부풀린 주장 3건 거부  ·  실제 성과 그대로인 주장 1건 통과</a:t>
             </a:r>
           </a:p>
         </p:txBody>

--- a/deck/proof-of-track-record-talk.pptx
+++ b/deck/proof-of-track-record-talk.pptx
@@ -16,7 +16,6 @@
     <p:sldId id="264" r:id="rId15"/>
     <p:sldId id="265" r:id="rId16"/>
     <p:sldId id="266" r:id="rId17"/>
-    <p:sldId id="267" r:id="rId18"/>
   </p:sldIdLst>
   <p:sldSz cx="12191695" cy="6858000" type="screen4x3"/>
   <p:notesSz cx="6858000" cy="9144000"/>
@@ -3216,7 +3215,7 @@
                 </a:solidFill>
                 <a:latin typeface="Apple SD Gothic Neo"/>
               </a:rPr>
-              <a:t>거래를 공개하지 않고 증명하는 트랙 레코드</a:t>
+              <a:t>트레이더가 전략을 숨긴 채, 투자자에게 성과를 증명하는 도구</a:t>
             </a:r>
           </a:p>
         </p:txBody>
@@ -3369,7 +3368,7 @@
         </p:nvSpPr>
         <p:spPr>
           <a:xfrm>
-            <a:off x="914400" y="731520"/>
+            <a:off x="640080" y="411480"/>
             <a:ext cx="7315200" cy="320040"/>
           </a:xfrm>
           <a:prstGeom prst="rect">
@@ -3395,7 +3394,7 @@
                 </a:solidFill>
                 <a:latin typeface="Apple SD Gothic Neo"/>
               </a:rPr>
-              <a:t>Midnight 활용</a:t>
+              <a:t>실제 동작</a:t>
             </a:r>
           </a:p>
         </p:txBody>
@@ -3408,8 +3407,8 @@
         </p:nvSpPr>
         <p:spPr>
           <a:xfrm>
-            <a:off x="914400" y="1143000"/>
-            <a:ext cx="10332720" cy="1280160"/>
+            <a:off x="640080" y="777240"/>
+            <a:ext cx="10972800" cy="548640"/>
           </a:xfrm>
           <a:prstGeom prst="rect">
             <a:avLst/>
@@ -3428,75 +3427,20 @@
               </a:lnSpc>
             </a:pPr>
             <a:r>
-              <a:rPr sz="3400" b="1">
+              <a:rPr sz="3000" b="1">
                 <a:solidFill>
                   <a:srgbClr val="ECF1F7"/>
                 </a:solidFill>
                 <a:latin typeface="Apple SD Gothic Neo"/>
               </a:rPr>
-              <a:t>타입 검사가 강제하는</a:t>
-            </a:r>
-          </a:p>
-          <a:p>
-            <a:pPr algn="l">
-              <a:lnSpc>
-                <a:spcPct val="125000"/>
-              </a:lnSpc>
-            </a:pPr>
-            <a:r>
-              <a:rPr sz="3400" b="1">
-                <a:solidFill>
-                  <a:srgbClr val="ECF1F7"/>
-                </a:solidFill>
-                <a:latin typeface="Apple SD Gothic Neo"/>
-              </a:rPr>
-              <a:t>프라이버시</a:t>
-            </a:r>
-          </a:p>
-        </p:txBody>
-      </p:sp>
-      <p:sp>
-        <p:nvSpPr>
-          <p:cNvPr id="5" name="TextBox 4"/>
-          <p:cNvSpPr txBox="1"/>
-          <p:nvPr/>
-        </p:nvSpPr>
-        <p:spPr>
-          <a:xfrm>
-            <a:off x="914400" y="2606040"/>
-            <a:ext cx="10332720" cy="365760"/>
-          </a:xfrm>
-          <a:prstGeom prst="rect">
-            <a:avLst/>
-          </a:prstGeom>
-          <a:noFill/>
-        </p:spPr>
-        <p:txBody>
-          <a:bodyPr wrap="square" lIns="0" rIns="0" tIns="0" bIns="0">
-            <a:spAutoFit/>
-          </a:bodyPr>
-          <a:lstStyle/>
-          <a:p>
-            <a:pPr algn="l">
-              <a:lnSpc>
-                <a:spcPct val="125000"/>
-              </a:lnSpc>
-            </a:pPr>
-            <a:r>
-              <a:rPr sz="1600" b="0">
-                <a:solidFill>
-                  <a:srgbClr val="8B9AAF"/>
-                </a:solidFill>
-                <a:latin typeface="Apple SD Gothic Neo"/>
-              </a:rPr>
-              <a:t>disclose() 하나를 뺐을 때의 컴파일 결과</a:t>
+              <a:t>Midnight Preview 공개 테스트넷</a:t>
             </a:r>
           </a:p>
         </p:txBody>
       </p:sp>
       <p:pic>
         <p:nvPicPr>
-          <p:cNvPr id="6" name="Picture 5" descr="cap-disclose.png"/>
+          <p:cNvPr id="5" name="Picture 4" descr="onchain.png"/>
           <p:cNvPicPr>
             <a:picLocks noChangeAspect="1"/>
           </p:cNvPicPr>
@@ -3510,14 +3454,53 @@
         </p:blipFill>
         <p:spPr>
           <a:xfrm>
-            <a:off x="914400" y="2971800"/>
-            <a:ext cx="9692640" cy="2520086"/>
+            <a:off x="1036167" y="1463040"/>
+            <a:ext cx="10119360" cy="2926080"/>
           </a:xfrm>
           <a:prstGeom prst="rect">
             <a:avLst/>
           </a:prstGeom>
         </p:spPr>
       </p:pic>
+      <p:sp>
+        <p:nvSpPr>
+          <p:cNvPr id="6" name="TextBox 5"/>
+          <p:cNvSpPr txBox="1"/>
+          <p:nvPr/>
+        </p:nvSpPr>
+        <p:spPr>
+          <a:xfrm>
+            <a:off x="640080" y="4572000"/>
+            <a:ext cx="10972800" cy="457200"/>
+          </a:xfrm>
+          <a:prstGeom prst="rect">
+            <a:avLst/>
+          </a:prstGeom>
+          <a:noFill/>
+        </p:spPr>
+        <p:txBody>
+          <a:bodyPr wrap="square" lIns="0" rIns="0" tIns="0" bIns="0">
+            <a:spAutoFit/>
+          </a:bodyPr>
+          <a:lstStyle/>
+          <a:p>
+            <a:pPr algn="l">
+              <a:lnSpc>
+                <a:spcPct val="125000"/>
+              </a:lnSpc>
+            </a:pPr>
+            <a:r>
+              <a:rPr sz="2100" b="1">
+                <a:solidFill>
+                  <a:srgbClr val="5EE0B0"/>
+                </a:solidFill>
+                <a:latin typeface="Apple SD Gothic Neo"/>
+              </a:rPr>
+              <a:t>원장에는 커밋만  ·  NAV 값은 체인 밖</a:t>
+            </a:r>
+          </a:p>
+        </p:txBody>
+      </p:sp>
       <p:sp>
         <p:nvSpPr>
           <p:cNvPr id="7" name="TextBox 6"/>
@@ -3526,8 +3509,8 @@
         </p:nvSpPr>
         <p:spPr>
           <a:xfrm>
-            <a:off x="914400" y="5760720"/>
-            <a:ext cx="10332720" cy="457200"/>
+            <a:off x="640080" y="5166360"/>
+            <a:ext cx="10972800" cy="914400"/>
           </a:xfrm>
           <a:prstGeom prst="rect">
             <a:avLst/>
@@ -3546,13 +3529,29 @@
               </a:lnSpc>
             </a:pPr>
             <a:r>
-              <a:rPr sz="1700" b="0">
-                <a:solidFill>
-                  <a:srgbClr val="5EE0B0"/>
-                </a:solidFill>
-                <a:latin typeface="Apple SD Gothic Neo"/>
-              </a:rPr>
-              <a:t>파일, 줄, 프로그램 경로까지 지목  ·  개발 중 이렇게 잡힌 누락 2건</a:t>
+              <a:rPr sz="1600" b="0">
+                <a:solidFill>
+                  <a:srgbClr val="8B9AAF"/>
+                </a:solidFill>
+                <a:latin typeface="Apple SD Gothic Neo"/>
+              </a:rPr>
+              <a:t>증언된 값은 실제 바이낸스 선물 계좌 잔고</a:t>
+            </a:r>
+          </a:p>
+          <a:p>
+            <a:pPr algn="l">
+              <a:lnSpc>
+                <a:spcPct val="125000"/>
+              </a:lnSpc>
+            </a:pPr>
+            <a:r>
+              <a:rPr sz="1600" b="0">
+                <a:solidFill>
+                  <a:srgbClr val="8B9AAF"/>
+                </a:solidFill>
+                <a:latin typeface="Apple SD Gothic Neo"/>
+              </a:rPr>
+              <a:t>Primus 공증인이 거래소 TLS 세션에서 직접 읽은 값, 자기 신고 아님</a:t>
             </a:r>
           </a:p>
         </p:txBody>
@@ -3627,264 +3626,6 @@
         </p:nvSpPr>
         <p:spPr>
           <a:xfrm>
-            <a:off x="640080" y="411480"/>
-            <a:ext cx="7315200" cy="320040"/>
-          </a:xfrm>
-          <a:prstGeom prst="rect">
-            <a:avLst/>
-          </a:prstGeom>
-          <a:noFill/>
-        </p:spPr>
-        <p:txBody>
-          <a:bodyPr wrap="square" lIns="0" rIns="0" tIns="0" bIns="0">
-            <a:spAutoFit/>
-          </a:bodyPr>
-          <a:lstStyle/>
-          <a:p>
-            <a:pPr algn="l">
-              <a:lnSpc>
-                <a:spcPct val="125000"/>
-              </a:lnSpc>
-            </a:pPr>
-            <a:r>
-              <a:rPr sz="1300" b="0">
-                <a:solidFill>
-                  <a:srgbClr val="8B9AAF"/>
-                </a:solidFill>
-                <a:latin typeface="Apple SD Gothic Neo"/>
-              </a:rPr>
-              <a:t>실제 동작</a:t>
-            </a:r>
-          </a:p>
-        </p:txBody>
-      </p:sp>
-      <p:sp>
-        <p:nvSpPr>
-          <p:cNvPr id="4" name="TextBox 3"/>
-          <p:cNvSpPr txBox="1"/>
-          <p:nvPr/>
-        </p:nvSpPr>
-        <p:spPr>
-          <a:xfrm>
-            <a:off x="640080" y="777240"/>
-            <a:ext cx="10972800" cy="548640"/>
-          </a:xfrm>
-          <a:prstGeom prst="rect">
-            <a:avLst/>
-          </a:prstGeom>
-          <a:noFill/>
-        </p:spPr>
-        <p:txBody>
-          <a:bodyPr wrap="square" lIns="0" rIns="0" tIns="0" bIns="0">
-            <a:spAutoFit/>
-          </a:bodyPr>
-          <a:lstStyle/>
-          <a:p>
-            <a:pPr algn="l">
-              <a:lnSpc>
-                <a:spcPct val="125000"/>
-              </a:lnSpc>
-            </a:pPr>
-            <a:r>
-              <a:rPr sz="3000" b="1">
-                <a:solidFill>
-                  <a:srgbClr val="ECF1F7"/>
-                </a:solidFill>
-                <a:latin typeface="Apple SD Gothic Neo"/>
-              </a:rPr>
-              <a:t>Midnight Preview 공개 테스트넷</a:t>
-            </a:r>
-          </a:p>
-        </p:txBody>
-      </p:sp>
-      <p:pic>
-        <p:nvPicPr>
-          <p:cNvPr id="5" name="Picture 4" descr="onchain.png"/>
-          <p:cNvPicPr>
-            <a:picLocks noChangeAspect="1"/>
-          </p:cNvPicPr>
-          <p:nvPr/>
-        </p:nvPicPr>
-        <p:blipFill>
-          <a:blip r:embed="rId2"/>
-          <a:stretch>
-            <a:fillRect/>
-          </a:stretch>
-        </p:blipFill>
-        <p:spPr>
-          <a:xfrm>
-            <a:off x="1036167" y="1463040"/>
-            <a:ext cx="10119360" cy="2926080"/>
-          </a:xfrm>
-          <a:prstGeom prst="rect">
-            <a:avLst/>
-          </a:prstGeom>
-        </p:spPr>
-      </p:pic>
-      <p:sp>
-        <p:nvSpPr>
-          <p:cNvPr id="6" name="TextBox 5"/>
-          <p:cNvSpPr txBox="1"/>
-          <p:nvPr/>
-        </p:nvSpPr>
-        <p:spPr>
-          <a:xfrm>
-            <a:off x="640080" y="4572000"/>
-            <a:ext cx="10972800" cy="457200"/>
-          </a:xfrm>
-          <a:prstGeom prst="rect">
-            <a:avLst/>
-          </a:prstGeom>
-          <a:noFill/>
-        </p:spPr>
-        <p:txBody>
-          <a:bodyPr wrap="square" lIns="0" rIns="0" tIns="0" bIns="0">
-            <a:spAutoFit/>
-          </a:bodyPr>
-          <a:lstStyle/>
-          <a:p>
-            <a:pPr algn="l">
-              <a:lnSpc>
-                <a:spcPct val="125000"/>
-              </a:lnSpc>
-            </a:pPr>
-            <a:r>
-              <a:rPr sz="2100" b="1">
-                <a:solidFill>
-                  <a:srgbClr val="5EE0B0"/>
-                </a:solidFill>
-                <a:latin typeface="Apple SD Gothic Neo"/>
-              </a:rPr>
-              <a:t>원장에는 커밋만  ·  NAV 값은 체인 밖</a:t>
-            </a:r>
-          </a:p>
-        </p:txBody>
-      </p:sp>
-      <p:sp>
-        <p:nvSpPr>
-          <p:cNvPr id="7" name="TextBox 6"/>
-          <p:cNvSpPr txBox="1"/>
-          <p:nvPr/>
-        </p:nvSpPr>
-        <p:spPr>
-          <a:xfrm>
-            <a:off x="640080" y="5166360"/>
-            <a:ext cx="10972800" cy="914400"/>
-          </a:xfrm>
-          <a:prstGeom prst="rect">
-            <a:avLst/>
-          </a:prstGeom>
-          <a:noFill/>
-        </p:spPr>
-        <p:txBody>
-          <a:bodyPr wrap="square" lIns="0" rIns="0" tIns="0" bIns="0">
-            <a:spAutoFit/>
-          </a:bodyPr>
-          <a:lstStyle/>
-          <a:p>
-            <a:pPr algn="l">
-              <a:lnSpc>
-                <a:spcPct val="125000"/>
-              </a:lnSpc>
-            </a:pPr>
-            <a:r>
-              <a:rPr sz="1600" b="0">
-                <a:solidFill>
-                  <a:srgbClr val="8B9AAF"/>
-                </a:solidFill>
-                <a:latin typeface="Apple SD Gothic Neo"/>
-              </a:rPr>
-              <a:t>증언된 값은 실제 바이낸스 선물 계좌 잔고</a:t>
-            </a:r>
-          </a:p>
-          <a:p>
-            <a:pPr algn="l">
-              <a:lnSpc>
-                <a:spcPct val="125000"/>
-              </a:lnSpc>
-            </a:pPr>
-            <a:r>
-              <a:rPr sz="1600" b="0">
-                <a:solidFill>
-                  <a:srgbClr val="8B9AAF"/>
-                </a:solidFill>
-                <a:latin typeface="Apple SD Gothic Neo"/>
-              </a:rPr>
-              <a:t>Primus 공증인이 거래소 TLS 세션에서 직접 읽은 값, 자기 신고 아님</a:t>
-            </a:r>
-          </a:p>
-        </p:txBody>
-      </p:sp>
-    </p:spTree>
-  </p:cSld>
-  <p:clrMapOvr>
-    <a:masterClrMapping/>
-  </p:clrMapOvr>
-</p:sld>
-</file>
-
-<file path=ppt/slides/slide12.xml><?xml version="1.0" encoding="utf-8"?>
-<p:sld xmlns:a="http://schemas.openxmlformats.org/drawingml/2006/main" xmlns:p="http://schemas.openxmlformats.org/presentationml/2006/main" xmlns:r="http://schemas.openxmlformats.org/officeDocument/2006/relationships">
-  <p:cSld>
-    <p:spTree>
-      <p:nvGrpSpPr>
-        <p:cNvPr id="1" name=""/>
-        <p:cNvGrpSpPr/>
-        <p:nvPr/>
-      </p:nvGrpSpPr>
-      <p:grpSpPr/>
-      <p:sp>
-        <p:nvSpPr>
-          <p:cNvPr id="2" name="Rectangle 1"/>
-          <p:cNvSpPr/>
-          <p:nvPr/>
-        </p:nvSpPr>
-        <p:spPr>
-          <a:xfrm>
-            <a:off x="0" y="0"/>
-            <a:ext cx="12191695" cy="6858000"/>
-          </a:xfrm>
-          <a:prstGeom prst="rect">
-            <a:avLst/>
-          </a:prstGeom>
-          <a:solidFill>
-            <a:srgbClr val="0C111B"/>
-          </a:solidFill>
-          <a:ln>
-            <a:noFill/>
-          </a:ln>
-          <a:effectLst/>
-        </p:spPr>
-        <p:style>
-          <a:lnRef idx="1">
-            <a:schemeClr val="accent1"/>
-          </a:lnRef>
-          <a:fillRef idx="3">
-            <a:schemeClr val="accent1"/>
-          </a:fillRef>
-          <a:effectRef idx="2">
-            <a:schemeClr val="accent1"/>
-          </a:effectRef>
-          <a:fontRef idx="minor">
-            <a:schemeClr val="lt1"/>
-          </a:fontRef>
-        </p:style>
-        <p:txBody>
-          <a:bodyPr rtlCol="0" anchor="ctr"/>
-          <a:lstStyle/>
-          <a:p>
-            <a:pPr algn="ctr"/>
-          </a:p>
-        </p:txBody>
-      </p:sp>
-      <p:sp>
-        <p:nvSpPr>
-          <p:cNvPr id="3" name="TextBox 2"/>
-          <p:cNvSpPr txBox="1"/>
-          <p:nvPr/>
-        </p:nvSpPr>
-        <p:spPr>
-          <a:xfrm>
             <a:off x="914400" y="731520"/>
             <a:ext cx="7315200" cy="320040"/>
           </a:xfrm>
@@ -4317,7 +4058,7 @@
                 </a:solidFill>
                 <a:latin typeface="Apple SD Gothic Neo"/>
               </a:rPr>
-              <a:t>문제</a:t>
+              <a:t>상황</a:t>
             </a:r>
           </a:p>
         </p:txBody>
@@ -4356,7 +4097,7 @@
                 </a:solidFill>
                 <a:latin typeface="Apple SD Gothic Neo"/>
               </a:rPr>
-              <a:t>전부 진짜인 숫자로</a:t>
+              <a:t>보여줄 수 없는 전략,</a:t>
             </a:r>
           </a:p>
           <a:p>
@@ -4372,7 +4113,7 @@
                 </a:solidFill>
                 <a:latin typeface="Apple SD Gothic Neo"/>
               </a:rPr>
-              <a:t>만들어지는 거짓말</a:t>
+              <a:t>믿을 수 없는 숫자</a:t>
             </a:r>
           </a:p>
         </p:txBody>
@@ -4385,8 +4126,8 @@
         </p:nvSpPr>
         <p:spPr>
           <a:xfrm>
-            <a:off x="914400" y="3108960"/>
-            <a:ext cx="10332720" cy="548640"/>
+            <a:off x="914400" y="3200400"/>
+            <a:ext cx="4846320" cy="457200"/>
           </a:xfrm>
           <a:prstGeom prst="rect">
             <a:avLst/>
@@ -4405,13 +4146,13 @@
               </a:lnSpc>
             </a:pPr>
             <a:r>
-              <a:rPr sz="2200" b="0">
-                <a:solidFill>
-                  <a:srgbClr val="E8B45C"/>
-                </a:solidFill>
-                <a:latin typeface="Apple SD Gothic Neo"/>
-              </a:rPr>
-              <a:t>"1년 동안 돌린 전략 열 개 중 제일 잘 된 하나"</a:t>
+              <a:rPr sz="2200" b="1">
+                <a:solidFill>
+                  <a:srgbClr val="5EE0B0"/>
+                </a:solidFill>
+                <a:latin typeface="Apple SD Gothic Neo"/>
+              </a:rPr>
+              <a:t>트레이더</a:t>
             </a:r>
           </a:p>
         </p:txBody>
@@ -4424,8 +4165,8 @@
         </p:nvSpPr>
         <p:spPr>
           <a:xfrm>
-            <a:off x="914400" y="4023360"/>
-            <a:ext cx="10332720" cy="1097280"/>
+            <a:off x="914400" y="3703320"/>
+            <a:ext cx="4846320" cy="914400"/>
           </a:xfrm>
           <a:prstGeom prst="rect">
             <a:avLst/>
@@ -4444,29 +4185,162 @@
               </a:lnSpc>
             </a:pPr>
             <a:r>
-              <a:rPr sz="2000" b="0">
+              <a:rPr sz="1700" b="0">
                 <a:solidFill>
                   <a:srgbClr val="8B9AAF"/>
                 </a:solidFill>
                 <a:latin typeface="Apple SD Gothic Neo"/>
               </a:rPr>
-              <a:t>거래, 체결, 수익률 전부 진짜</a:t>
-            </a:r>
-          </a:p>
-          <a:p>
-            <a:pPr algn="l">
-              <a:lnSpc>
-                <a:spcPct val="125000"/>
-              </a:lnSpc>
-            </a:pPr>
-            <a:r>
-              <a:rPr sz="2000" b="0">
+              <a:t>투자자에게 실력을 증명하고 싶음</a:t>
+            </a:r>
+          </a:p>
+          <a:p>
+            <a:pPr algn="l">
+              <a:lnSpc>
+                <a:spcPct val="125000"/>
+              </a:lnSpc>
+            </a:pPr>
+            <a:r>
+              <a:rPr sz="1700" b="0">
                 <a:solidFill>
                   <a:srgbClr val="8B9AAF"/>
                 </a:solidFill>
                 <a:latin typeface="Apple SD Gothic Neo"/>
               </a:rPr>
-              <a:t>먼저 일어난 선택, 남지 않는 선택의 흔적</a:t>
+              <a:t>전략은 공개 불가 — 공개하는 순간 알파 소멸</a:t>
+            </a:r>
+          </a:p>
+        </p:txBody>
+      </p:sp>
+      <p:sp>
+        <p:nvSpPr>
+          <p:cNvPr id="7" name="TextBox 6"/>
+          <p:cNvSpPr txBox="1"/>
+          <p:nvPr/>
+        </p:nvSpPr>
+        <p:spPr>
+          <a:xfrm>
+            <a:off x="6400800" y="3200400"/>
+            <a:ext cx="4846320" cy="457200"/>
+          </a:xfrm>
+          <a:prstGeom prst="rect">
+            <a:avLst/>
+          </a:prstGeom>
+          <a:noFill/>
+        </p:spPr>
+        <p:txBody>
+          <a:bodyPr wrap="square" lIns="0" rIns="0" tIns="0" bIns="0">
+            <a:spAutoFit/>
+          </a:bodyPr>
+          <a:lstStyle/>
+          <a:p>
+            <a:pPr algn="l">
+              <a:lnSpc>
+                <a:spcPct val="125000"/>
+              </a:lnSpc>
+            </a:pPr>
+            <a:r>
+              <a:rPr sz="2200" b="1">
+                <a:solidFill>
+                  <a:srgbClr val="E8B45C"/>
+                </a:solidFill>
+                <a:latin typeface="Apple SD Gothic Neo"/>
+              </a:rPr>
+              <a:t>투자자</a:t>
+            </a:r>
+          </a:p>
+        </p:txBody>
+      </p:sp>
+      <p:sp>
+        <p:nvSpPr>
+          <p:cNvPr id="8" name="TextBox 7"/>
+          <p:cNvSpPr txBox="1"/>
+          <p:nvPr/>
+        </p:nvSpPr>
+        <p:spPr>
+          <a:xfrm>
+            <a:off x="6400800" y="3703320"/>
+            <a:ext cx="4846320" cy="914400"/>
+          </a:xfrm>
+          <a:prstGeom prst="rect">
+            <a:avLst/>
+          </a:prstGeom>
+          <a:noFill/>
+        </p:spPr>
+        <p:txBody>
+          <a:bodyPr wrap="square" lIns="0" rIns="0" tIns="0" bIns="0">
+            <a:spAutoFit/>
+          </a:bodyPr>
+          <a:lstStyle/>
+          <a:p>
+            <a:pPr algn="l">
+              <a:lnSpc>
+                <a:spcPct val="125000"/>
+              </a:lnSpc>
+            </a:pPr>
+            <a:r>
+              <a:rPr sz="1700" b="0">
+                <a:solidFill>
+                  <a:srgbClr val="8B9AAF"/>
+                </a:solidFill>
+                <a:latin typeface="Apple SD Gothic Neo"/>
+              </a:rPr>
+              <a:t>수익률 숫자는 받았음</a:t>
+            </a:r>
+          </a:p>
+          <a:p>
+            <a:pPr algn="l">
+              <a:lnSpc>
+                <a:spcPct val="125000"/>
+              </a:lnSpc>
+            </a:pPr>
+            <a:r>
+              <a:rPr sz="1700" b="0">
+                <a:solidFill>
+                  <a:srgbClr val="8B9AAF"/>
+                </a:solidFill>
+                <a:latin typeface="Apple SD Gothic Neo"/>
+              </a:rPr>
+              <a:t>그 숫자가 열 개 중 고른 하나인지 알 방법 없음</a:t>
+            </a:r>
+          </a:p>
+        </p:txBody>
+      </p:sp>
+      <p:sp>
+        <p:nvSpPr>
+          <p:cNvPr id="9" name="TextBox 8"/>
+          <p:cNvSpPr txBox="1"/>
+          <p:nvPr/>
+        </p:nvSpPr>
+        <p:spPr>
+          <a:xfrm>
+            <a:off x="914400" y="5212080"/>
+            <a:ext cx="10332720" cy="548640"/>
+          </a:xfrm>
+          <a:prstGeom prst="rect">
+            <a:avLst/>
+          </a:prstGeom>
+          <a:noFill/>
+        </p:spPr>
+        <p:txBody>
+          <a:bodyPr wrap="square" lIns="0" rIns="0" tIns="0" bIns="0">
+            <a:spAutoFit/>
+          </a:bodyPr>
+          <a:lstStyle/>
+          <a:p>
+            <a:pPr algn="l">
+              <a:lnSpc>
+                <a:spcPct val="125000"/>
+              </a:lnSpc>
+            </a:pPr>
+            <a:r>
+              <a:rPr sz="1900" b="1">
+                <a:solidFill>
+                  <a:srgbClr val="ECF1F7"/>
+                </a:solidFill>
+                <a:latin typeface="Apple SD Gothic Neo"/>
+              </a:rPr>
+              <a:t>지금까지의 선택지는 둘 중 하나  —  전략을 공개하거나, 숫자를 그냥 믿거나</a:t>
             </a:r>
           </a:p>
         </p:txBody>
@@ -4567,7 +4441,7 @@
                 </a:solidFill>
                 <a:latin typeface="Apple SD Gothic Neo"/>
               </a:rPr>
-              <a:t>발표자의 백테스트 — S&amp;P 500, 2018-11 ~ 2023-09</a:t>
+              <a:t>숫자를 못 믿는 이유 — 발표자의 백테스트 (S&amp;P 500, 2018-11 ~ 2023-09)</a:t>
             </a:r>
           </a:p>
         </p:txBody>
@@ -4588,8 +4462,8 @@
         </p:blipFill>
         <p:spPr>
           <a:xfrm>
-            <a:off x="411480" y="914400"/>
-            <a:ext cx="11384280" cy="4590435"/>
+            <a:off x="539953" y="868680"/>
+            <a:ext cx="11111788" cy="4480560"/>
           </a:xfrm>
           <a:prstGeom prst="rect">
             <a:avLst/>
@@ -4604,7 +4478,7 @@
         </p:nvSpPr>
         <p:spPr>
           <a:xfrm>
-            <a:off x="640080" y="5623560"/>
+            <a:off x="640080" y="5486400"/>
             <a:ext cx="10972800" cy="411480"/>
           </a:xfrm>
           <a:prstGeom prst="rect">
@@ -4630,7 +4504,7 @@
                 </a:solidFill>
                 <a:latin typeface="Apple SD Gothic Neo"/>
               </a:rPr>
-              <a:t>생존 편향 하나 제거에 사라진 연 9.15%p</a:t>
+              <a:t>생존 편향 하나 제거에 사라진 연 9.15%p  ·  조작 없음, 다시 돌릴 수 있었을 뿐</a:t>
             </a:r>
           </a:p>
         </p:txBody>
@@ -4643,7 +4517,7 @@
         </p:nvSpPr>
         <p:spPr>
           <a:xfrm>
-            <a:off x="640080" y="6080760"/>
+            <a:off x="640080" y="5989320"/>
             <a:ext cx="10972800" cy="457200"/>
           </a:xfrm>
           <a:prstGeom prst="rect">
@@ -4663,13 +4537,13 @@
               </a:lnSpc>
             </a:pPr>
             <a:r>
-              <a:rPr sz="1700" b="0">
+              <a:rPr sz="1600" b="0">
                 <a:solidFill>
                   <a:srgbClr val="8B9AAF"/>
                 </a:solidFill>
                 <a:latin typeface="Apple SD Gothic Neo"/>
               </a:rPr>
-              <a:t>조작 없음  ·  다시 돌릴 수 있었을 뿐</a:t>
+              <a:t>"열 개 돌려 제일 잘 된 하나" 도 같은 구조  —  진짜 숫자로 만들어지는 거짓말, 고른 흔적은 어디에도 없음</a:t>
             </a:r>
           </a:p>
         </p:txBody>
@@ -4830,8 +4704,8 @@
         </p:blipFill>
         <p:spPr>
           <a:xfrm>
-            <a:off x="993495" y="1508760"/>
-            <a:ext cx="10204704" cy="4114800"/>
+            <a:off x="1333652" y="1463040"/>
+            <a:ext cx="9524390" cy="3840480"/>
           </a:xfrm>
           <a:prstGeom prst="rect">
             <a:avLst/>
@@ -4846,7 +4720,7 @@
         </p:nvSpPr>
         <p:spPr>
           <a:xfrm>
-            <a:off x="640080" y="5806440"/>
+            <a:off x="640080" y="5440680"/>
             <a:ext cx="10972800" cy="411480"/>
           </a:xfrm>
           <a:prstGeom prst="rect">
@@ -4885,8 +4759,8 @@
         </p:nvSpPr>
         <p:spPr>
           <a:xfrm>
-            <a:off x="640080" y="6263640"/>
-            <a:ext cx="10972800" cy="365760"/>
+            <a:off x="640080" y="5897880"/>
+            <a:ext cx="10972800" cy="411480"/>
           </a:xfrm>
           <a:prstGeom prst="rect">
             <a:avLst/>
@@ -4905,7 +4779,46 @@
               </a:lnSpc>
             </a:pPr>
             <a:r>
-              <a:rPr sz="1300" b="0">
+              <a:rPr sz="1800" b="0">
+                <a:solidFill>
+                  <a:srgbClr val="ECF1F7"/>
+                </a:solidFill>
+                <a:latin typeface="Apple SD Gothic Neo"/>
+              </a:rPr>
+              <a:t>공통 원인은 하나  —  몇 번 시도했는지 아무도 기록하지 않음</a:t>
+            </a:r>
+          </a:p>
+        </p:txBody>
+      </p:sp>
+      <p:sp>
+        <p:nvSpPr>
+          <p:cNvPr id="8" name="TextBox 7"/>
+          <p:cNvSpPr txBox="1"/>
+          <p:nvPr/>
+        </p:nvSpPr>
+        <p:spPr>
+          <a:xfrm>
+            <a:off x="640080" y="6355080"/>
+            <a:ext cx="10972800" cy="320040"/>
+          </a:xfrm>
+          <a:prstGeom prst="rect">
+            <a:avLst/>
+          </a:prstGeom>
+          <a:noFill/>
+        </p:spPr>
+        <p:txBody>
+          <a:bodyPr wrap="square" lIns="0" rIns="0" tIns="0" bIns="0">
+            <a:spAutoFit/>
+          </a:bodyPr>
+          <a:lstStyle/>
+          <a:p>
+            <a:pPr algn="l">
+              <a:lnSpc>
+                <a:spcPct val="125000"/>
+              </a:lnSpc>
+            </a:pPr>
+            <a:r>
+              <a:rPr sz="1200" b="0">
                 <a:solidFill>
                   <a:srgbClr val="8B9AAF"/>
                 </a:solidFill>
@@ -5012,7 +4925,7 @@
                 </a:solidFill>
                 <a:latin typeface="Apple SD Gothic Neo"/>
               </a:rPr>
-              <a:t>반복되는 이유</a:t>
+              <a:t>해결</a:t>
             </a:r>
           </a:p>
         </p:txBody>
@@ -5025,8 +4938,8 @@
         </p:nvSpPr>
         <p:spPr>
           <a:xfrm>
-            <a:off x="914400" y="1143000"/>
-            <a:ext cx="10332720" cy="1280160"/>
+            <a:off x="914400" y="1097280"/>
+            <a:ext cx="10332720" cy="731520"/>
           </a:xfrm>
           <a:prstGeom prst="rect">
             <a:avLst/>
@@ -5051,23 +4964,7 @@
                 </a:solidFill>
                 <a:latin typeface="Apple SD Gothic Neo"/>
               </a:rPr>
-              <a:t>개인의 문제가 아닌</a:t>
-            </a:r>
-          </a:p>
-          <a:p>
-            <a:pPr algn="l">
-              <a:lnSpc>
-                <a:spcPct val="125000"/>
-              </a:lnSpc>
-            </a:pPr>
-            <a:r>
-              <a:rPr sz="3400" b="1">
-                <a:solidFill>
-                  <a:srgbClr val="ECF1F7"/>
-                </a:solidFill>
-                <a:latin typeface="Apple SD Gothic Neo"/>
-              </a:rPr>
-              <a:t>구조의 문제</a:t>
+              <a:t>숫자 대신 선택을 기록하는 세 단계</a:t>
             </a:r>
           </a:p>
         </p:txBody>
@@ -5080,8 +4977,8 @@
         </p:nvSpPr>
         <p:spPr>
           <a:xfrm>
-            <a:off x="914400" y="2834640"/>
-            <a:ext cx="10332720" cy="411480"/>
+            <a:off x="914400" y="2194560"/>
+            <a:ext cx="3291840" cy="457200"/>
           </a:xfrm>
           <a:prstGeom prst="rect">
             <a:avLst/>
@@ -5106,7 +5003,7 @@
                 </a:solidFill>
                 <a:latin typeface="Apple SD Gothic Neo"/>
               </a:rPr>
-              <a:t>사라지는 실패</a:t>
+              <a:t>1  거래 전</a:t>
             </a:r>
           </a:p>
         </p:txBody>
@@ -5119,8 +5016,8 @@
         </p:nvSpPr>
         <p:spPr>
           <a:xfrm>
-            <a:off x="914400" y="3291840"/>
-            <a:ext cx="10332720" cy="457200"/>
+            <a:off x="914400" y="2697480"/>
+            <a:ext cx="3291840" cy="1097280"/>
           </a:xfrm>
           <a:prstGeom prst="rect">
             <a:avLst/>
@@ -5139,13 +5036,29 @@
               </a:lnSpc>
             </a:pPr>
             <a:r>
-              <a:rPr sz="1800" b="0">
+              <a:rPr sz="1600" b="0">
                 <a:solidFill>
                   <a:srgbClr val="8B9AAF"/>
                 </a:solidFill>
                 <a:latin typeface="Apple SD Gothic Neo"/>
               </a:rPr>
-              <a:t>DB 에서 빠지는 망한 펀드, 발표되지 않는 안 된 전략</a:t>
+              <a:t>전략의 해시를 원장에 커밋</a:t>
+            </a:r>
+          </a:p>
+          <a:p>
+            <a:pPr algn="l">
+              <a:lnSpc>
+                <a:spcPct val="125000"/>
+              </a:lnSpc>
+            </a:pPr>
+            <a:r>
+              <a:rPr sz="1600" b="0">
+                <a:solidFill>
+                  <a:srgbClr val="8B9AAF"/>
+                </a:solidFill>
+                <a:latin typeface="Apple SD Gothic Neo"/>
+              </a:rPr>
+              <a:t>내용은 비공개, 시점만 고정</a:t>
             </a:r>
           </a:p>
         </p:txBody>
@@ -5158,8 +5071,8 @@
         </p:nvSpPr>
         <p:spPr>
           <a:xfrm>
-            <a:off x="914400" y="4023360"/>
-            <a:ext cx="10332720" cy="411480"/>
+            <a:off x="4480560" y="2194560"/>
+            <a:ext cx="3291840" cy="457200"/>
           </a:xfrm>
           <a:prstGeom prst="rect">
             <a:avLst/>
@@ -5184,7 +5097,7 @@
                 </a:solidFill>
                 <a:latin typeface="Apple SD Gothic Neo"/>
               </a:rPr>
-              <a:t>기록되지 않는 시도 횟수</a:t>
+              <a:t>2  거래</a:t>
             </a:r>
           </a:p>
         </p:txBody>
@@ -5197,8 +5110,8 @@
         </p:nvSpPr>
         <p:spPr>
           <a:xfrm>
-            <a:off x="914400" y="4480560"/>
-            <a:ext cx="10332720" cy="457200"/>
+            <a:off x="4480560" y="2697480"/>
+            <a:ext cx="3291840" cy="1097280"/>
           </a:xfrm>
           <a:prstGeom prst="rect">
             <a:avLst/>
@@ -5217,13 +5130,29 @@
               </a:lnSpc>
             </a:pPr>
             <a:r>
-              <a:rPr sz="1800" b="0">
+              <a:rPr sz="1600" b="0">
                 <a:solidFill>
                   <a:srgbClr val="8B9AAF"/>
                 </a:solidFill>
                 <a:latin typeface="Apple SD Gothic Neo"/>
               </a:rPr>
-              <a:t>검증된 팩터 316개  ·  시도 횟수 없이는 계산 불가능한 유의성</a:t>
+              <a:t>평소처럼 거래</a:t>
+            </a:r>
+          </a:p>
+          <a:p>
+            <a:pPr algn="l">
+              <a:lnSpc>
+                <a:spcPct val="125000"/>
+              </a:lnSpc>
+            </a:pPr>
+            <a:r>
+              <a:rPr sz="1600" b="0">
+                <a:solidFill>
+                  <a:srgbClr val="8B9AAF"/>
+                </a:solidFill>
+                <a:latin typeface="Apple SD Gothic Neo"/>
+              </a:rPr>
+              <a:t>전략·거래·잔고는 전부 체인 밖</a:t>
             </a:r>
           </a:p>
         </p:txBody>
@@ -5236,8 +5165,8 @@
         </p:nvSpPr>
         <p:spPr>
           <a:xfrm>
-            <a:off x="914400" y="5212080"/>
-            <a:ext cx="10332720" cy="411480"/>
+            <a:off x="8046720" y="2194560"/>
+            <a:ext cx="3291840" cy="457200"/>
           </a:xfrm>
           <a:prstGeom prst="rect">
             <a:avLst/>
@@ -5262,7 +5191,7 @@
                 </a:solidFill>
                 <a:latin typeface="Apple SD Gothic Neo"/>
               </a:rPr>
-              <a:t>남지 않는 흔적</a:t>
+              <a:t>3  거래 후</a:t>
             </a:r>
           </a:p>
         </p:txBody>
@@ -5275,8 +5204,8 @@
         </p:nvSpPr>
         <p:spPr>
           <a:xfrm>
-            <a:off x="914400" y="5669280"/>
-            <a:ext cx="10332720" cy="457200"/>
+            <a:off x="8046720" y="2697480"/>
+            <a:ext cx="3291840" cy="1097280"/>
           </a:xfrm>
           <a:prstGeom prst="rect">
             <a:avLst/>
@@ -5295,13 +5224,139 @@
               </a:lnSpc>
             </a:pPr>
             <a:r>
+              <a:rPr sz="1600" b="0">
+                <a:solidFill>
+                  <a:srgbClr val="8B9AAF"/>
+                </a:solidFill>
+                <a:latin typeface="Apple SD Gothic Neo"/>
+              </a:rPr>
+              <a:t>"수익률 X 이상" 을 영지식으로 증명</a:t>
+            </a:r>
+          </a:p>
+          <a:p>
+            <a:pPr algn="l">
+              <a:lnSpc>
+                <a:spcPct val="125000"/>
+              </a:lnSpc>
+            </a:pPr>
+            <a:r>
+              <a:rPr sz="1600" b="0">
+                <a:solidFill>
+                  <a:srgbClr val="8B9AAF"/>
+                </a:solidFill>
+                <a:latin typeface="Apple SD Gothic Neo"/>
+              </a:rPr>
+              <a:t>원장에 오르는 것은 그 사실뿐</a:t>
+            </a:r>
+          </a:p>
+        </p:txBody>
+      </p:sp>
+      <p:sp>
+        <p:nvSpPr>
+          <p:cNvPr id="11" name="TextBox 10"/>
+          <p:cNvSpPr txBox="1"/>
+          <p:nvPr/>
+        </p:nvSpPr>
+        <p:spPr>
+          <a:xfrm>
+            <a:off x="914400" y="4297680"/>
+            <a:ext cx="10332720" cy="457200"/>
+          </a:xfrm>
+          <a:prstGeom prst="rect">
+            <a:avLst/>
+          </a:prstGeom>
+          <a:noFill/>
+        </p:spPr>
+        <p:txBody>
+          <a:bodyPr wrap="square" lIns="0" rIns="0" tIns="0" bIns="0">
+            <a:spAutoFit/>
+          </a:bodyPr>
+          <a:lstStyle/>
+          <a:p>
+            <a:pPr algn="l">
+              <a:lnSpc>
+                <a:spcPct val="125000"/>
+              </a:lnSpc>
+            </a:pPr>
+            <a:r>
+              <a:rPr sz="2000" b="1">
+                <a:solidFill>
+                  <a:srgbClr val="ECF1F7"/>
+                </a:solidFill>
+                <a:latin typeface="Apple SD Gothic Neo"/>
+              </a:rPr>
+              <a:t>투자자가 알게 되는 것 셋  —  전략은 끝까지 비공개</a:t>
+            </a:r>
+          </a:p>
+        </p:txBody>
+      </p:sp>
+      <p:sp>
+        <p:nvSpPr>
+          <p:cNvPr id="12" name="TextBox 11"/>
+          <p:cNvSpPr txBox="1"/>
+          <p:nvPr/>
+        </p:nvSpPr>
+        <p:spPr>
+          <a:xfrm>
+            <a:off x="914400" y="4846320"/>
+            <a:ext cx="10332720" cy="1371600"/>
+          </a:xfrm>
+          <a:prstGeom prst="rect">
+            <a:avLst/>
+          </a:prstGeom>
+          <a:noFill/>
+        </p:spPr>
+        <p:txBody>
+          <a:bodyPr wrap="square" lIns="0" rIns="0" tIns="0" bIns="0">
+            <a:spAutoFit/>
+          </a:bodyPr>
+          <a:lstStyle/>
+          <a:p>
+            <a:pPr algn="l">
+              <a:lnSpc>
+                <a:spcPct val="125000"/>
+              </a:lnSpc>
+            </a:pPr>
+            <a:r>
               <a:rPr sz="1800" b="0">
                 <a:solidFill>
                   <a:srgbClr val="8B9AAF"/>
                 </a:solidFill>
                 <a:latin typeface="Apple SD Gothic Neo"/>
               </a:rPr>
-              <a:t>최종 숫자만으로는 첫 시도인지 열 번째인지 구별 불가</a:t>
+              <a:t>①  결과를 알기 전에 정해진 전략</a:t>
+            </a:r>
+          </a:p>
+          <a:p>
+            <a:pPr algn="l">
+              <a:lnSpc>
+                <a:spcPct val="125000"/>
+              </a:lnSpc>
+            </a:pPr>
+            <a:r>
+              <a:rPr sz="1800" b="0">
+                <a:solidFill>
+                  <a:srgbClr val="8B9AAF"/>
+                </a:solidFill>
+                <a:latin typeface="Apple SD Gothic Neo"/>
+              </a:rPr>
+              <a:t>②  바로 그 전략에서 나온 성과</a:t>
+            </a:r>
+          </a:p>
+          <a:p>
+            <a:pPr algn="l">
+              <a:lnSpc>
+                <a:spcPct val="125000"/>
+              </a:lnSpc>
+            </a:pPr>
+            <a:r>
+              <a:rPr sz="1800" b="0">
+                <a:solidFill>
+                  <a:srgbClr val="8B9AAF"/>
+                </a:solidFill>
+                <a:latin typeface="Apple SD Gothic Neo"/>
+              </a:rPr>
+              <a:t>③  시도한 전략의 개수</a:t>
             </a:r>
           </a:p>
         </p:txBody>
@@ -5376,7 +5431,7 @@
         </p:nvSpPr>
         <p:spPr>
           <a:xfrm>
-            <a:off x="914400" y="731520"/>
+            <a:off x="640080" y="411480"/>
             <a:ext cx="7315200" cy="320040"/>
           </a:xfrm>
           <a:prstGeom prst="rect">
@@ -5402,7 +5457,7 @@
                 </a:solidFill>
                 <a:latin typeface="Apple SD Gothic Neo"/>
               </a:rPr>
-              <a:t>해법 — 흔적을 남기는 구조</a:t>
+              <a:t>구조</a:t>
             </a:r>
           </a:p>
         </p:txBody>
@@ -5415,8 +5470,8 @@
         </p:nvSpPr>
         <p:spPr>
           <a:xfrm>
-            <a:off x="914400" y="1188720"/>
-            <a:ext cx="10332720" cy="822960"/>
+            <a:off x="640080" y="777240"/>
+            <a:ext cx="10972800" cy="548640"/>
           </a:xfrm>
           <a:prstGeom prst="rect">
             <a:avLst/>
@@ -5435,27 +5490,51 @@
               </a:lnSpc>
             </a:pPr>
             <a:r>
-              <a:rPr sz="3600" b="1">
+              <a:rPr sz="3000" b="1">
                 <a:solidFill>
                   <a:srgbClr val="ECF1F7"/>
                 </a:solidFill>
                 <a:latin typeface="Apple SD Gothic Neo"/>
               </a:rPr>
-              <a:t>결과를 알기 전, 전략 커밋</a:t>
-            </a:r>
-          </a:p>
-        </p:txBody>
-      </p:sp>
-      <p:sp>
-        <p:nvSpPr>
-          <p:cNvPr id="5" name="TextBox 4"/>
+              <a:t>증명하는 트레이더, 검증하는 투자자</a:t>
+            </a:r>
+          </a:p>
+        </p:txBody>
+      </p:sp>
+      <p:pic>
+        <p:nvPicPr>
+          <p:cNvPr id="5" name="Picture 4" descr="flow.png"/>
+          <p:cNvPicPr>
+            <a:picLocks noChangeAspect="1"/>
+          </p:cNvPicPr>
+          <p:nvPr/>
+        </p:nvPicPr>
+        <p:blipFill>
+          <a:blip r:embed="rId2"/>
+          <a:stretch>
+            <a:fillRect/>
+          </a:stretch>
+        </p:blipFill>
+        <p:spPr>
+          <a:xfrm>
+            <a:off x="780897" y="1508760"/>
+            <a:ext cx="10629900" cy="4114800"/>
+          </a:xfrm>
+          <a:prstGeom prst="rect">
+            <a:avLst/>
+          </a:prstGeom>
+        </p:spPr>
+      </p:pic>
+      <p:sp>
+        <p:nvSpPr>
+          <p:cNvPr id="6" name="TextBox 5"/>
           <p:cNvSpPr txBox="1"/>
           <p:nvPr/>
         </p:nvSpPr>
         <p:spPr>
           <a:xfrm>
-            <a:off x="914400" y="2194560"/>
-            <a:ext cx="10332720" cy="548640"/>
+            <a:off x="640080" y="5806440"/>
+            <a:ext cx="10972800" cy="457200"/>
           </a:xfrm>
           <a:prstGeom prst="rect">
             <a:avLst/>
@@ -5474,162 +5553,13 @@
               </a:lnSpc>
             </a:pPr>
             <a:r>
-              <a:rPr sz="2100" b="0">
-                <a:solidFill>
-                  <a:srgbClr val="ECF1F7"/>
-                </a:solidFill>
-                <a:latin typeface="Apple SD Gothic Neo"/>
-              </a:rPr>
-              <a:t>성과가 그 전략에서 나왔다는 영지식 증명</a:t>
-            </a:r>
-          </a:p>
-        </p:txBody>
-      </p:sp>
-      <p:sp>
-        <p:nvSpPr>
-          <p:cNvPr id="6" name="TextBox 5"/>
-          <p:cNvSpPr txBox="1"/>
-          <p:nvPr/>
-        </p:nvSpPr>
-        <p:spPr>
-          <a:xfrm>
-            <a:off x="914400" y="3200400"/>
-            <a:ext cx="10332720" cy="457200"/>
-          </a:xfrm>
-          <a:prstGeom prst="rect">
-            <a:avLst/>
-          </a:prstGeom>
-          <a:noFill/>
-        </p:spPr>
-        <p:txBody>
-          <a:bodyPr wrap="square" lIns="0" rIns="0" tIns="0" bIns="0">
-            <a:spAutoFit/>
-          </a:bodyPr>
-          <a:lstStyle/>
-          <a:p>
-            <a:pPr algn="l">
-              <a:lnSpc>
-                <a:spcPct val="125000"/>
-              </a:lnSpc>
-            </a:pPr>
-            <a:r>
-              <a:rPr sz="2100" b="1">
+              <a:rPr sz="1900" b="1">
                 <a:solidFill>
                   <a:srgbClr val="5EE0B0"/>
                 </a:solidFill>
                 <a:latin typeface="Apple SD Gothic Neo"/>
               </a:rPr>
-              <a:t>영지식이 필요한 이유</a:t>
-            </a:r>
-          </a:p>
-        </p:txBody>
-      </p:sp>
-      <p:sp>
-        <p:nvSpPr>
-          <p:cNvPr id="7" name="TextBox 6"/>
-          <p:cNvSpPr txBox="1"/>
-          <p:nvPr/>
-        </p:nvSpPr>
-        <p:spPr>
-          <a:xfrm>
-            <a:off x="914400" y="3749039"/>
-            <a:ext cx="10332720" cy="914400"/>
-          </a:xfrm>
-          <a:prstGeom prst="rect">
-            <a:avLst/>
-          </a:prstGeom>
-          <a:noFill/>
-        </p:spPr>
-        <p:txBody>
-          <a:bodyPr wrap="square" lIns="0" rIns="0" tIns="0" bIns="0">
-            <a:spAutoFit/>
-          </a:bodyPr>
-          <a:lstStyle/>
-          <a:p>
-            <a:pPr algn="l">
-              <a:lnSpc>
-                <a:spcPct val="125000"/>
-              </a:lnSpc>
-            </a:pPr>
-            <a:r>
-              <a:rPr sz="1800" b="0">
-                <a:solidFill>
-                  <a:srgbClr val="8B9AAF"/>
-                </a:solidFill>
-                <a:latin typeface="Apple SD Gothic Neo"/>
-              </a:rPr>
-              <a:t>공개하는 순간 사라지는 알파</a:t>
-            </a:r>
-          </a:p>
-          <a:p>
-            <a:pPr algn="l">
-              <a:lnSpc>
-                <a:spcPct val="125000"/>
-              </a:lnSpc>
-            </a:pPr>
-            <a:r>
-              <a:rPr sz="1800" b="0">
-                <a:solidFill>
-                  <a:srgbClr val="8B9AAF"/>
-                </a:solidFill>
-                <a:latin typeface="Apple SD Gothic Neo"/>
-              </a:rPr>
-              <a:t>숨긴 채 커밋, 열지 않은 채 증명</a:t>
-            </a:r>
-          </a:p>
-        </p:txBody>
-      </p:sp>
-      <p:sp>
-        <p:nvSpPr>
-          <p:cNvPr id="8" name="TextBox 7"/>
-          <p:cNvSpPr txBox="1"/>
-          <p:nvPr/>
-        </p:nvSpPr>
-        <p:spPr>
-          <a:xfrm>
-            <a:off x="914400" y="5120640"/>
-            <a:ext cx="10332720" cy="822960"/>
-          </a:xfrm>
-          <a:prstGeom prst="rect">
-            <a:avLst/>
-          </a:prstGeom>
-          <a:noFill/>
-        </p:spPr>
-        <p:txBody>
-          <a:bodyPr wrap="square" lIns="0" rIns="0" tIns="0" bIns="0">
-            <a:spAutoFit/>
-          </a:bodyPr>
-          <a:lstStyle/>
-          <a:p>
-            <a:pPr algn="l">
-              <a:lnSpc>
-                <a:spcPct val="125000"/>
-              </a:lnSpc>
-            </a:pPr>
-            <a:r>
-              <a:rPr sz="1800" b="1">
-                <a:solidFill>
-                  <a:srgbClr val="5EE0B0"/>
-                </a:solidFill>
-                <a:latin typeface="Apple SD Gothic Neo"/>
-              </a:rPr>
-              <a:t>거래 전  —  원장에 오르는 것은 전략의 해시뿐</a:t>
-            </a:r>
-          </a:p>
-          <a:p>
-            <a:pPr algn="l">
-              <a:lnSpc>
-                <a:spcPct val="125000"/>
-              </a:lnSpc>
-            </a:pPr>
-            <a:r>
-              <a:rPr sz="1800" b="1">
-                <a:solidFill>
-                  <a:srgbClr val="5EE0B0"/>
-                </a:solidFill>
-                <a:latin typeface="Apple SD Gothic Neo"/>
-              </a:rPr>
-              <a:t>거래 후  —  원장에 오르는 것은 "수익률 X 이상" 이라는 사실뿐</a:t>
+              <a:t>체인에 오르는 것은 커밋과 증명뿐  ·  전략, 거래, 잔고는 체인 밖</a:t>
             </a:r>
           </a:p>
         </p:txBody>
@@ -5704,7 +5634,7 @@
         </p:nvSpPr>
         <p:spPr>
           <a:xfrm>
-            <a:off x="640080" y="411480"/>
+            <a:off x="914400" y="640080"/>
             <a:ext cx="7315200" cy="320040"/>
           </a:xfrm>
           <a:prstGeom prst="rect">
@@ -5730,7 +5660,7 @@
                 </a:solidFill>
                 <a:latin typeface="Apple SD Gothic Neo"/>
               </a:rPr>
-              <a:t>구조</a:t>
+              <a:t>회로 7개, 각각 막는 공격 하나</a:t>
             </a:r>
           </a:p>
         </p:txBody>
@@ -5743,8 +5673,8 @@
         </p:nvSpPr>
         <p:spPr>
           <a:xfrm>
-            <a:off x="640080" y="777240"/>
-            <a:ext cx="10972800" cy="548640"/>
+            <a:off x="914400" y="1051560"/>
+            <a:ext cx="10332720" cy="640080"/>
           </a:xfrm>
           <a:prstGeom prst="rect">
             <a:avLst/>
@@ -5763,41 +5693,56 @@
               </a:lnSpc>
             </a:pPr>
             <a:r>
-              <a:rPr sz="3000" b="1">
+              <a:rPr sz="3200" b="1">
                 <a:solidFill>
                   <a:srgbClr val="ECF1F7"/>
                 </a:solidFill>
                 <a:latin typeface="Apple SD Gothic Neo"/>
               </a:rPr>
-              <a:t>증명하는 트레이더, 검증하는 투자자</a:t>
-            </a:r>
-          </a:p>
-        </p:txBody>
-      </p:sp>
-      <p:pic>
-        <p:nvPicPr>
-          <p:cNvPr id="5" name="Picture 4" descr="flow.png"/>
-          <p:cNvPicPr>
-            <a:picLocks noChangeAspect="1"/>
-          </p:cNvPicPr>
-          <p:nvPr/>
-        </p:nvPicPr>
-        <p:blipFill>
-          <a:blip r:embed="rId2"/>
-          <a:stretch>
-            <a:fillRect/>
-          </a:stretch>
-        </p:blipFill>
-        <p:spPr>
-          <a:xfrm>
-            <a:off x="780897" y="1508760"/>
-            <a:ext cx="10629900" cy="4114800"/>
-          </a:xfrm>
-          <a:prstGeom prst="rect">
-            <a:avLst/>
-          </a:prstGeom>
-        </p:spPr>
-      </p:pic>
+              <a:t>차단하는 공격 7가지</a:t>
+            </a:r>
+          </a:p>
+        </p:txBody>
+      </p:sp>
+      <p:sp>
+        <p:nvSpPr>
+          <p:cNvPr id="5" name="TextBox 4"/>
+          <p:cNvSpPr txBox="1"/>
+          <p:nvPr/>
+        </p:nvSpPr>
+        <p:spPr>
+          <a:xfrm>
+            <a:off x="914400" y="2057400"/>
+            <a:ext cx="731520" cy="411480"/>
+          </a:xfrm>
+          <a:prstGeom prst="rect">
+            <a:avLst/>
+          </a:prstGeom>
+          <a:noFill/>
+        </p:spPr>
+        <p:txBody>
+          <a:bodyPr wrap="square" lIns="0" rIns="0" tIns="0" bIns="0">
+            <a:spAutoFit/>
+          </a:bodyPr>
+          <a:lstStyle/>
+          <a:p>
+            <a:pPr algn="l">
+              <a:lnSpc>
+                <a:spcPct val="125000"/>
+              </a:lnSpc>
+            </a:pPr>
+            <a:r>
+              <a:rPr sz="1900" b="1">
+                <a:solidFill>
+                  <a:srgbClr val="8B9AAF"/>
+                </a:solidFill>
+                <a:latin typeface="Apple SD Gothic Neo"/>
+              </a:rPr>
+              <a:t>1</a:t>
+            </a:r>
+          </a:p>
+        </p:txBody>
+      </p:sp>
       <p:sp>
         <p:nvSpPr>
           <p:cNvPr id="6" name="TextBox 5"/>
@@ -5806,8 +5751,8 @@
         </p:nvSpPr>
         <p:spPr>
           <a:xfrm>
-            <a:off x="640080" y="5806440"/>
-            <a:ext cx="10972800" cy="457200"/>
+            <a:off x="1691640" y="2057400"/>
+            <a:ext cx="4206240" cy="411480"/>
           </a:xfrm>
           <a:prstGeom prst="rect">
             <a:avLst/>
@@ -5826,13 +5771,676 @@
               </a:lnSpc>
             </a:pPr>
             <a:r>
+              <a:rPr sz="1900" b="0">
+                <a:solidFill>
+                  <a:srgbClr val="8B9AAF"/>
+                </a:solidFill>
+                <a:latin typeface="Apple SD Gothic Neo"/>
+              </a:rPr>
+              <a:t>전략을 나중에 바꾸기</a:t>
+            </a:r>
+          </a:p>
+        </p:txBody>
+      </p:sp>
+      <p:sp>
+        <p:nvSpPr>
+          <p:cNvPr id="7" name="TextBox 6"/>
+          <p:cNvSpPr txBox="1"/>
+          <p:nvPr/>
+        </p:nvSpPr>
+        <p:spPr>
+          <a:xfrm>
+            <a:off x="6035040" y="2103120"/>
+            <a:ext cx="5486400" cy="411480"/>
+          </a:xfrm>
+          <a:prstGeom prst="rect">
+            <a:avLst/>
+          </a:prstGeom>
+          <a:noFill/>
+        </p:spPr>
+        <p:txBody>
+          <a:bodyPr wrap="square" lIns="0" rIns="0" tIns="0" bIns="0">
+            <a:spAutoFit/>
+          </a:bodyPr>
+          <a:lstStyle/>
+          <a:p>
+            <a:pPr algn="l">
+              <a:lnSpc>
+                <a:spcPct val="125000"/>
+              </a:lnSpc>
+            </a:pPr>
+            <a:r>
+              <a:rPr sz="1500" b="0">
+                <a:solidFill>
+                  <a:srgbClr val="8B9AAF"/>
+                </a:solidFill>
+                <a:latin typeface="Apple SD Gothic Neo"/>
+              </a:rPr>
+              <a:t>전략 해시를 거래 전에 커밋</a:t>
+            </a:r>
+          </a:p>
+        </p:txBody>
+      </p:sp>
+      <p:sp>
+        <p:nvSpPr>
+          <p:cNvPr id="8" name="TextBox 7"/>
+          <p:cNvSpPr txBox="1"/>
+          <p:nvPr/>
+        </p:nvSpPr>
+        <p:spPr>
+          <a:xfrm>
+            <a:off x="914400" y="2624328"/>
+            <a:ext cx="731520" cy="411480"/>
+          </a:xfrm>
+          <a:prstGeom prst="rect">
+            <a:avLst/>
+          </a:prstGeom>
+          <a:noFill/>
+        </p:spPr>
+        <p:txBody>
+          <a:bodyPr wrap="square" lIns="0" rIns="0" tIns="0" bIns="0">
+            <a:spAutoFit/>
+          </a:bodyPr>
+          <a:lstStyle/>
+          <a:p>
+            <a:pPr algn="l">
+              <a:lnSpc>
+                <a:spcPct val="125000"/>
+              </a:lnSpc>
+            </a:pPr>
+            <a:r>
               <a:rPr sz="1900" b="1">
                 <a:solidFill>
+                  <a:srgbClr val="8B9AAF"/>
+                </a:solidFill>
+                <a:latin typeface="Apple SD Gothic Neo"/>
+              </a:rPr>
+              <a:t>2-3</a:t>
+            </a:r>
+          </a:p>
+        </p:txBody>
+      </p:sp>
+      <p:sp>
+        <p:nvSpPr>
+          <p:cNvPr id="9" name="TextBox 8"/>
+          <p:cNvSpPr txBox="1"/>
+          <p:nvPr/>
+        </p:nvSpPr>
+        <p:spPr>
+          <a:xfrm>
+            <a:off x="1691640" y="2624328"/>
+            <a:ext cx="4206240" cy="411480"/>
+          </a:xfrm>
+          <a:prstGeom prst="rect">
+            <a:avLst/>
+          </a:prstGeom>
+          <a:noFill/>
+        </p:spPr>
+        <p:txBody>
+          <a:bodyPr wrap="square" lIns="0" rIns="0" tIns="0" bIns="0">
+            <a:spAutoFit/>
+          </a:bodyPr>
+          <a:lstStyle/>
+          <a:p>
+            <a:pPr algn="l">
+              <a:lnSpc>
+                <a:spcPct val="125000"/>
+              </a:lnSpc>
+            </a:pPr>
+            <a:r>
+              <a:rPr sz="1900" b="0">
+                <a:solidFill>
+                  <a:srgbClr val="8B9AAF"/>
+                </a:solidFill>
+                <a:latin typeface="Apple SD Gothic Neo"/>
+              </a:rPr>
+              <a:t>없는 수익률 주장</a:t>
+            </a:r>
+          </a:p>
+        </p:txBody>
+      </p:sp>
+      <p:sp>
+        <p:nvSpPr>
+          <p:cNvPr id="10" name="TextBox 9"/>
+          <p:cNvSpPr txBox="1"/>
+          <p:nvPr/>
+        </p:nvSpPr>
+        <p:spPr>
+          <a:xfrm>
+            <a:off x="6035040" y="2670048"/>
+            <a:ext cx="5486400" cy="411480"/>
+          </a:xfrm>
+          <a:prstGeom prst="rect">
+            <a:avLst/>
+          </a:prstGeom>
+          <a:noFill/>
+        </p:spPr>
+        <p:txBody>
+          <a:bodyPr wrap="square" lIns="0" rIns="0" tIns="0" bIns="0">
+            <a:spAutoFit/>
+          </a:bodyPr>
+          <a:lstStyle/>
+          <a:p>
+            <a:pPr algn="l">
+              <a:lnSpc>
+                <a:spcPct val="125000"/>
+              </a:lnSpc>
+            </a:pPr>
+            <a:r>
+              <a:rPr sz="1500" b="0">
+                <a:solidFill>
+                  <a:srgbClr val="8B9AAF"/>
+                </a:solidFill>
+                <a:latin typeface="Apple SD Gothic Neo"/>
+              </a:rPr>
+              <a:t>수익률이 커밋된 거래 로그에서 나왔음을 증명</a:t>
+            </a:r>
+          </a:p>
+        </p:txBody>
+      </p:sp>
+      <p:sp>
+        <p:nvSpPr>
+          <p:cNvPr id="11" name="TextBox 10"/>
+          <p:cNvSpPr txBox="1"/>
+          <p:nvPr/>
+        </p:nvSpPr>
+        <p:spPr>
+          <a:xfrm>
+            <a:off x="914400" y="3191256"/>
+            <a:ext cx="731520" cy="411480"/>
+          </a:xfrm>
+          <a:prstGeom prst="rect">
+            <a:avLst/>
+          </a:prstGeom>
+          <a:noFill/>
+        </p:spPr>
+        <p:txBody>
+          <a:bodyPr wrap="square" lIns="0" rIns="0" tIns="0" bIns="0">
+            <a:spAutoFit/>
+          </a:bodyPr>
+          <a:lstStyle/>
+          <a:p>
+            <a:pPr algn="l">
+              <a:lnSpc>
+                <a:spcPct val="125000"/>
+              </a:lnSpc>
+            </a:pPr>
+            <a:r>
+              <a:rPr sz="1900" b="1">
+                <a:solidFill>
+                  <a:srgbClr val="8B9AAF"/>
+                </a:solidFill>
+                <a:latin typeface="Apple SD Gothic Neo"/>
+              </a:rPr>
+              <a:t>4</a:t>
+            </a:r>
+          </a:p>
+        </p:txBody>
+      </p:sp>
+      <p:sp>
+        <p:nvSpPr>
+          <p:cNvPr id="12" name="TextBox 11"/>
+          <p:cNvSpPr txBox="1"/>
+          <p:nvPr/>
+        </p:nvSpPr>
+        <p:spPr>
+          <a:xfrm>
+            <a:off x="1691640" y="3191256"/>
+            <a:ext cx="4206240" cy="411480"/>
+          </a:xfrm>
+          <a:prstGeom prst="rect">
+            <a:avLst/>
+          </a:prstGeom>
+          <a:noFill/>
+        </p:spPr>
+        <p:txBody>
+          <a:bodyPr wrap="square" lIns="0" rIns="0" tIns="0" bIns="0">
+            <a:spAutoFit/>
+          </a:bodyPr>
+          <a:lstStyle/>
+          <a:p>
+            <a:pPr algn="l">
+              <a:lnSpc>
+                <a:spcPct val="125000"/>
+              </a:lnSpc>
+            </a:pPr>
+            <a:r>
+              <a:rPr sz="1900" b="0">
+                <a:solidFill>
+                  <a:srgbClr val="8B9AAF"/>
+                </a:solidFill>
+                <a:latin typeface="Apple SD Gothic Neo"/>
+              </a:rPr>
+              <a:t>리스크 관리 과장</a:t>
+            </a:r>
+          </a:p>
+        </p:txBody>
+      </p:sp>
+      <p:sp>
+        <p:nvSpPr>
+          <p:cNvPr id="13" name="TextBox 12"/>
+          <p:cNvSpPr txBox="1"/>
+          <p:nvPr/>
+        </p:nvSpPr>
+        <p:spPr>
+          <a:xfrm>
+            <a:off x="6035040" y="3236976"/>
+            <a:ext cx="5486400" cy="411480"/>
+          </a:xfrm>
+          <a:prstGeom prst="rect">
+            <a:avLst/>
+          </a:prstGeom>
+          <a:noFill/>
+        </p:spPr>
+        <p:txBody>
+          <a:bodyPr wrap="square" lIns="0" rIns="0" tIns="0" bIns="0">
+            <a:spAutoFit/>
+          </a:bodyPr>
+          <a:lstStyle/>
+          <a:p>
+            <a:pPr algn="l">
+              <a:lnSpc>
+                <a:spcPct val="125000"/>
+              </a:lnSpc>
+            </a:pPr>
+            <a:r>
+              <a:rPr sz="1500" b="0">
+                <a:solidFill>
+                  <a:srgbClr val="8B9AAF"/>
+                </a:solidFill>
+                <a:latin typeface="Apple SD Gothic Neo"/>
+              </a:rPr>
+              <a:t>포지션 한도가 지켜졌음을 증명</a:t>
+            </a:r>
+          </a:p>
+        </p:txBody>
+      </p:sp>
+      <p:sp>
+        <p:nvSpPr>
+          <p:cNvPr id="14" name="TextBox 13"/>
+          <p:cNvSpPr txBox="1"/>
+          <p:nvPr/>
+        </p:nvSpPr>
+        <p:spPr>
+          <a:xfrm>
+            <a:off x="914400" y="3758184"/>
+            <a:ext cx="731520" cy="411480"/>
+          </a:xfrm>
+          <a:prstGeom prst="rect">
+            <a:avLst/>
+          </a:prstGeom>
+          <a:noFill/>
+        </p:spPr>
+        <p:txBody>
+          <a:bodyPr wrap="square" lIns="0" rIns="0" tIns="0" bIns="0">
+            <a:spAutoFit/>
+          </a:bodyPr>
+          <a:lstStyle/>
+          <a:p>
+            <a:pPr algn="l">
+              <a:lnSpc>
+                <a:spcPct val="125000"/>
+              </a:lnSpc>
+            </a:pPr>
+            <a:r>
+              <a:rPr sz="1900" b="1">
+                <a:solidFill>
                   <a:srgbClr val="5EE0B0"/>
                 </a:solidFill>
                 <a:latin typeface="Apple SD Gothic Neo"/>
               </a:rPr>
-              <a:t>체인에 오르는 것은 커밋과 증명뿐  ·  전략, 거래, 잔고는 체인 밖</a:t>
+              <a:t>5</a:t>
+            </a:r>
+          </a:p>
+        </p:txBody>
+      </p:sp>
+      <p:sp>
+        <p:nvSpPr>
+          <p:cNvPr id="15" name="TextBox 14"/>
+          <p:cNvSpPr txBox="1"/>
+          <p:nvPr/>
+        </p:nvSpPr>
+        <p:spPr>
+          <a:xfrm>
+            <a:off x="1691640" y="3758184"/>
+            <a:ext cx="4206240" cy="411480"/>
+          </a:xfrm>
+          <a:prstGeom prst="rect">
+            <a:avLst/>
+          </a:prstGeom>
+          <a:noFill/>
+        </p:spPr>
+        <p:txBody>
+          <a:bodyPr wrap="square" lIns="0" rIns="0" tIns="0" bIns="0">
+            <a:spAutoFit/>
+          </a:bodyPr>
+          <a:lstStyle/>
+          <a:p>
+            <a:pPr algn="l">
+              <a:lnSpc>
+                <a:spcPct val="125000"/>
+              </a:lnSpc>
+            </a:pPr>
+            <a:r>
+              <a:rPr sz="1900" b="1">
+                <a:solidFill>
+                  <a:srgbClr val="5EE0B0"/>
+                </a:solidFill>
+                <a:latin typeface="Apple SD Gothic Neo"/>
+              </a:rPr>
+              <a:t>손실 거래를 빼고 계산하기</a:t>
+            </a:r>
+          </a:p>
+        </p:txBody>
+      </p:sp>
+      <p:sp>
+        <p:nvSpPr>
+          <p:cNvPr id="16" name="TextBox 15"/>
+          <p:cNvSpPr txBox="1"/>
+          <p:nvPr/>
+        </p:nvSpPr>
+        <p:spPr>
+          <a:xfrm>
+            <a:off x="6035040" y="3803904"/>
+            <a:ext cx="5486400" cy="411480"/>
+          </a:xfrm>
+          <a:prstGeom prst="rect">
+            <a:avLst/>
+          </a:prstGeom>
+          <a:noFill/>
+        </p:spPr>
+        <p:txBody>
+          <a:bodyPr wrap="square" lIns="0" rIns="0" tIns="0" bIns="0">
+            <a:spAutoFit/>
+          </a:bodyPr>
+          <a:lstStyle/>
+          <a:p>
+            <a:pPr algn="l">
+              <a:lnSpc>
+                <a:spcPct val="125000"/>
+              </a:lnSpc>
+            </a:pPr>
+            <a:r>
+              <a:rPr sz="1500" b="0">
+                <a:solidFill>
+                  <a:srgbClr val="ECF1F7"/>
+                </a:solidFill>
+                <a:latin typeface="Apple SD Gothic Neo"/>
+              </a:rPr>
+              <a:t>수익률이 커밋된 계좌 잔고와 맞음을 증명</a:t>
+            </a:r>
+          </a:p>
+        </p:txBody>
+      </p:sp>
+      <p:sp>
+        <p:nvSpPr>
+          <p:cNvPr id="17" name="TextBox 16"/>
+          <p:cNvSpPr txBox="1"/>
+          <p:nvPr/>
+        </p:nvSpPr>
+        <p:spPr>
+          <a:xfrm>
+            <a:off x="914400" y="4325112"/>
+            <a:ext cx="731520" cy="411480"/>
+          </a:xfrm>
+          <a:prstGeom prst="rect">
+            <a:avLst/>
+          </a:prstGeom>
+          <a:noFill/>
+        </p:spPr>
+        <p:txBody>
+          <a:bodyPr wrap="square" lIns="0" rIns="0" tIns="0" bIns="0">
+            <a:spAutoFit/>
+          </a:bodyPr>
+          <a:lstStyle/>
+          <a:p>
+            <a:pPr algn="l">
+              <a:lnSpc>
+                <a:spcPct val="125000"/>
+              </a:lnSpc>
+            </a:pPr>
+            <a:r>
+              <a:rPr sz="1900" b="1">
+                <a:solidFill>
+                  <a:srgbClr val="5EE0B0"/>
+                </a:solidFill>
+                <a:latin typeface="Apple SD Gothic Neo"/>
+              </a:rPr>
+              <a:t>6</a:t>
+            </a:r>
+          </a:p>
+        </p:txBody>
+      </p:sp>
+      <p:sp>
+        <p:nvSpPr>
+          <p:cNvPr id="18" name="TextBox 17"/>
+          <p:cNvSpPr txBox="1"/>
+          <p:nvPr/>
+        </p:nvSpPr>
+        <p:spPr>
+          <a:xfrm>
+            <a:off x="1691640" y="4325112"/>
+            <a:ext cx="4206240" cy="411480"/>
+          </a:xfrm>
+          <a:prstGeom prst="rect">
+            <a:avLst/>
+          </a:prstGeom>
+          <a:noFill/>
+        </p:spPr>
+        <p:txBody>
+          <a:bodyPr wrap="square" lIns="0" rIns="0" tIns="0" bIns="0">
+            <a:spAutoFit/>
+          </a:bodyPr>
+          <a:lstStyle/>
+          <a:p>
+            <a:pPr algn="l">
+              <a:lnSpc>
+                <a:spcPct val="125000"/>
+              </a:lnSpc>
+            </a:pPr>
+            <a:r>
+              <a:rPr sz="1900" b="1">
+                <a:solidFill>
+                  <a:srgbClr val="5EE0B0"/>
+                </a:solidFill>
+                <a:latin typeface="Apple SD Gothic Neo"/>
+              </a:rPr>
+              <a:t>시행 횟수를 숨기기</a:t>
+            </a:r>
+          </a:p>
+        </p:txBody>
+      </p:sp>
+      <p:sp>
+        <p:nvSpPr>
+          <p:cNvPr id="19" name="TextBox 18"/>
+          <p:cNvSpPr txBox="1"/>
+          <p:nvPr/>
+        </p:nvSpPr>
+        <p:spPr>
+          <a:xfrm>
+            <a:off x="6035040" y="4370832"/>
+            <a:ext cx="5486400" cy="411480"/>
+          </a:xfrm>
+          <a:prstGeom prst="rect">
+            <a:avLst/>
+          </a:prstGeom>
+          <a:noFill/>
+        </p:spPr>
+        <p:txBody>
+          <a:bodyPr wrap="square" lIns="0" rIns="0" tIns="0" bIns="0">
+            <a:spAutoFit/>
+          </a:bodyPr>
+          <a:lstStyle/>
+          <a:p>
+            <a:pPr algn="l">
+              <a:lnSpc>
+                <a:spcPct val="125000"/>
+              </a:lnSpc>
+            </a:pPr>
+            <a:r>
+              <a:rPr sz="1500" b="0">
+                <a:solidFill>
+                  <a:srgbClr val="ECF1F7"/>
+                </a:solidFill>
+                <a:latin typeface="Apple SD Gothic Neo"/>
+              </a:rPr>
+              <a:t>시도한 전략 수 공개</a:t>
+            </a:r>
+          </a:p>
+        </p:txBody>
+      </p:sp>
+      <p:sp>
+        <p:nvSpPr>
+          <p:cNvPr id="20" name="TextBox 19"/>
+          <p:cNvSpPr txBox="1"/>
+          <p:nvPr/>
+        </p:nvSpPr>
+        <p:spPr>
+          <a:xfrm>
+            <a:off x="914400" y="4892040"/>
+            <a:ext cx="731520" cy="411480"/>
+          </a:xfrm>
+          <a:prstGeom prst="rect">
+            <a:avLst/>
+          </a:prstGeom>
+          <a:noFill/>
+        </p:spPr>
+        <p:txBody>
+          <a:bodyPr wrap="square" lIns="0" rIns="0" tIns="0" bIns="0">
+            <a:spAutoFit/>
+          </a:bodyPr>
+          <a:lstStyle/>
+          <a:p>
+            <a:pPr algn="l">
+              <a:lnSpc>
+                <a:spcPct val="125000"/>
+              </a:lnSpc>
+            </a:pPr>
+            <a:r>
+              <a:rPr sz="1900" b="1">
+                <a:solidFill>
+                  <a:srgbClr val="8B9AAF"/>
+                </a:solidFill>
+                <a:latin typeface="Apple SD Gothic Neo"/>
+              </a:rPr>
+              <a:t>7</a:t>
+            </a:r>
+          </a:p>
+        </p:txBody>
+      </p:sp>
+      <p:sp>
+        <p:nvSpPr>
+          <p:cNvPr id="21" name="TextBox 20"/>
+          <p:cNvSpPr txBox="1"/>
+          <p:nvPr/>
+        </p:nvSpPr>
+        <p:spPr>
+          <a:xfrm>
+            <a:off x="1691640" y="4892040"/>
+            <a:ext cx="4206240" cy="411480"/>
+          </a:xfrm>
+          <a:prstGeom prst="rect">
+            <a:avLst/>
+          </a:prstGeom>
+          <a:noFill/>
+        </p:spPr>
+        <p:txBody>
+          <a:bodyPr wrap="square" lIns="0" rIns="0" tIns="0" bIns="0">
+            <a:spAutoFit/>
+          </a:bodyPr>
+          <a:lstStyle/>
+          <a:p>
+            <a:pPr algn="l">
+              <a:lnSpc>
+                <a:spcPct val="125000"/>
+              </a:lnSpc>
+            </a:pPr>
+            <a:r>
+              <a:rPr sz="1900" b="0">
+                <a:solidFill>
+                  <a:srgbClr val="8B9AAF"/>
+                </a:solidFill>
+                <a:latin typeface="Apple SD Gothic Neo"/>
+              </a:rPr>
+              <a:t>NAV 자체를 지어내기</a:t>
+            </a:r>
+          </a:p>
+        </p:txBody>
+      </p:sp>
+      <p:sp>
+        <p:nvSpPr>
+          <p:cNvPr id="22" name="TextBox 21"/>
+          <p:cNvSpPr txBox="1"/>
+          <p:nvPr/>
+        </p:nvSpPr>
+        <p:spPr>
+          <a:xfrm>
+            <a:off x="6035040" y="4937760"/>
+            <a:ext cx="5486400" cy="411480"/>
+          </a:xfrm>
+          <a:prstGeom prst="rect">
+            <a:avLst/>
+          </a:prstGeom>
+          <a:noFill/>
+        </p:spPr>
+        <p:txBody>
+          <a:bodyPr wrap="square" lIns="0" rIns="0" tIns="0" bIns="0">
+            <a:spAutoFit/>
+          </a:bodyPr>
+          <a:lstStyle/>
+          <a:p>
+            <a:pPr algn="l">
+              <a:lnSpc>
+                <a:spcPct val="125000"/>
+              </a:lnSpc>
+            </a:pPr>
+            <a:r>
+              <a:rPr sz="1500" b="0">
+                <a:solidFill>
+                  <a:srgbClr val="8B9AAF"/>
+                </a:solidFill>
+                <a:latin typeface="Apple SD Gothic Neo"/>
+              </a:rPr>
+              <a:t>제3자의 잔고 증언</a:t>
+            </a:r>
+          </a:p>
+        </p:txBody>
+      </p:sp>
+      <p:sp>
+        <p:nvSpPr>
+          <p:cNvPr id="23" name="TextBox 22"/>
+          <p:cNvSpPr txBox="1"/>
+          <p:nvPr/>
+        </p:nvSpPr>
+        <p:spPr>
+          <a:xfrm>
+            <a:off x="914400" y="5760720"/>
+            <a:ext cx="10332720" cy="548640"/>
+          </a:xfrm>
+          <a:prstGeom prst="rect">
+            <a:avLst/>
+          </a:prstGeom>
+          <a:noFill/>
+        </p:spPr>
+        <p:txBody>
+          <a:bodyPr wrap="square" lIns="0" rIns="0" tIns="0" bIns="0">
+            <a:spAutoFit/>
+          </a:bodyPr>
+          <a:lstStyle/>
+          <a:p>
+            <a:pPr algn="l">
+              <a:lnSpc>
+                <a:spcPct val="125000"/>
+              </a:lnSpc>
+            </a:pPr>
+            <a:r>
+              <a:rPr sz="1700" b="0">
+                <a:solidFill>
+                  <a:srgbClr val="E8B45C"/>
+                </a:solidFill>
+                <a:latin typeface="Apple SD Gothic Neo"/>
+              </a:rPr>
+              <a:t>차별점은 5번과 6번  ·  Obscura, Proof of Alpha 는 과거 성과 인증까지, 시도 횟수는 다루지 않음</a:t>
             </a:r>
           </a:p>
         </p:txBody>
@@ -5907,7 +6515,7 @@
         </p:nvSpPr>
         <p:spPr>
           <a:xfrm>
-            <a:off x="914400" y="640080"/>
+            <a:off x="640080" y="411480"/>
             <a:ext cx="7315200" cy="320040"/>
           </a:xfrm>
           <a:prstGeom prst="rect">
@@ -5933,21 +6541,45 @@
                 </a:solidFill>
                 <a:latin typeface="Apple SD Gothic Neo"/>
               </a:rPr>
-              <a:t>회로 7개, 각각 막는 공격 하나</a:t>
-            </a:r>
-          </a:p>
-        </p:txBody>
-      </p:sp>
-      <p:sp>
-        <p:nvSpPr>
-          <p:cNvPr id="4" name="TextBox 3"/>
+              <a:t>회로 5 — 손실을 뺀 계산 불가</a:t>
+            </a:r>
+          </a:p>
+        </p:txBody>
+      </p:sp>
+      <p:pic>
+        <p:nvPicPr>
+          <p:cNvPr id="4" name="Picture 3" descr="nav.png"/>
+          <p:cNvPicPr>
+            <a:picLocks noChangeAspect="1"/>
+          </p:cNvPicPr>
+          <p:nvPr/>
+        </p:nvPicPr>
+        <p:blipFill>
+          <a:blip r:embed="rId2"/>
+          <a:stretch>
+            <a:fillRect/>
+          </a:stretch>
+        </p:blipFill>
+        <p:spPr>
+          <a:xfrm>
+            <a:off x="411480" y="914400"/>
+            <a:ext cx="11384280" cy="4590435"/>
+          </a:xfrm>
+          <a:prstGeom prst="rect">
+            <a:avLst/>
+          </a:prstGeom>
+        </p:spPr>
+      </p:pic>
+      <p:sp>
+        <p:nvSpPr>
+          <p:cNvPr id="5" name="TextBox 4"/>
           <p:cNvSpPr txBox="1"/>
           <p:nvPr/>
         </p:nvSpPr>
         <p:spPr>
           <a:xfrm>
-            <a:off x="914400" y="1051560"/>
-            <a:ext cx="10332720" cy="640080"/>
+            <a:off x="640080" y="5806440"/>
+            <a:ext cx="10972800" cy="457200"/>
           </a:xfrm>
           <a:prstGeom prst="rect">
             <a:avLst/>
@@ -5966,754 +6598,13 @@
               </a:lnSpc>
             </a:pPr>
             <a:r>
-              <a:rPr sz="3200" b="1">
-                <a:solidFill>
-                  <a:srgbClr val="ECF1F7"/>
-                </a:solidFill>
-                <a:latin typeface="Apple SD Gothic Neo"/>
-              </a:rPr>
-              <a:t>차단하는 공격 7가지</a:t>
-            </a:r>
-          </a:p>
-        </p:txBody>
-      </p:sp>
-      <p:sp>
-        <p:nvSpPr>
-          <p:cNvPr id="5" name="TextBox 4"/>
-          <p:cNvSpPr txBox="1"/>
-          <p:nvPr/>
-        </p:nvSpPr>
-        <p:spPr>
-          <a:xfrm>
-            <a:off x="914400" y="2057400"/>
-            <a:ext cx="731520" cy="411480"/>
-          </a:xfrm>
-          <a:prstGeom prst="rect">
-            <a:avLst/>
-          </a:prstGeom>
-          <a:noFill/>
-        </p:spPr>
-        <p:txBody>
-          <a:bodyPr wrap="square" lIns="0" rIns="0" tIns="0" bIns="0">
-            <a:spAutoFit/>
-          </a:bodyPr>
-          <a:lstStyle/>
-          <a:p>
-            <a:pPr algn="l">
-              <a:lnSpc>
-                <a:spcPct val="125000"/>
-              </a:lnSpc>
-            </a:pPr>
-            <a:r>
-              <a:rPr sz="1900" b="1">
-                <a:solidFill>
-                  <a:srgbClr val="8B9AAF"/>
-                </a:solidFill>
-                <a:latin typeface="Apple SD Gothic Neo"/>
-              </a:rPr>
-              <a:t>1</a:t>
-            </a:r>
-          </a:p>
-        </p:txBody>
-      </p:sp>
-      <p:sp>
-        <p:nvSpPr>
-          <p:cNvPr id="6" name="TextBox 5"/>
-          <p:cNvSpPr txBox="1"/>
-          <p:nvPr/>
-        </p:nvSpPr>
-        <p:spPr>
-          <a:xfrm>
-            <a:off x="1691640" y="2057400"/>
-            <a:ext cx="4206240" cy="411480"/>
-          </a:xfrm>
-          <a:prstGeom prst="rect">
-            <a:avLst/>
-          </a:prstGeom>
-          <a:noFill/>
-        </p:spPr>
-        <p:txBody>
-          <a:bodyPr wrap="square" lIns="0" rIns="0" tIns="0" bIns="0">
-            <a:spAutoFit/>
-          </a:bodyPr>
-          <a:lstStyle/>
-          <a:p>
-            <a:pPr algn="l">
-              <a:lnSpc>
-                <a:spcPct val="125000"/>
-              </a:lnSpc>
-            </a:pPr>
-            <a:r>
-              <a:rPr sz="1900" b="0">
-                <a:solidFill>
-                  <a:srgbClr val="8B9AAF"/>
-                </a:solidFill>
-                <a:latin typeface="Apple SD Gothic Neo"/>
-              </a:rPr>
-              <a:t>전략을 나중에 바꾸기</a:t>
-            </a:r>
-          </a:p>
-        </p:txBody>
-      </p:sp>
-      <p:sp>
-        <p:nvSpPr>
-          <p:cNvPr id="7" name="TextBox 6"/>
-          <p:cNvSpPr txBox="1"/>
-          <p:nvPr/>
-        </p:nvSpPr>
-        <p:spPr>
-          <a:xfrm>
-            <a:off x="6035040" y="2103120"/>
-            <a:ext cx="5486400" cy="411480"/>
-          </a:xfrm>
-          <a:prstGeom prst="rect">
-            <a:avLst/>
-          </a:prstGeom>
-          <a:noFill/>
-        </p:spPr>
-        <p:txBody>
-          <a:bodyPr wrap="square" lIns="0" rIns="0" tIns="0" bIns="0">
-            <a:spAutoFit/>
-          </a:bodyPr>
-          <a:lstStyle/>
-          <a:p>
-            <a:pPr algn="l">
-              <a:lnSpc>
-                <a:spcPct val="125000"/>
-              </a:lnSpc>
-            </a:pPr>
-            <a:r>
-              <a:rPr sz="1500" b="0">
-                <a:solidFill>
-                  <a:srgbClr val="8B9AAF"/>
-                </a:solidFill>
-                <a:latin typeface="Apple SD Gothic Neo"/>
-              </a:rPr>
-              <a:t>전략 해시를 거래 전에 커밋</a:t>
-            </a:r>
-          </a:p>
-        </p:txBody>
-      </p:sp>
-      <p:sp>
-        <p:nvSpPr>
-          <p:cNvPr id="8" name="TextBox 7"/>
-          <p:cNvSpPr txBox="1"/>
-          <p:nvPr/>
-        </p:nvSpPr>
-        <p:spPr>
-          <a:xfrm>
-            <a:off x="914400" y="2624328"/>
-            <a:ext cx="731520" cy="411480"/>
-          </a:xfrm>
-          <a:prstGeom prst="rect">
-            <a:avLst/>
-          </a:prstGeom>
-          <a:noFill/>
-        </p:spPr>
-        <p:txBody>
-          <a:bodyPr wrap="square" lIns="0" rIns="0" tIns="0" bIns="0">
-            <a:spAutoFit/>
-          </a:bodyPr>
-          <a:lstStyle/>
-          <a:p>
-            <a:pPr algn="l">
-              <a:lnSpc>
-                <a:spcPct val="125000"/>
-              </a:lnSpc>
-            </a:pPr>
-            <a:r>
-              <a:rPr sz="1900" b="1">
-                <a:solidFill>
-                  <a:srgbClr val="8B9AAF"/>
-                </a:solidFill>
-                <a:latin typeface="Apple SD Gothic Neo"/>
-              </a:rPr>
-              <a:t>2-3</a:t>
-            </a:r>
-          </a:p>
-        </p:txBody>
-      </p:sp>
-      <p:sp>
-        <p:nvSpPr>
-          <p:cNvPr id="9" name="TextBox 8"/>
-          <p:cNvSpPr txBox="1"/>
-          <p:nvPr/>
-        </p:nvSpPr>
-        <p:spPr>
-          <a:xfrm>
-            <a:off x="1691640" y="2624328"/>
-            <a:ext cx="4206240" cy="411480"/>
-          </a:xfrm>
-          <a:prstGeom prst="rect">
-            <a:avLst/>
-          </a:prstGeom>
-          <a:noFill/>
-        </p:spPr>
-        <p:txBody>
-          <a:bodyPr wrap="square" lIns="0" rIns="0" tIns="0" bIns="0">
-            <a:spAutoFit/>
-          </a:bodyPr>
-          <a:lstStyle/>
-          <a:p>
-            <a:pPr algn="l">
-              <a:lnSpc>
-                <a:spcPct val="125000"/>
-              </a:lnSpc>
-            </a:pPr>
-            <a:r>
-              <a:rPr sz="1900" b="0">
-                <a:solidFill>
-                  <a:srgbClr val="8B9AAF"/>
-                </a:solidFill>
-                <a:latin typeface="Apple SD Gothic Neo"/>
-              </a:rPr>
-              <a:t>없는 수익률 주장</a:t>
-            </a:r>
-          </a:p>
-        </p:txBody>
-      </p:sp>
-      <p:sp>
-        <p:nvSpPr>
-          <p:cNvPr id="10" name="TextBox 9"/>
-          <p:cNvSpPr txBox="1"/>
-          <p:nvPr/>
-        </p:nvSpPr>
-        <p:spPr>
-          <a:xfrm>
-            <a:off x="6035040" y="2670048"/>
-            <a:ext cx="5486400" cy="411480"/>
-          </a:xfrm>
-          <a:prstGeom prst="rect">
-            <a:avLst/>
-          </a:prstGeom>
-          <a:noFill/>
-        </p:spPr>
-        <p:txBody>
-          <a:bodyPr wrap="square" lIns="0" rIns="0" tIns="0" bIns="0">
-            <a:spAutoFit/>
-          </a:bodyPr>
-          <a:lstStyle/>
-          <a:p>
-            <a:pPr algn="l">
-              <a:lnSpc>
-                <a:spcPct val="125000"/>
-              </a:lnSpc>
-            </a:pPr>
-            <a:r>
-              <a:rPr sz="1500" b="0">
-                <a:solidFill>
-                  <a:srgbClr val="8B9AAF"/>
-                </a:solidFill>
-                <a:latin typeface="Apple SD Gothic Neo"/>
-              </a:rPr>
-              <a:t>수익률이 커밋된 거래 로그에서 나왔음을 증명</a:t>
-            </a:r>
-          </a:p>
-        </p:txBody>
-      </p:sp>
-      <p:sp>
-        <p:nvSpPr>
-          <p:cNvPr id="11" name="TextBox 10"/>
-          <p:cNvSpPr txBox="1"/>
-          <p:nvPr/>
-        </p:nvSpPr>
-        <p:spPr>
-          <a:xfrm>
-            <a:off x="914400" y="3191256"/>
-            <a:ext cx="731520" cy="411480"/>
-          </a:xfrm>
-          <a:prstGeom prst="rect">
-            <a:avLst/>
-          </a:prstGeom>
-          <a:noFill/>
-        </p:spPr>
-        <p:txBody>
-          <a:bodyPr wrap="square" lIns="0" rIns="0" tIns="0" bIns="0">
-            <a:spAutoFit/>
-          </a:bodyPr>
-          <a:lstStyle/>
-          <a:p>
-            <a:pPr algn="l">
-              <a:lnSpc>
-                <a:spcPct val="125000"/>
-              </a:lnSpc>
-            </a:pPr>
-            <a:r>
-              <a:rPr sz="1900" b="1">
-                <a:solidFill>
-                  <a:srgbClr val="8B9AAF"/>
-                </a:solidFill>
-                <a:latin typeface="Apple SD Gothic Neo"/>
-              </a:rPr>
-              <a:t>4</a:t>
-            </a:r>
-          </a:p>
-        </p:txBody>
-      </p:sp>
-      <p:sp>
-        <p:nvSpPr>
-          <p:cNvPr id="12" name="TextBox 11"/>
-          <p:cNvSpPr txBox="1"/>
-          <p:nvPr/>
-        </p:nvSpPr>
-        <p:spPr>
-          <a:xfrm>
-            <a:off x="1691640" y="3191256"/>
-            <a:ext cx="4206240" cy="411480"/>
-          </a:xfrm>
-          <a:prstGeom prst="rect">
-            <a:avLst/>
-          </a:prstGeom>
-          <a:noFill/>
-        </p:spPr>
-        <p:txBody>
-          <a:bodyPr wrap="square" lIns="0" rIns="0" tIns="0" bIns="0">
-            <a:spAutoFit/>
-          </a:bodyPr>
-          <a:lstStyle/>
-          <a:p>
-            <a:pPr algn="l">
-              <a:lnSpc>
-                <a:spcPct val="125000"/>
-              </a:lnSpc>
-            </a:pPr>
-            <a:r>
-              <a:rPr sz="1900" b="0">
-                <a:solidFill>
-                  <a:srgbClr val="8B9AAF"/>
-                </a:solidFill>
-                <a:latin typeface="Apple SD Gothic Neo"/>
-              </a:rPr>
-              <a:t>리스크 관리 과장</a:t>
-            </a:r>
-          </a:p>
-        </p:txBody>
-      </p:sp>
-      <p:sp>
-        <p:nvSpPr>
-          <p:cNvPr id="13" name="TextBox 12"/>
-          <p:cNvSpPr txBox="1"/>
-          <p:nvPr/>
-        </p:nvSpPr>
-        <p:spPr>
-          <a:xfrm>
-            <a:off x="6035040" y="3236976"/>
-            <a:ext cx="5486400" cy="411480"/>
-          </a:xfrm>
-          <a:prstGeom prst="rect">
-            <a:avLst/>
-          </a:prstGeom>
-          <a:noFill/>
-        </p:spPr>
-        <p:txBody>
-          <a:bodyPr wrap="square" lIns="0" rIns="0" tIns="0" bIns="0">
-            <a:spAutoFit/>
-          </a:bodyPr>
-          <a:lstStyle/>
-          <a:p>
-            <a:pPr algn="l">
-              <a:lnSpc>
-                <a:spcPct val="125000"/>
-              </a:lnSpc>
-            </a:pPr>
-            <a:r>
-              <a:rPr sz="1500" b="0">
-                <a:solidFill>
-                  <a:srgbClr val="8B9AAF"/>
-                </a:solidFill>
-                <a:latin typeface="Apple SD Gothic Neo"/>
-              </a:rPr>
-              <a:t>포지션 한도가 지켜졌음을 증명</a:t>
-            </a:r>
-          </a:p>
-        </p:txBody>
-      </p:sp>
-      <p:sp>
-        <p:nvSpPr>
-          <p:cNvPr id="14" name="TextBox 13"/>
-          <p:cNvSpPr txBox="1"/>
-          <p:nvPr/>
-        </p:nvSpPr>
-        <p:spPr>
-          <a:xfrm>
-            <a:off x="914400" y="3758184"/>
-            <a:ext cx="731520" cy="411480"/>
-          </a:xfrm>
-          <a:prstGeom prst="rect">
-            <a:avLst/>
-          </a:prstGeom>
-          <a:noFill/>
-        </p:spPr>
-        <p:txBody>
-          <a:bodyPr wrap="square" lIns="0" rIns="0" tIns="0" bIns="0">
-            <a:spAutoFit/>
-          </a:bodyPr>
-          <a:lstStyle/>
-          <a:p>
-            <a:pPr algn="l">
-              <a:lnSpc>
-                <a:spcPct val="125000"/>
-              </a:lnSpc>
-            </a:pPr>
-            <a:r>
-              <a:rPr sz="1900" b="1">
+              <a:rPr sz="1800" b="1">
                 <a:solidFill>
                   <a:srgbClr val="5EE0B0"/>
                 </a:solidFill>
                 <a:latin typeface="Apple SD Gothic Neo"/>
               </a:rPr>
-              <a:t>5</a:t>
-            </a:r>
-          </a:p>
-        </p:txBody>
-      </p:sp>
-      <p:sp>
-        <p:nvSpPr>
-          <p:cNvPr id="15" name="TextBox 14"/>
-          <p:cNvSpPr txBox="1"/>
-          <p:nvPr/>
-        </p:nvSpPr>
-        <p:spPr>
-          <a:xfrm>
-            <a:off x="1691640" y="3758184"/>
-            <a:ext cx="4206240" cy="411480"/>
-          </a:xfrm>
-          <a:prstGeom prst="rect">
-            <a:avLst/>
-          </a:prstGeom>
-          <a:noFill/>
-        </p:spPr>
-        <p:txBody>
-          <a:bodyPr wrap="square" lIns="0" rIns="0" tIns="0" bIns="0">
-            <a:spAutoFit/>
-          </a:bodyPr>
-          <a:lstStyle/>
-          <a:p>
-            <a:pPr algn="l">
-              <a:lnSpc>
-                <a:spcPct val="125000"/>
-              </a:lnSpc>
-            </a:pPr>
-            <a:r>
-              <a:rPr sz="1900" b="1">
-                <a:solidFill>
-                  <a:srgbClr val="5EE0B0"/>
-                </a:solidFill>
-                <a:latin typeface="Apple SD Gothic Neo"/>
-              </a:rPr>
-              <a:t>손실 거래를 빼고 계산하기</a:t>
-            </a:r>
-          </a:p>
-        </p:txBody>
-      </p:sp>
-      <p:sp>
-        <p:nvSpPr>
-          <p:cNvPr id="16" name="TextBox 15"/>
-          <p:cNvSpPr txBox="1"/>
-          <p:nvPr/>
-        </p:nvSpPr>
-        <p:spPr>
-          <a:xfrm>
-            <a:off x="6035040" y="3803904"/>
-            <a:ext cx="5486400" cy="411480"/>
-          </a:xfrm>
-          <a:prstGeom prst="rect">
-            <a:avLst/>
-          </a:prstGeom>
-          <a:noFill/>
-        </p:spPr>
-        <p:txBody>
-          <a:bodyPr wrap="square" lIns="0" rIns="0" tIns="0" bIns="0">
-            <a:spAutoFit/>
-          </a:bodyPr>
-          <a:lstStyle/>
-          <a:p>
-            <a:pPr algn="l">
-              <a:lnSpc>
-                <a:spcPct val="125000"/>
-              </a:lnSpc>
-            </a:pPr>
-            <a:r>
-              <a:rPr sz="1500" b="0">
-                <a:solidFill>
-                  <a:srgbClr val="ECF1F7"/>
-                </a:solidFill>
-                <a:latin typeface="Apple SD Gothic Neo"/>
-              </a:rPr>
-              <a:t>수익률이 커밋된 계좌 잔고와 맞음을 증명</a:t>
-            </a:r>
-          </a:p>
-        </p:txBody>
-      </p:sp>
-      <p:sp>
-        <p:nvSpPr>
-          <p:cNvPr id="17" name="TextBox 16"/>
-          <p:cNvSpPr txBox="1"/>
-          <p:nvPr/>
-        </p:nvSpPr>
-        <p:spPr>
-          <a:xfrm>
-            <a:off x="914400" y="4325112"/>
-            <a:ext cx="731520" cy="411480"/>
-          </a:xfrm>
-          <a:prstGeom prst="rect">
-            <a:avLst/>
-          </a:prstGeom>
-          <a:noFill/>
-        </p:spPr>
-        <p:txBody>
-          <a:bodyPr wrap="square" lIns="0" rIns="0" tIns="0" bIns="0">
-            <a:spAutoFit/>
-          </a:bodyPr>
-          <a:lstStyle/>
-          <a:p>
-            <a:pPr algn="l">
-              <a:lnSpc>
-                <a:spcPct val="125000"/>
-              </a:lnSpc>
-            </a:pPr>
-            <a:r>
-              <a:rPr sz="1900" b="1">
-                <a:solidFill>
-                  <a:srgbClr val="5EE0B0"/>
-                </a:solidFill>
-                <a:latin typeface="Apple SD Gothic Neo"/>
-              </a:rPr>
-              <a:t>6</a:t>
-            </a:r>
-          </a:p>
-        </p:txBody>
-      </p:sp>
-      <p:sp>
-        <p:nvSpPr>
-          <p:cNvPr id="18" name="TextBox 17"/>
-          <p:cNvSpPr txBox="1"/>
-          <p:nvPr/>
-        </p:nvSpPr>
-        <p:spPr>
-          <a:xfrm>
-            <a:off x="1691640" y="4325112"/>
-            <a:ext cx="4206240" cy="411480"/>
-          </a:xfrm>
-          <a:prstGeom prst="rect">
-            <a:avLst/>
-          </a:prstGeom>
-          <a:noFill/>
-        </p:spPr>
-        <p:txBody>
-          <a:bodyPr wrap="square" lIns="0" rIns="0" tIns="0" bIns="0">
-            <a:spAutoFit/>
-          </a:bodyPr>
-          <a:lstStyle/>
-          <a:p>
-            <a:pPr algn="l">
-              <a:lnSpc>
-                <a:spcPct val="125000"/>
-              </a:lnSpc>
-            </a:pPr>
-            <a:r>
-              <a:rPr sz="1900" b="1">
-                <a:solidFill>
-                  <a:srgbClr val="5EE0B0"/>
-                </a:solidFill>
-                <a:latin typeface="Apple SD Gothic Neo"/>
-              </a:rPr>
-              <a:t>시행 횟수를 숨기기</a:t>
-            </a:r>
-          </a:p>
-        </p:txBody>
-      </p:sp>
-      <p:sp>
-        <p:nvSpPr>
-          <p:cNvPr id="19" name="TextBox 18"/>
-          <p:cNvSpPr txBox="1"/>
-          <p:nvPr/>
-        </p:nvSpPr>
-        <p:spPr>
-          <a:xfrm>
-            <a:off x="6035040" y="4370832"/>
-            <a:ext cx="5486400" cy="411480"/>
-          </a:xfrm>
-          <a:prstGeom prst="rect">
-            <a:avLst/>
-          </a:prstGeom>
-          <a:noFill/>
-        </p:spPr>
-        <p:txBody>
-          <a:bodyPr wrap="square" lIns="0" rIns="0" tIns="0" bIns="0">
-            <a:spAutoFit/>
-          </a:bodyPr>
-          <a:lstStyle/>
-          <a:p>
-            <a:pPr algn="l">
-              <a:lnSpc>
-                <a:spcPct val="125000"/>
-              </a:lnSpc>
-            </a:pPr>
-            <a:r>
-              <a:rPr sz="1500" b="0">
-                <a:solidFill>
-                  <a:srgbClr val="ECF1F7"/>
-                </a:solidFill>
-                <a:latin typeface="Apple SD Gothic Neo"/>
-              </a:rPr>
-              <a:t>시도한 전략 수 공개</a:t>
-            </a:r>
-          </a:p>
-        </p:txBody>
-      </p:sp>
-      <p:sp>
-        <p:nvSpPr>
-          <p:cNvPr id="20" name="TextBox 19"/>
-          <p:cNvSpPr txBox="1"/>
-          <p:nvPr/>
-        </p:nvSpPr>
-        <p:spPr>
-          <a:xfrm>
-            <a:off x="914400" y="4892040"/>
-            <a:ext cx="731520" cy="411480"/>
-          </a:xfrm>
-          <a:prstGeom prst="rect">
-            <a:avLst/>
-          </a:prstGeom>
-          <a:noFill/>
-        </p:spPr>
-        <p:txBody>
-          <a:bodyPr wrap="square" lIns="0" rIns="0" tIns="0" bIns="0">
-            <a:spAutoFit/>
-          </a:bodyPr>
-          <a:lstStyle/>
-          <a:p>
-            <a:pPr algn="l">
-              <a:lnSpc>
-                <a:spcPct val="125000"/>
-              </a:lnSpc>
-            </a:pPr>
-            <a:r>
-              <a:rPr sz="1900" b="1">
-                <a:solidFill>
-                  <a:srgbClr val="8B9AAF"/>
-                </a:solidFill>
-                <a:latin typeface="Apple SD Gothic Neo"/>
-              </a:rPr>
-              <a:t>7</a:t>
-            </a:r>
-          </a:p>
-        </p:txBody>
-      </p:sp>
-      <p:sp>
-        <p:nvSpPr>
-          <p:cNvPr id="21" name="TextBox 20"/>
-          <p:cNvSpPr txBox="1"/>
-          <p:nvPr/>
-        </p:nvSpPr>
-        <p:spPr>
-          <a:xfrm>
-            <a:off x="1691640" y="4892040"/>
-            <a:ext cx="4206240" cy="411480"/>
-          </a:xfrm>
-          <a:prstGeom prst="rect">
-            <a:avLst/>
-          </a:prstGeom>
-          <a:noFill/>
-        </p:spPr>
-        <p:txBody>
-          <a:bodyPr wrap="square" lIns="0" rIns="0" tIns="0" bIns="0">
-            <a:spAutoFit/>
-          </a:bodyPr>
-          <a:lstStyle/>
-          <a:p>
-            <a:pPr algn="l">
-              <a:lnSpc>
-                <a:spcPct val="125000"/>
-              </a:lnSpc>
-            </a:pPr>
-            <a:r>
-              <a:rPr sz="1900" b="0">
-                <a:solidFill>
-                  <a:srgbClr val="8B9AAF"/>
-                </a:solidFill>
-                <a:latin typeface="Apple SD Gothic Neo"/>
-              </a:rPr>
-              <a:t>NAV 자체를 지어내기</a:t>
-            </a:r>
-          </a:p>
-        </p:txBody>
-      </p:sp>
-      <p:sp>
-        <p:nvSpPr>
-          <p:cNvPr id="22" name="TextBox 21"/>
-          <p:cNvSpPr txBox="1"/>
-          <p:nvPr/>
-        </p:nvSpPr>
-        <p:spPr>
-          <a:xfrm>
-            <a:off x="6035040" y="4937760"/>
-            <a:ext cx="5486400" cy="411480"/>
-          </a:xfrm>
-          <a:prstGeom prst="rect">
-            <a:avLst/>
-          </a:prstGeom>
-          <a:noFill/>
-        </p:spPr>
-        <p:txBody>
-          <a:bodyPr wrap="square" lIns="0" rIns="0" tIns="0" bIns="0">
-            <a:spAutoFit/>
-          </a:bodyPr>
-          <a:lstStyle/>
-          <a:p>
-            <a:pPr algn="l">
-              <a:lnSpc>
-                <a:spcPct val="125000"/>
-              </a:lnSpc>
-            </a:pPr>
-            <a:r>
-              <a:rPr sz="1500" b="0">
-                <a:solidFill>
-                  <a:srgbClr val="8B9AAF"/>
-                </a:solidFill>
-                <a:latin typeface="Apple SD Gothic Neo"/>
-              </a:rPr>
-              <a:t>제3자의 잔고 증언</a:t>
-            </a:r>
-          </a:p>
-        </p:txBody>
-      </p:sp>
-      <p:sp>
-        <p:nvSpPr>
-          <p:cNvPr id="23" name="TextBox 22"/>
-          <p:cNvSpPr txBox="1"/>
-          <p:nvPr/>
-        </p:nvSpPr>
-        <p:spPr>
-          <a:xfrm>
-            <a:off x="914400" y="5760720"/>
-            <a:ext cx="10332720" cy="548640"/>
-          </a:xfrm>
-          <a:prstGeom prst="rect">
-            <a:avLst/>
-          </a:prstGeom>
-          <a:noFill/>
-        </p:spPr>
-        <p:txBody>
-          <a:bodyPr wrap="square" lIns="0" rIns="0" tIns="0" bIns="0">
-            <a:spAutoFit/>
-          </a:bodyPr>
-          <a:lstStyle/>
-          <a:p>
-            <a:pPr algn="l">
-              <a:lnSpc>
-                <a:spcPct val="125000"/>
-              </a:lnSpc>
-            </a:pPr>
-            <a:r>
-              <a:rPr sz="1700" b="0">
-                <a:solidFill>
-                  <a:srgbClr val="E8B45C"/>
-                </a:solidFill>
-                <a:latin typeface="Apple SD Gothic Neo"/>
-              </a:rPr>
-              <a:t>차별점은 5번과 6번  ·  Obscura, Proof of Alpha 는 과거 성과 인증까지, 시도 횟수는 다루지 않음</a:t>
+              <a:t>부풀린 주장 3건 거부  ·  실제 성과 그대로인 주장 1건 통과</a:t>
             </a:r>
           </a:p>
         </p:txBody>
@@ -6788,7 +6679,7 @@
         </p:nvSpPr>
         <p:spPr>
           <a:xfrm>
-            <a:off x="640080" y="411480"/>
+            <a:off x="914400" y="731520"/>
             <a:ext cx="7315200" cy="320040"/>
           </a:xfrm>
           <a:prstGeom prst="rect">
@@ -6814,14 +6705,108 @@
                 </a:solidFill>
                 <a:latin typeface="Apple SD Gothic Neo"/>
               </a:rPr>
-              <a:t>회로 5 — 손실을 뺀 계산 불가</a:t>
+              <a:t>Midnight 활용</a:t>
+            </a:r>
+          </a:p>
+        </p:txBody>
+      </p:sp>
+      <p:sp>
+        <p:nvSpPr>
+          <p:cNvPr id="4" name="TextBox 3"/>
+          <p:cNvSpPr txBox="1"/>
+          <p:nvPr/>
+        </p:nvSpPr>
+        <p:spPr>
+          <a:xfrm>
+            <a:off x="914400" y="1143000"/>
+            <a:ext cx="10332720" cy="1280160"/>
+          </a:xfrm>
+          <a:prstGeom prst="rect">
+            <a:avLst/>
+          </a:prstGeom>
+          <a:noFill/>
+        </p:spPr>
+        <p:txBody>
+          <a:bodyPr wrap="square" lIns="0" rIns="0" tIns="0" bIns="0">
+            <a:spAutoFit/>
+          </a:bodyPr>
+          <a:lstStyle/>
+          <a:p>
+            <a:pPr algn="l">
+              <a:lnSpc>
+                <a:spcPct val="125000"/>
+              </a:lnSpc>
+            </a:pPr>
+            <a:r>
+              <a:rPr sz="3400" b="1">
+                <a:solidFill>
+                  <a:srgbClr val="ECF1F7"/>
+                </a:solidFill>
+                <a:latin typeface="Apple SD Gothic Neo"/>
+              </a:rPr>
+              <a:t>타입 검사가 강제하는</a:t>
+            </a:r>
+          </a:p>
+          <a:p>
+            <a:pPr algn="l">
+              <a:lnSpc>
+                <a:spcPct val="125000"/>
+              </a:lnSpc>
+            </a:pPr>
+            <a:r>
+              <a:rPr sz="3400" b="1">
+                <a:solidFill>
+                  <a:srgbClr val="ECF1F7"/>
+                </a:solidFill>
+                <a:latin typeface="Apple SD Gothic Neo"/>
+              </a:rPr>
+              <a:t>프라이버시</a:t>
+            </a:r>
+          </a:p>
+        </p:txBody>
+      </p:sp>
+      <p:sp>
+        <p:nvSpPr>
+          <p:cNvPr id="5" name="TextBox 4"/>
+          <p:cNvSpPr txBox="1"/>
+          <p:nvPr/>
+        </p:nvSpPr>
+        <p:spPr>
+          <a:xfrm>
+            <a:off x="914400" y="2606040"/>
+            <a:ext cx="10332720" cy="365760"/>
+          </a:xfrm>
+          <a:prstGeom prst="rect">
+            <a:avLst/>
+          </a:prstGeom>
+          <a:noFill/>
+        </p:spPr>
+        <p:txBody>
+          <a:bodyPr wrap="square" lIns="0" rIns="0" tIns="0" bIns="0">
+            <a:spAutoFit/>
+          </a:bodyPr>
+          <a:lstStyle/>
+          <a:p>
+            <a:pPr algn="l">
+              <a:lnSpc>
+                <a:spcPct val="125000"/>
+              </a:lnSpc>
+            </a:pPr>
+            <a:r>
+              <a:rPr sz="1600" b="0">
+                <a:solidFill>
+                  <a:srgbClr val="8B9AAF"/>
+                </a:solidFill>
+                <a:latin typeface="Apple SD Gothic Neo"/>
+              </a:rPr>
+              <a:t>disclose() 하나를 뺐을 때의 컴파일 결과</a:t>
             </a:r>
           </a:p>
         </p:txBody>
       </p:sp>
       <p:pic>
         <p:nvPicPr>
-          <p:cNvPr id="4" name="Picture 3" descr="nav.png"/>
+          <p:cNvPr id="6" name="Picture 5" descr="cap-disclose.png"/>
           <p:cNvPicPr>
             <a:picLocks noChangeAspect="1"/>
           </p:cNvPicPr>
@@ -6835,8 +6820,8 @@
         </p:blipFill>
         <p:spPr>
           <a:xfrm>
-            <a:off x="411480" y="914400"/>
-            <a:ext cx="11384280" cy="4590435"/>
+            <a:off x="914400" y="2971800"/>
+            <a:ext cx="9692640" cy="2520086"/>
           </a:xfrm>
           <a:prstGeom prst="rect">
             <a:avLst/>
@@ -6845,14 +6830,14 @@
       </p:pic>
       <p:sp>
         <p:nvSpPr>
-          <p:cNvPr id="5" name="TextBox 4"/>
+          <p:cNvPr id="7" name="TextBox 6"/>
           <p:cNvSpPr txBox="1"/>
           <p:nvPr/>
         </p:nvSpPr>
         <p:spPr>
           <a:xfrm>
-            <a:off x="640080" y="5806440"/>
-            <a:ext cx="10972800" cy="457200"/>
+            <a:off x="914400" y="5760720"/>
+            <a:ext cx="10332720" cy="457200"/>
           </a:xfrm>
           <a:prstGeom prst="rect">
             <a:avLst/>
@@ -6871,13 +6856,13 @@
               </a:lnSpc>
             </a:pPr>
             <a:r>
-              <a:rPr sz="1800" b="1">
+              <a:rPr sz="1700" b="0">
                 <a:solidFill>
                   <a:srgbClr val="5EE0B0"/>
                 </a:solidFill>
                 <a:latin typeface="Apple SD Gothic Neo"/>
               </a:rPr>
-              <a:t>부풀린 주장 3건 거부  ·  실제 성과 그대로인 주장 1건 통과</a:t>
+              <a:t>파일, 줄, 프로그램 경로까지 지목  ·  개발 중 이렇게 잡힌 누락 2건</a:t>
             </a:r>
           </a:p>
         </p:txBody>

--- a/deck/proof-of-track-record-talk.pptx
+++ b/deck/proof-of-track-record-talk.pptx
@@ -4462,8 +4462,8 @@
         </p:blipFill>
         <p:spPr>
           <a:xfrm>
-            <a:off x="539953" y="868680"/>
-            <a:ext cx="11111788" cy="4480560"/>
+            <a:off x="936802" y="868680"/>
+            <a:ext cx="10318089" cy="4160520"/>
           </a:xfrm>
           <a:prstGeom prst="rect">
             <a:avLst/>
@@ -4478,8 +4478,8 @@
         </p:nvSpPr>
         <p:spPr>
           <a:xfrm>
-            <a:off x="640080" y="5486400"/>
-            <a:ext cx="10972800" cy="411480"/>
+            <a:off x="640080" y="5212080"/>
+            <a:ext cx="10972800" cy="457200"/>
           </a:xfrm>
           <a:prstGeom prst="rect">
             <a:avLst/>
@@ -4504,7 +4504,7 @@
                 </a:solidFill>
                 <a:latin typeface="Apple SD Gothic Neo"/>
               </a:rPr>
-              <a:t>생존 편향 하나 제거에 사라진 연 9.15%p  ·  조작 없음, 다시 돌릴 수 있었을 뿐</a:t>
+              <a:t>생존 편향 하나 제거에 사라진 연 9.15%p</a:t>
             </a:r>
           </a:p>
         </p:txBody>
@@ -4517,8 +4517,8 @@
         </p:nvSpPr>
         <p:spPr>
           <a:xfrm>
-            <a:off x="640080" y="5989320"/>
-            <a:ext cx="10972800" cy="457200"/>
+            <a:off x="640080" y="5715000"/>
+            <a:ext cx="10972800" cy="411480"/>
           </a:xfrm>
           <a:prstGeom prst="rect">
             <a:avLst/>
@@ -4537,13 +4537,52 @@
               </a:lnSpc>
             </a:pPr>
             <a:r>
+              <a:rPr sz="1700" b="0">
+                <a:solidFill>
+                  <a:srgbClr val="8B9AAF"/>
+                </a:solidFill>
+                <a:latin typeface="Apple SD Gothic Neo"/>
+              </a:rPr>
+              <a:t>조작 없음  ·  다시 돌릴 수 있었을 뿐</a:t>
+            </a:r>
+          </a:p>
+        </p:txBody>
+      </p:sp>
+      <p:sp>
+        <p:nvSpPr>
+          <p:cNvPr id="7" name="TextBox 6"/>
+          <p:cNvSpPr txBox="1"/>
+          <p:nvPr/>
+        </p:nvSpPr>
+        <p:spPr>
+          <a:xfrm>
+            <a:off x="640080" y="6126480"/>
+            <a:ext cx="10972800" cy="411480"/>
+          </a:xfrm>
+          <a:prstGeom prst="rect">
+            <a:avLst/>
+          </a:prstGeom>
+          <a:noFill/>
+        </p:spPr>
+        <p:txBody>
+          <a:bodyPr wrap="square" lIns="0" rIns="0" tIns="0" bIns="0">
+            <a:spAutoFit/>
+          </a:bodyPr>
+          <a:lstStyle/>
+          <a:p>
+            <a:pPr algn="l">
+              <a:lnSpc>
+                <a:spcPct val="125000"/>
+              </a:lnSpc>
+            </a:pPr>
+            <a:r>
               <a:rPr sz="1600" b="0">
                 <a:solidFill>
                   <a:srgbClr val="8B9AAF"/>
                 </a:solidFill>
                 <a:latin typeface="Apple SD Gothic Neo"/>
               </a:rPr>
-              <a:t>"열 개 돌려 제일 잘 된 하나" 도 같은 구조  —  진짜 숫자로 만들어지는 거짓말, 고른 흔적은 어디에도 없음</a:t>
+              <a:t>"열 개 돌려 제일 잘 된 하나" 도 같은 구조  —  고른 흔적은 어디에도 없음</a:t>
             </a:r>
           </a:p>
         </p:txBody>

--- a/deck/proof-of-track-record-talk.pptx
+++ b/deck/proof-of-track-record-talk.pptx
@@ -3535,7 +3535,7 @@
                 </a:solidFill>
                 <a:latin typeface="Apple SD Gothic Neo"/>
               </a:rPr>
-              <a:t>증언된 값은 실제 바이낸스 선물 계좌 잔고</a:t>
+              <a:t>공증된 값은 실제 바이낸스 선물 계좌 잔고</a:t>
             </a:r>
           </a:p>
           <a:p>
@@ -3918,7 +3918,7 @@
                 </a:solidFill>
                 <a:latin typeface="Apple SD Gothic Neo"/>
               </a:rPr>
-              <a:t>계정 없이 1초 안에 직접 확인 가능  —  테스트 28개 · 회로 5 시연 · 증언 검증</a:t>
+              <a:t>계정 없이 1초 안에 직접 확인 가능  —  테스트 28개 · 회로 5 시연 · 공증 서명 검증</a:t>
             </a:r>
           </a:p>
         </p:txBody>
@@ -6440,7 +6440,7 @@
                 </a:solidFill>
                 <a:latin typeface="Apple SD Gothic Neo"/>
               </a:rPr>
-              <a:t>제3자의 잔고 증언</a:t>
+              <a:t>제3자의 잔고 공증</a:t>
             </a:r>
           </a:p>
         </p:txBody>
